--- a/6th Semester/Level-3, Semester-II/CCE 323  Optical Fiber Communication/Muradul Boshir/Physical limitations of signal conversion 31-3-26.pptx
+++ b/6th Semester/Level-3, Semester-II/CCE 323  Optical Fiber Communication/Muradul Boshir/Physical limitations of signal conversion 31-3-26.pptx
@@ -1,16 +1,19 @@
 
 <file path=ppt/presentation.xml><?xml version="1.0" encoding="utf-8"?>
-<p:presentation xmlns:a="http://schemas.openxmlformats.org/drawingml/2006/main" xmlns:r="http://schemas.openxmlformats.org/officeDocument/2006/relationships" xmlns:p="http://schemas.openxmlformats.org/presentationml/2006/main" saveSubsetFonts="1">
+<p:presentation xmlns:a="http://schemas.openxmlformats.org/drawingml/2006/main" xmlns:r="http://schemas.openxmlformats.org/officeDocument/2006/relationships" xmlns:p="http://schemas.openxmlformats.org/presentationml/2006/main" xmlns:m="http://schemas.openxmlformats.org/officeDocument/2006/math" xmlns:w="http://schemas.openxmlformats.org/wordprocessingml/2006/main" saveSubsetFonts="1">
   <p:sldMasterIdLst>
     <p:sldMasterId id="2147483648" r:id="rId1"/>
   </p:sldMasterIdLst>
+  <p:notesMasterIdLst>
+    <p:notesMasterId r:id="rId10"/>
+  </p:notesMasterIdLst>
   <p:sldIdLst>
-    <p:sldId id="256" r:id="rId2"/>
-    <p:sldId id="257" r:id="rId3"/>
-    <p:sldId id="258" r:id="rId4"/>
-    <p:sldId id="259" r:id="rId5"/>
-    <p:sldId id="260" r:id="rId6"/>
-    <p:sldId id="261" r:id="rId7"/>
+    <p:sldId id="256" r:id="rId4"/>
+    <p:sldId id="257" r:id="rId5"/>
+    <p:sldId id="258" r:id="rId6"/>
+    <p:sldId id="259" r:id="rId7"/>
+    <p:sldId id="260" r:id="rId8"/>
+    <p:sldId id="261" r:id="rId9"/>
   </p:sldIdLst>
   <p:sldSz cx="12192000" cy="6858000"/>
   <p:notesSz cx="6858000" cy="9144000"/>
@@ -18,8 +21,8 @@
     <a:defPPr>
       <a:defRPr lang="en-US"/>
     </a:defPPr>
-    <a:lvl1pPr marL="0" algn="l" defTabSz="914400" rtl="0" eaLnBrk="1" latinLnBrk="0" hangingPunct="1">
-      <a:defRPr sz="1800" kern="1200">
+    <a:lvl1pPr marL="0" algn="l" defTabSz="914400" rtl="0">
+      <a:defRPr sz="1800">
         <a:solidFill>
           <a:schemeClr val="tx1"/>
         </a:solidFill>
@@ -28,8 +31,8 @@
         <a:cs typeface="+mn-cs"/>
       </a:defRPr>
     </a:lvl1pPr>
-    <a:lvl2pPr marL="457200" algn="l" defTabSz="914400" rtl="0" eaLnBrk="1" latinLnBrk="0" hangingPunct="1">
-      <a:defRPr sz="1800" kern="1200">
+    <a:lvl2pPr marL="457200" algn="l" defTabSz="914400" rtl="0">
+      <a:defRPr sz="1800">
         <a:solidFill>
           <a:schemeClr val="tx1"/>
         </a:solidFill>
@@ -38,8 +41,8 @@
         <a:cs typeface="+mn-cs"/>
       </a:defRPr>
     </a:lvl2pPr>
-    <a:lvl3pPr marL="914400" algn="l" defTabSz="914400" rtl="0" eaLnBrk="1" latinLnBrk="0" hangingPunct="1">
-      <a:defRPr sz="1800" kern="1200">
+    <a:lvl3pPr marL="914400" algn="l" defTabSz="914400" rtl="0">
+      <a:defRPr sz="1800">
         <a:solidFill>
           <a:schemeClr val="tx1"/>
         </a:solidFill>
@@ -48,8 +51,8 @@
         <a:cs typeface="+mn-cs"/>
       </a:defRPr>
     </a:lvl3pPr>
-    <a:lvl4pPr marL="1371600" algn="l" defTabSz="914400" rtl="0" eaLnBrk="1" latinLnBrk="0" hangingPunct="1">
-      <a:defRPr sz="1800" kern="1200">
+    <a:lvl4pPr marL="1371600" algn="l" defTabSz="914400" rtl="0">
+      <a:defRPr sz="1800">
         <a:solidFill>
           <a:schemeClr val="tx1"/>
         </a:solidFill>
@@ -58,8 +61,8 @@
         <a:cs typeface="+mn-cs"/>
       </a:defRPr>
     </a:lvl4pPr>
-    <a:lvl5pPr marL="1828800" algn="l" defTabSz="914400" rtl="0" eaLnBrk="1" latinLnBrk="0" hangingPunct="1">
-      <a:defRPr sz="1800" kern="1200">
+    <a:lvl5pPr marL="1828800" algn="l" defTabSz="914400" rtl="0">
+      <a:defRPr sz="1800">
         <a:solidFill>
           <a:schemeClr val="tx1"/>
         </a:solidFill>
@@ -68,8 +71,8 @@
         <a:cs typeface="+mn-cs"/>
       </a:defRPr>
     </a:lvl5pPr>
-    <a:lvl6pPr marL="2286000" algn="l" defTabSz="914400" rtl="0" eaLnBrk="1" latinLnBrk="0" hangingPunct="1">
-      <a:defRPr sz="1800" kern="1200">
+    <a:lvl6pPr marL="2286000" algn="l" defTabSz="914400" rtl="0">
+      <a:defRPr sz="1800">
         <a:solidFill>
           <a:schemeClr val="tx1"/>
         </a:solidFill>
@@ -78,8 +81,8 @@
         <a:cs typeface="+mn-cs"/>
       </a:defRPr>
     </a:lvl6pPr>
-    <a:lvl7pPr marL="2743200" algn="l" defTabSz="914400" rtl="0" eaLnBrk="1" latinLnBrk="0" hangingPunct="1">
-      <a:defRPr sz="1800" kern="1200">
+    <a:lvl7pPr marL="2743200" algn="l" defTabSz="914400" rtl="0">
+      <a:defRPr sz="1800">
         <a:solidFill>
           <a:schemeClr val="tx1"/>
         </a:solidFill>
@@ -88,8 +91,8 @@
         <a:cs typeface="+mn-cs"/>
       </a:defRPr>
     </a:lvl7pPr>
-    <a:lvl8pPr marL="3200400" algn="l" defTabSz="914400" rtl="0" eaLnBrk="1" latinLnBrk="0" hangingPunct="1">
-      <a:defRPr sz="1800" kern="1200">
+    <a:lvl8pPr marL="3200400" algn="l" defTabSz="914400" rtl="0">
+      <a:defRPr sz="1800">
         <a:solidFill>
           <a:schemeClr val="tx1"/>
         </a:solidFill>
@@ -98,8 +101,8 @@
         <a:cs typeface="+mn-cs"/>
       </a:defRPr>
     </a:lvl8pPr>
-    <a:lvl9pPr marL="3657600" algn="l" defTabSz="914400" rtl="0" eaLnBrk="1" latinLnBrk="0" hangingPunct="1">
-      <a:defRPr sz="1800" kern="1200">
+    <a:lvl9pPr marL="3657600" algn="l" defTabSz="914400" rtl="0">
+      <a:defRPr sz="1800">
         <a:solidFill>
           <a:schemeClr val="tx1"/>
         </a:solidFill>
@@ -112,8 +115,838 @@
 </p:presentation>
 </file>
 
+<file path=ppt/notesMasters/notesMaster1.xml><?xml version="1.0" encoding="utf-8"?>
+<p:notesMaster xmlns:a="http://schemas.openxmlformats.org/drawingml/2006/main" xmlns:r="http://schemas.openxmlformats.org/officeDocument/2006/relationships" xmlns:p="http://schemas.openxmlformats.org/presentationml/2006/main">
+  <p:cSld name="">
+    <p:bg>
+      <p:bgRef idx="1001">
+        <a:schemeClr val="bg1"/>
+      </p:bgRef>
+    </p:bg>
+    <p:spTree>
+      <p:nvGrpSpPr>
+        <p:cNvPr id="1" name=""/>
+        <p:cNvGrpSpPr/>
+        <p:nvPr/>
+      </p:nvGrpSpPr>
+      <p:grpSpPr bwMode="auto">
+        <a:xfrm>
+          <a:off x="0" y="0"/>
+          <a:ext cx="0" cy="0"/>
+          <a:chOff x="0" y="0"/>
+          <a:chExt cx="0" cy="0"/>
+        </a:xfrm>
+      </p:grpSpPr>
+      <p:sp>
+        <p:nvSpPr>
+          <p:cNvPr id="2" name="Header Placeholder 1"/>
+          <p:cNvSpPr>
+            <a:spLocks noGrp="1"/>
+          </p:cNvSpPr>
+          <p:nvPr>
+            <p:ph type="hdr" sz="quarter"/>
+          </p:nvPr>
+        </p:nvSpPr>
+        <p:spPr bwMode="auto">
+          <a:xfrm>
+            <a:off x="0" y="0"/>
+            <a:ext cx="2971800" cy="458788"/>
+          </a:xfrm>
+          <a:prstGeom prst="rect">
+            <a:avLst/>
+          </a:prstGeom>
+        </p:spPr>
+        <p:txBody>
+          <a:bodyPr vert="horz" lIns="91440" tIns="45720" rIns="91440" bIns="45720" rtlCol="0" anchor="ctr"/>
+          <a:lstStyle>
+            <a:lvl1pPr algn="l">
+              <a:defRPr sz="1200"/>
+            </a:lvl1pPr>
+          </a:lstStyle>
+          <a:p>
+            <a:pPr>
+              <a:defRPr/>
+            </a:pPr>
+            <a:endParaRPr/>
+          </a:p>
+        </p:txBody>
+      </p:sp>
+      <p:sp>
+        <p:nvSpPr>
+          <p:cNvPr id="3" name="Date Placeholder 2"/>
+          <p:cNvSpPr>
+            <a:spLocks noGrp="1"/>
+          </p:cNvSpPr>
+          <p:nvPr>
+            <p:ph type="dt" idx="2"/>
+          </p:nvPr>
+        </p:nvSpPr>
+        <p:spPr bwMode="auto">
+          <a:xfrm>
+            <a:off x="3884613" y="0"/>
+            <a:ext cx="2971800" cy="458788"/>
+          </a:xfrm>
+          <a:prstGeom prst="rect">
+            <a:avLst/>
+          </a:prstGeom>
+        </p:spPr>
+        <p:txBody>
+          <a:bodyPr vert="horz" lIns="91440" tIns="45720" rIns="91440" bIns="45720" rtlCol="0" anchor="ctr"/>
+          <a:lstStyle>
+            <a:lvl1pPr algn="r">
+              <a:defRPr sz="1200"/>
+            </a:lvl1pPr>
+          </a:lstStyle>
+          <a:p>
+            <a:pPr>
+              <a:defRPr/>
+            </a:pPr>
+            <a:endParaRPr/>
+          </a:p>
+        </p:txBody>
+      </p:sp>
+      <p:sp>
+        <p:nvSpPr>
+          <p:cNvPr id="3" name="Date Placeholder 2"/>
+          <p:cNvSpPr>
+            <a:spLocks noGrp="1"/>
+          </p:cNvSpPr>
+          <p:nvPr>
+            <p:ph type="dt" idx="3"/>
+          </p:nvPr>
+        </p:nvSpPr>
+        <p:spPr bwMode="auto">
+          <a:xfrm>
+            <a:off x="3884613" y="0"/>
+            <a:ext cx="2971800" cy="458788"/>
+          </a:xfrm>
+          <a:prstGeom prst="rect">
+            <a:avLst/>
+          </a:prstGeom>
+        </p:spPr>
+        <p:txBody>
+          <a:bodyPr vert="horz" lIns="91440" tIns="45720" rIns="91440" bIns="45720" rtlCol="0" anchor="ctr"/>
+          <a:lstStyle>
+            <a:lvl1pPr algn="r">
+              <a:defRPr sz="1200"/>
+            </a:lvl1pPr>
+          </a:lstStyle>
+          <a:p>
+            <a:pPr>
+              <a:defRPr/>
+            </a:pPr>
+            <a:endParaRPr/>
+          </a:p>
+        </p:txBody>
+      </p:sp>
+      <p:sp>
+        <p:nvSpPr>
+          <p:cNvPr id="5" name="Notes Placeholder 4"/>
+          <p:cNvSpPr>
+            <a:spLocks noGrp="1"/>
+          </p:cNvSpPr>
+          <p:nvPr>
+            <p:ph type="body" sz="quarter" idx="1"/>
+          </p:nvPr>
+        </p:nvSpPr>
+        <p:spPr bwMode="auto">
+          <a:xfrm>
+            <a:off x="685800" y="4400550"/>
+            <a:ext cx="5486400" cy="3600450"/>
+          </a:xfrm>
+          <a:prstGeom prst="rect">
+            <a:avLst/>
+          </a:prstGeom>
+        </p:spPr>
+        <p:txBody>
+          <a:bodyPr vert="horz" lIns="91440" tIns="45720" rIns="91440" bIns="45720" rtlCol="0" anchor="ctr"/>
+          <a:lstStyle/>
+          <a:p>
+            <a:pPr>
+              <a:defRPr/>
+            </a:pPr>
+            <a:endParaRPr/>
+          </a:p>
+        </p:txBody>
+      </p:sp>
+      <p:sp>
+        <p:nvSpPr>
+          <p:cNvPr id="6" name="Footer Placeholder 5"/>
+          <p:cNvSpPr>
+            <a:spLocks noGrp="1"/>
+          </p:cNvSpPr>
+          <p:nvPr>
+            <p:ph type="ftr" sz="quarter" idx="4"/>
+          </p:nvPr>
+        </p:nvSpPr>
+        <p:spPr bwMode="auto">
+          <a:xfrm>
+            <a:off x="0" y="8685213"/>
+            <a:ext cx="2971800" cy="458787"/>
+          </a:xfrm>
+          <a:prstGeom prst="rect">
+            <a:avLst/>
+          </a:prstGeom>
+        </p:spPr>
+        <p:txBody>
+          <a:bodyPr vert="horz" lIns="91440" tIns="45720" rIns="91440" bIns="45720" rtlCol="0" anchor="b"/>
+          <a:lstStyle>
+            <a:lvl1pPr algn="l">
+              <a:defRPr sz="1200"/>
+            </a:lvl1pPr>
+          </a:lstStyle>
+          <a:p>
+            <a:pPr>
+              <a:defRPr/>
+            </a:pPr>
+            <a:endParaRPr/>
+          </a:p>
+        </p:txBody>
+      </p:sp>
+      <p:sp>
+        <p:nvSpPr>
+          <p:cNvPr id="7" name="Slide Number Placeholder 6"/>
+          <p:cNvSpPr>
+            <a:spLocks noGrp="1"/>
+          </p:cNvSpPr>
+          <p:nvPr>
+            <p:ph type="sldNum" sz="quarter" idx="10"/>
+          </p:nvPr>
+        </p:nvSpPr>
+        <p:spPr bwMode="auto">
+          <a:xfrm>
+            <a:off x="3884613" y="8685213"/>
+            <a:ext cx="2971800" cy="458787"/>
+          </a:xfrm>
+          <a:prstGeom prst="rect">
+            <a:avLst/>
+          </a:prstGeom>
+        </p:spPr>
+        <p:txBody>
+          <a:bodyPr vert="horz" lIns="91440" tIns="45720" rIns="91440" bIns="45720" rtlCol="0" anchor="b"/>
+          <a:lstStyle>
+            <a:lvl1pPr algn="r">
+              <a:defRPr sz="1200"/>
+            </a:lvl1pPr>
+          </a:lstStyle>
+          <a:p>
+            <a:pPr>
+              <a:defRPr/>
+            </a:pPr>
+            <a:endParaRPr/>
+          </a:p>
+        </p:txBody>
+      </p:sp>
+    </p:spTree>
+  </p:cSld>
+  <p:clrMap bg1="lt1" tx1="dk1" bg2="lt2" tx2="dk2" accent1="accent1" accent2="accent2" accent3="accent3" accent4="accent4" accent5="accent5" accent6="accent6" hlink="hlink" folHlink="folHlink"/>
+  <p:notesStyle>
+    <a:lvl1pPr marL="0" algn="l" defTabSz="914400">
+      <a:defRPr sz="1200">
+        <a:solidFill>
+          <a:schemeClr val="tx1"/>
+        </a:solidFill>
+        <a:latin typeface="+mn-lt"/>
+        <a:ea typeface="+mn-ea"/>
+        <a:cs typeface="+mn-cs"/>
+      </a:defRPr>
+    </a:lvl1pPr>
+    <a:lvl2pPr marL="457200" algn="l" defTabSz="914400">
+      <a:defRPr sz="1200">
+        <a:solidFill>
+          <a:schemeClr val="tx1"/>
+        </a:solidFill>
+        <a:latin typeface="+mn-lt"/>
+        <a:ea typeface="+mn-ea"/>
+        <a:cs typeface="+mn-cs"/>
+      </a:defRPr>
+    </a:lvl2pPr>
+    <a:lvl3pPr marL="914400" algn="l" defTabSz="914400">
+      <a:defRPr sz="1200">
+        <a:solidFill>
+          <a:schemeClr val="tx1"/>
+        </a:solidFill>
+        <a:latin typeface="+mn-lt"/>
+        <a:ea typeface="+mn-ea"/>
+        <a:cs typeface="+mn-cs"/>
+      </a:defRPr>
+    </a:lvl3pPr>
+    <a:lvl4pPr marL="1371600" algn="l" defTabSz="914400">
+      <a:defRPr sz="1200">
+        <a:solidFill>
+          <a:schemeClr val="tx1"/>
+        </a:solidFill>
+        <a:latin typeface="+mn-lt"/>
+        <a:ea typeface="+mn-ea"/>
+        <a:cs typeface="+mn-cs"/>
+      </a:defRPr>
+    </a:lvl4pPr>
+    <a:lvl5pPr marL="1828800" algn="l" defTabSz="914400">
+      <a:defRPr sz="1200">
+        <a:solidFill>
+          <a:schemeClr val="tx1"/>
+        </a:solidFill>
+        <a:latin typeface="+mn-lt"/>
+        <a:ea typeface="+mn-ea"/>
+        <a:cs typeface="+mn-cs"/>
+      </a:defRPr>
+    </a:lvl5pPr>
+    <a:lvl6pPr marL="2286000" algn="l" defTabSz="914400">
+      <a:defRPr sz="1200">
+        <a:solidFill>
+          <a:schemeClr val="tx1"/>
+        </a:solidFill>
+        <a:latin typeface="+mn-lt"/>
+        <a:ea typeface="+mn-ea"/>
+        <a:cs typeface="+mn-cs"/>
+      </a:defRPr>
+    </a:lvl6pPr>
+    <a:lvl7pPr marL="2743200" algn="l" defTabSz="914400">
+      <a:defRPr sz="1200">
+        <a:solidFill>
+          <a:schemeClr val="tx1"/>
+        </a:solidFill>
+        <a:latin typeface="+mn-lt"/>
+        <a:ea typeface="+mn-ea"/>
+        <a:cs typeface="+mn-cs"/>
+      </a:defRPr>
+    </a:lvl7pPr>
+    <a:lvl8pPr marL="3200400" algn="l" defTabSz="914400">
+      <a:defRPr sz="1200">
+        <a:solidFill>
+          <a:schemeClr val="tx1"/>
+        </a:solidFill>
+        <a:latin typeface="+mn-lt"/>
+        <a:ea typeface="+mn-ea"/>
+        <a:cs typeface="+mn-cs"/>
+      </a:defRPr>
+    </a:lvl8pPr>
+    <a:lvl9pPr marL="3657600" algn="l" defTabSz="914400">
+      <a:defRPr sz="1200">
+        <a:solidFill>
+          <a:schemeClr val="tx1"/>
+        </a:solidFill>
+        <a:latin typeface="+mn-lt"/>
+        <a:ea typeface="+mn-ea"/>
+        <a:cs typeface="+mn-cs"/>
+      </a:defRPr>
+    </a:lvl9pPr>
+  </p:notesStyle>
+</p:notesMaster>
+</file>
+
+<file path=ppt/notesSlides/notesSlide1.xml><?xml version="1.0" encoding="utf-8"?>
+<p:notes xmlns:a="http://schemas.openxmlformats.org/drawingml/2006/main" xmlns:r="http://schemas.openxmlformats.org/officeDocument/2006/relationships" xmlns:p="http://schemas.openxmlformats.org/presentationml/2006/main" xmlns:m="http://schemas.openxmlformats.org/officeDocument/2006/math" xmlns:w="http://schemas.openxmlformats.org/wordprocessingml/2006/main">
+  <p:cSld name="">
+    <p:spTree>
+      <p:nvGrpSpPr>
+        <p:cNvPr id="1" name=""/>
+        <p:cNvGrpSpPr/>
+        <p:nvPr/>
+      </p:nvGrpSpPr>
+      <p:grpSpPr bwMode="auto">
+        <a:xfrm>
+          <a:off x="0" y="0"/>
+          <a:ext cx="0" cy="0"/>
+          <a:chOff x="0" y="0"/>
+          <a:chExt cx="0" cy="0"/>
+        </a:xfrm>
+      </p:grpSpPr>
+      <p:sp>
+        <p:nvSpPr>
+          <p:cNvPr id="2" name="Slide Image Placeholder 1"/>
+          <p:cNvSpPr>
+            <a:spLocks noChangeAspect="1" noGrp="1" noRot="1"/>
+          </p:cNvSpPr>
+          <p:nvPr>
+            <p:ph type="sldImg"/>
+          </p:nvPr>
+        </p:nvSpPr>
+        <p:spPr bwMode="auto"/>
+      </p:sp>
+      <p:sp>
+        <p:nvSpPr>
+          <p:cNvPr id="3" name="Notes Placeholder 2"/>
+          <p:cNvSpPr>
+            <a:spLocks noGrp="1"/>
+          </p:cNvSpPr>
+          <p:nvPr>
+            <p:ph type="body" idx="1"/>
+          </p:nvPr>
+        </p:nvSpPr>
+        <p:spPr bwMode="auto"/>
+        <p:txBody>
+          <a:bodyPr/>
+          <a:lstStyle/>
+          <a:p>
+            <a:pPr>
+              <a:defRPr/>
+            </a:pPr>
+            <a:endParaRPr/>
+          </a:p>
+        </p:txBody>
+      </p:sp>
+      <p:sp>
+        <p:nvSpPr>
+          <p:cNvPr id="4" name="Slide Number Placeholder 3"/>
+          <p:cNvSpPr>
+            <a:spLocks noGrp="1"/>
+          </p:cNvSpPr>
+          <p:nvPr>
+            <p:ph type="sldNum" sz="quarter" idx="10"/>
+          </p:nvPr>
+        </p:nvSpPr>
+        <p:spPr bwMode="auto"/>
+        <p:txBody>
+          <a:bodyPr/>
+          <a:lstStyle/>
+          <a:p>
+            <a:pPr>
+              <a:defRPr/>
+            </a:pPr>
+            <a:fld id="{5CF6A9D9-8FCC-4E10-B74A-64814028C693}" type="slidenum">
+              <a:rPr/>
+              <a:t/>
+            </a:fld>
+            <a:endParaRPr/>
+          </a:p>
+        </p:txBody>
+      </p:sp>
+    </p:spTree>
+  </p:cSld>
+  <p:clrMapOvr>
+    <a:masterClrMapping/>
+  </p:clrMapOvr>
+</p:notes>
+</file>
+
+<file path=ppt/notesSlides/notesSlide2.xml><?xml version="1.0" encoding="utf-8"?>
+<p:notes xmlns:a="http://schemas.openxmlformats.org/drawingml/2006/main" xmlns:r="http://schemas.openxmlformats.org/officeDocument/2006/relationships" xmlns:p="http://schemas.openxmlformats.org/presentationml/2006/main" xmlns:m="http://schemas.openxmlformats.org/officeDocument/2006/math" xmlns:w="http://schemas.openxmlformats.org/wordprocessingml/2006/main">
+  <p:cSld name="">
+    <p:spTree>
+      <p:nvGrpSpPr>
+        <p:cNvPr id="1" name=""/>
+        <p:cNvGrpSpPr/>
+        <p:nvPr/>
+      </p:nvGrpSpPr>
+      <p:grpSpPr bwMode="auto">
+        <a:xfrm>
+          <a:off x="0" y="0"/>
+          <a:ext cx="0" cy="0"/>
+          <a:chOff x="0" y="0"/>
+          <a:chExt cx="0" cy="0"/>
+        </a:xfrm>
+      </p:grpSpPr>
+      <p:sp>
+        <p:nvSpPr>
+          <p:cNvPr id="2" name="Slide Image Placeholder 1"/>
+          <p:cNvSpPr>
+            <a:spLocks noChangeAspect="1" noGrp="1" noRot="1"/>
+          </p:cNvSpPr>
+          <p:nvPr>
+            <p:ph type="sldImg"/>
+          </p:nvPr>
+        </p:nvSpPr>
+        <p:spPr bwMode="auto"/>
+      </p:sp>
+      <p:sp>
+        <p:nvSpPr>
+          <p:cNvPr id="3" name="Notes Placeholder 2"/>
+          <p:cNvSpPr>
+            <a:spLocks noGrp="1"/>
+          </p:cNvSpPr>
+          <p:nvPr>
+            <p:ph type="body" idx="1"/>
+          </p:nvPr>
+        </p:nvSpPr>
+        <p:spPr bwMode="auto"/>
+        <p:txBody>
+          <a:bodyPr/>
+          <a:lstStyle/>
+          <a:p>
+            <a:pPr>
+              <a:defRPr/>
+            </a:pPr>
+            <a:endParaRPr/>
+          </a:p>
+        </p:txBody>
+      </p:sp>
+      <p:sp>
+        <p:nvSpPr>
+          <p:cNvPr id="4" name="Slide Number Placeholder 3"/>
+          <p:cNvSpPr>
+            <a:spLocks noGrp="1"/>
+          </p:cNvSpPr>
+          <p:nvPr>
+            <p:ph type="sldNum" sz="quarter" idx="10"/>
+          </p:nvPr>
+        </p:nvSpPr>
+        <p:spPr bwMode="auto"/>
+        <p:txBody>
+          <a:bodyPr/>
+          <a:lstStyle/>
+          <a:p>
+            <a:pPr>
+              <a:defRPr/>
+            </a:pPr>
+            <a:fld id="{8B7598B7-EA03-F1E6-C7C2-EE09EFAFCB08}" type="slidenum">
+              <a:rPr/>
+              <a:t/>
+            </a:fld>
+            <a:endParaRPr/>
+          </a:p>
+        </p:txBody>
+      </p:sp>
+    </p:spTree>
+  </p:cSld>
+  <p:clrMapOvr>
+    <a:masterClrMapping/>
+  </p:clrMapOvr>
+</p:notes>
+</file>
+
+<file path=ppt/notesSlides/notesSlide3.xml><?xml version="1.0" encoding="utf-8"?>
+<p:notes xmlns:a="http://schemas.openxmlformats.org/drawingml/2006/main" xmlns:r="http://schemas.openxmlformats.org/officeDocument/2006/relationships" xmlns:p="http://schemas.openxmlformats.org/presentationml/2006/main" xmlns:m="http://schemas.openxmlformats.org/officeDocument/2006/math" xmlns:w="http://schemas.openxmlformats.org/wordprocessingml/2006/main">
+  <p:cSld name="">
+    <p:spTree>
+      <p:nvGrpSpPr>
+        <p:cNvPr id="1" name=""/>
+        <p:cNvGrpSpPr/>
+        <p:nvPr/>
+      </p:nvGrpSpPr>
+      <p:grpSpPr bwMode="auto">
+        <a:xfrm>
+          <a:off x="0" y="0"/>
+          <a:ext cx="0" cy="0"/>
+          <a:chOff x="0" y="0"/>
+          <a:chExt cx="0" cy="0"/>
+        </a:xfrm>
+      </p:grpSpPr>
+      <p:sp>
+        <p:nvSpPr>
+          <p:cNvPr id="2" name="Slide Image Placeholder 1"/>
+          <p:cNvSpPr>
+            <a:spLocks noChangeAspect="1" noGrp="1" noRot="1"/>
+          </p:cNvSpPr>
+          <p:nvPr>
+            <p:ph type="sldImg"/>
+          </p:nvPr>
+        </p:nvSpPr>
+        <p:spPr bwMode="auto"/>
+      </p:sp>
+      <p:sp>
+        <p:nvSpPr>
+          <p:cNvPr id="3" name="Notes Placeholder 2"/>
+          <p:cNvSpPr>
+            <a:spLocks noGrp="1"/>
+          </p:cNvSpPr>
+          <p:nvPr>
+            <p:ph type="body" idx="1"/>
+          </p:nvPr>
+        </p:nvSpPr>
+        <p:spPr bwMode="auto"/>
+        <p:txBody>
+          <a:bodyPr/>
+          <a:lstStyle/>
+          <a:p>
+            <a:pPr>
+              <a:defRPr/>
+            </a:pPr>
+            <a:endParaRPr/>
+          </a:p>
+        </p:txBody>
+      </p:sp>
+      <p:sp>
+        <p:nvSpPr>
+          <p:cNvPr id="4" name="Slide Number Placeholder 3"/>
+          <p:cNvSpPr>
+            <a:spLocks noGrp="1"/>
+          </p:cNvSpPr>
+          <p:nvPr>
+            <p:ph type="sldNum" sz="quarter" idx="10"/>
+          </p:nvPr>
+        </p:nvSpPr>
+        <p:spPr bwMode="auto"/>
+        <p:txBody>
+          <a:bodyPr/>
+          <a:lstStyle/>
+          <a:p>
+            <a:pPr>
+              <a:defRPr/>
+            </a:pPr>
+            <a:fld id="{18C967E1-D3B8-E983-A735-4F091FDF4EF9}" type="slidenum">
+              <a:rPr/>
+              <a:t/>
+            </a:fld>
+            <a:endParaRPr/>
+          </a:p>
+        </p:txBody>
+      </p:sp>
+    </p:spTree>
+  </p:cSld>
+  <p:clrMapOvr>
+    <a:masterClrMapping/>
+  </p:clrMapOvr>
+</p:notes>
+</file>
+
+<file path=ppt/notesSlides/notesSlide4.xml><?xml version="1.0" encoding="utf-8"?>
+<p:notes xmlns:a="http://schemas.openxmlformats.org/drawingml/2006/main" xmlns:r="http://schemas.openxmlformats.org/officeDocument/2006/relationships" xmlns:p="http://schemas.openxmlformats.org/presentationml/2006/main" xmlns:m="http://schemas.openxmlformats.org/officeDocument/2006/math" xmlns:w="http://schemas.openxmlformats.org/wordprocessingml/2006/main">
+  <p:cSld name="">
+    <p:spTree>
+      <p:nvGrpSpPr>
+        <p:cNvPr id="1" name=""/>
+        <p:cNvGrpSpPr/>
+        <p:nvPr/>
+      </p:nvGrpSpPr>
+      <p:grpSpPr bwMode="auto">
+        <a:xfrm>
+          <a:off x="0" y="0"/>
+          <a:ext cx="0" cy="0"/>
+          <a:chOff x="0" y="0"/>
+          <a:chExt cx="0" cy="0"/>
+        </a:xfrm>
+      </p:grpSpPr>
+      <p:sp>
+        <p:nvSpPr>
+          <p:cNvPr id="2" name="Slide Image Placeholder 1"/>
+          <p:cNvSpPr>
+            <a:spLocks noChangeAspect="1" noGrp="1" noRot="1"/>
+          </p:cNvSpPr>
+          <p:nvPr>
+            <p:ph type="sldImg"/>
+          </p:nvPr>
+        </p:nvSpPr>
+        <p:spPr bwMode="auto"/>
+      </p:sp>
+      <p:sp>
+        <p:nvSpPr>
+          <p:cNvPr id="3" name="Notes Placeholder 2"/>
+          <p:cNvSpPr>
+            <a:spLocks noGrp="1"/>
+          </p:cNvSpPr>
+          <p:nvPr>
+            <p:ph type="body" idx="1"/>
+          </p:nvPr>
+        </p:nvSpPr>
+        <p:spPr bwMode="auto"/>
+        <p:txBody>
+          <a:bodyPr/>
+          <a:lstStyle/>
+          <a:p>
+            <a:pPr>
+              <a:defRPr/>
+            </a:pPr>
+            <a:endParaRPr/>
+          </a:p>
+        </p:txBody>
+      </p:sp>
+      <p:sp>
+        <p:nvSpPr>
+          <p:cNvPr id="4" name="Slide Number Placeholder 3"/>
+          <p:cNvSpPr>
+            <a:spLocks noGrp="1"/>
+          </p:cNvSpPr>
+          <p:nvPr>
+            <p:ph type="sldNum" sz="quarter" idx="10"/>
+          </p:nvPr>
+        </p:nvSpPr>
+        <p:spPr bwMode="auto"/>
+        <p:txBody>
+          <a:bodyPr/>
+          <a:lstStyle/>
+          <a:p>
+            <a:pPr>
+              <a:defRPr/>
+            </a:pPr>
+            <a:fld id="{75B880BC-9CA1-88AB-4C5A-122C75A8E842}" type="slidenum">
+              <a:rPr/>
+              <a:t/>
+            </a:fld>
+            <a:endParaRPr/>
+          </a:p>
+        </p:txBody>
+      </p:sp>
+    </p:spTree>
+  </p:cSld>
+  <p:clrMapOvr>
+    <a:masterClrMapping/>
+  </p:clrMapOvr>
+</p:notes>
+</file>
+
+<file path=ppt/notesSlides/notesSlide5.xml><?xml version="1.0" encoding="utf-8"?>
+<p:notes xmlns:a="http://schemas.openxmlformats.org/drawingml/2006/main" xmlns:r="http://schemas.openxmlformats.org/officeDocument/2006/relationships" xmlns:p="http://schemas.openxmlformats.org/presentationml/2006/main" xmlns:m="http://schemas.openxmlformats.org/officeDocument/2006/math" xmlns:w="http://schemas.openxmlformats.org/wordprocessingml/2006/main">
+  <p:cSld name="">
+    <p:spTree>
+      <p:nvGrpSpPr>
+        <p:cNvPr id="1" name=""/>
+        <p:cNvGrpSpPr/>
+        <p:nvPr/>
+      </p:nvGrpSpPr>
+      <p:grpSpPr bwMode="auto">
+        <a:xfrm>
+          <a:off x="0" y="0"/>
+          <a:ext cx="0" cy="0"/>
+          <a:chOff x="0" y="0"/>
+          <a:chExt cx="0" cy="0"/>
+        </a:xfrm>
+      </p:grpSpPr>
+      <p:sp>
+        <p:nvSpPr>
+          <p:cNvPr id="2" name="Slide Image Placeholder 1"/>
+          <p:cNvSpPr>
+            <a:spLocks noChangeAspect="1" noGrp="1" noRot="1"/>
+          </p:cNvSpPr>
+          <p:nvPr>
+            <p:ph type="sldImg"/>
+          </p:nvPr>
+        </p:nvSpPr>
+        <p:spPr bwMode="auto"/>
+      </p:sp>
+      <p:sp>
+        <p:nvSpPr>
+          <p:cNvPr id="3" name="Notes Placeholder 2"/>
+          <p:cNvSpPr>
+            <a:spLocks noGrp="1"/>
+          </p:cNvSpPr>
+          <p:nvPr>
+            <p:ph type="body" idx="1"/>
+          </p:nvPr>
+        </p:nvSpPr>
+        <p:spPr bwMode="auto"/>
+        <p:txBody>
+          <a:bodyPr/>
+          <a:lstStyle/>
+          <a:p>
+            <a:pPr>
+              <a:defRPr/>
+            </a:pPr>
+            <a:endParaRPr/>
+          </a:p>
+        </p:txBody>
+      </p:sp>
+      <p:sp>
+        <p:nvSpPr>
+          <p:cNvPr id="4" name="Slide Number Placeholder 3"/>
+          <p:cNvSpPr>
+            <a:spLocks noGrp="1"/>
+          </p:cNvSpPr>
+          <p:nvPr>
+            <p:ph type="sldNum" sz="quarter" idx="10"/>
+          </p:nvPr>
+        </p:nvSpPr>
+        <p:spPr bwMode="auto"/>
+        <p:txBody>
+          <a:bodyPr/>
+          <a:lstStyle/>
+          <a:p>
+            <a:pPr>
+              <a:defRPr/>
+            </a:pPr>
+            <a:fld id="{1437D616-3A16-ABD0-378A-4E34106D9583}" type="slidenum">
+              <a:rPr/>
+              <a:t/>
+            </a:fld>
+            <a:endParaRPr/>
+          </a:p>
+        </p:txBody>
+      </p:sp>
+    </p:spTree>
+  </p:cSld>
+  <p:clrMapOvr>
+    <a:masterClrMapping/>
+  </p:clrMapOvr>
+</p:notes>
+</file>
+
+<file path=ppt/notesSlides/notesSlide6.xml><?xml version="1.0" encoding="utf-8"?>
+<p:notes xmlns:a="http://schemas.openxmlformats.org/drawingml/2006/main" xmlns:r="http://schemas.openxmlformats.org/officeDocument/2006/relationships" xmlns:p="http://schemas.openxmlformats.org/presentationml/2006/main" xmlns:m="http://schemas.openxmlformats.org/officeDocument/2006/math" xmlns:w="http://schemas.openxmlformats.org/wordprocessingml/2006/main">
+  <p:cSld name="">
+    <p:spTree>
+      <p:nvGrpSpPr>
+        <p:cNvPr id="1" name=""/>
+        <p:cNvGrpSpPr/>
+        <p:nvPr/>
+      </p:nvGrpSpPr>
+      <p:grpSpPr bwMode="auto">
+        <a:xfrm>
+          <a:off x="0" y="0"/>
+          <a:ext cx="0" cy="0"/>
+          <a:chOff x="0" y="0"/>
+          <a:chExt cx="0" cy="0"/>
+        </a:xfrm>
+      </p:grpSpPr>
+      <p:sp>
+        <p:nvSpPr>
+          <p:cNvPr id="2" name="Slide Image Placeholder 1"/>
+          <p:cNvSpPr>
+            <a:spLocks noChangeAspect="1" noGrp="1" noRot="1"/>
+          </p:cNvSpPr>
+          <p:nvPr>
+            <p:ph type="sldImg"/>
+          </p:nvPr>
+        </p:nvSpPr>
+        <p:spPr bwMode="auto"/>
+      </p:sp>
+      <p:sp>
+        <p:nvSpPr>
+          <p:cNvPr id="3" name="Notes Placeholder 2"/>
+          <p:cNvSpPr>
+            <a:spLocks noGrp="1"/>
+          </p:cNvSpPr>
+          <p:nvPr>
+            <p:ph type="body" idx="1"/>
+          </p:nvPr>
+        </p:nvSpPr>
+        <p:spPr bwMode="auto"/>
+        <p:txBody>
+          <a:bodyPr/>
+          <a:lstStyle/>
+          <a:p>
+            <a:pPr>
+              <a:defRPr/>
+            </a:pPr>
+            <a:endParaRPr/>
+          </a:p>
+        </p:txBody>
+      </p:sp>
+      <p:sp>
+        <p:nvSpPr>
+          <p:cNvPr id="4" name="Slide Number Placeholder 3"/>
+          <p:cNvSpPr>
+            <a:spLocks noGrp="1"/>
+          </p:cNvSpPr>
+          <p:nvPr>
+            <p:ph type="sldNum" sz="quarter" idx="10"/>
+          </p:nvPr>
+        </p:nvSpPr>
+        <p:spPr bwMode="auto"/>
+        <p:txBody>
+          <a:bodyPr/>
+          <a:lstStyle/>
+          <a:p>
+            <a:pPr>
+              <a:defRPr/>
+            </a:pPr>
+            <a:fld id="{23830ACB-AD4B-6833-4DAF-6BA7902B9E41}" type="slidenum">
+              <a:rPr/>
+              <a:t/>
+            </a:fld>
+            <a:endParaRPr/>
+          </a:p>
+        </p:txBody>
+      </p:sp>
+    </p:spTree>
+  </p:cSld>
+  <p:clrMapOvr>
+    <a:masterClrMapping/>
+  </p:clrMapOvr>
+</p:notes>
+</file>
+
 <file path=ppt/slideLayouts/slideLayout1.xml><?xml version="1.0" encoding="utf-8"?>
-<p:sldLayout xmlns:a="http://schemas.openxmlformats.org/drawingml/2006/main" xmlns:r="http://schemas.openxmlformats.org/officeDocument/2006/relationships" xmlns:p="http://schemas.openxmlformats.org/presentationml/2006/main" type="title" preserve="1">
+<p:sldLayout xmlns:a="http://schemas.openxmlformats.org/drawingml/2006/main" xmlns:r="http://schemas.openxmlformats.org/officeDocument/2006/relationships" xmlns:p="http://schemas.openxmlformats.org/presentationml/2006/main" xmlns:m="http://schemas.openxmlformats.org/officeDocument/2006/math" xmlns:w="http://schemas.openxmlformats.org/wordprocessingml/2006/main" matchingName="" preserve="1" showMasterPhAnim="0" showMasterSp="1" type="title" userDrawn="1">
   <p:cSld name="Title Slide">
     <p:spTree>
       <p:nvGrpSpPr>
@@ -121,7 +954,7 @@
         <p:cNvGrpSpPr/>
         <p:nvPr/>
       </p:nvGrpSpPr>
-      <p:grpSpPr>
+      <p:grpSpPr bwMode="auto">
         <a:xfrm>
           <a:off x="0" y="0"/>
           <a:ext cx="0" cy="0"/>
@@ -131,7 +964,7 @@
       </p:grpSpPr>
       <p:sp>
         <p:nvSpPr>
-          <p:cNvPr id="2" name="Title 1"/>
+          <p:cNvPr id="51678436" name="Title 1"/>
           <p:cNvSpPr>
             <a:spLocks noGrp="1"/>
           </p:cNvSpPr>
@@ -139,7 +972,7 @@
             <p:ph type="ctrTitle"/>
           </p:nvPr>
         </p:nvSpPr>
-        <p:spPr>
+        <p:spPr bwMode="auto">
           <a:xfrm>
             <a:off x="1524000" y="1122363"/>
             <a:ext cx="9144000" cy="2387600"/>
@@ -153,8 +986,11 @@
             </a:lvl1pPr>
           </a:lstStyle>
           <a:p>
-            <a:r>
-              <a:rPr lang="en-US" smtClean="0"/>
+            <a:pPr>
+              <a:defRPr/>
+            </a:pPr>
+            <a:r>
+              <a:rPr lang="en-US"/>
               <a:t>Click to edit Master title style</a:t>
             </a:r>
             <a:endParaRPr lang="en-US"/>
@@ -163,7 +999,7 @@
       </p:sp>
       <p:sp>
         <p:nvSpPr>
-          <p:cNvPr id="3" name="Subtitle 2"/>
+          <p:cNvPr id="541134116" name="Subtitle 2"/>
           <p:cNvSpPr>
             <a:spLocks noGrp="1"/>
           </p:cNvSpPr>
@@ -171,7 +1007,7 @@
             <p:ph type="subTitle" idx="1"/>
           </p:nvPr>
         </p:nvSpPr>
-        <p:spPr>
+        <p:spPr bwMode="auto">
           <a:xfrm>
             <a:off x="1524000" y="3602038"/>
             <a:ext cx="9144000" cy="1655762"/>
@@ -218,8 +1054,11 @@
             </a:lvl9pPr>
           </a:lstStyle>
           <a:p>
-            <a:r>
-              <a:rPr lang="en-US" smtClean="0"/>
+            <a:pPr>
+              <a:defRPr/>
+            </a:pPr>
+            <a:r>
+              <a:rPr lang="en-US"/>
               <a:t>Click to edit Master subtitle style</a:t>
             </a:r>
             <a:endParaRPr lang="en-US"/>
@@ -228,7 +1067,7 @@
       </p:sp>
       <p:sp>
         <p:nvSpPr>
-          <p:cNvPr id="4" name="Date Placeholder 3"/>
+          <p:cNvPr id="520384280" name="Date Placeholder 3"/>
           <p:cNvSpPr>
             <a:spLocks noGrp="1"/>
           </p:cNvSpPr>
@@ -236,13 +1075,16 @@
             <p:ph type="dt" sz="half" idx="10"/>
           </p:nvPr>
         </p:nvSpPr>
-        <p:spPr/>
-        <p:txBody>
-          <a:bodyPr/>
-          <a:lstStyle/>
-          <a:p>
+        <p:spPr bwMode="auto"/>
+        <p:txBody>
+          <a:bodyPr/>
+          <a:lstStyle/>
+          <a:p>
+            <a:pPr>
+              <a:defRPr/>
+            </a:pPr>
             <a:fld id="{CD25C055-B408-4243-B31D-8686AF54EE60}" type="datetimeFigureOut">
-              <a:rPr lang="en-US" smtClean="0"/>
+              <a:rPr lang="en-US"/>
               <a:t>3/31/2026</a:t>
             </a:fld>
             <a:endParaRPr lang="en-US"/>
@@ -251,7 +1093,7 @@
       </p:sp>
       <p:sp>
         <p:nvSpPr>
-          <p:cNvPr id="5" name="Footer Placeholder 4"/>
+          <p:cNvPr id="951951253" name="Footer Placeholder 4"/>
           <p:cNvSpPr>
             <a:spLocks noGrp="1"/>
           </p:cNvSpPr>
@@ -259,18 +1101,21 @@
             <p:ph type="ftr" sz="quarter" idx="11"/>
           </p:nvPr>
         </p:nvSpPr>
-        <p:spPr/>
-        <p:txBody>
-          <a:bodyPr/>
-          <a:lstStyle/>
-          <a:p>
-            <a:endParaRPr lang="en-US"/>
-          </a:p>
-        </p:txBody>
-      </p:sp>
-      <p:sp>
-        <p:nvSpPr>
-          <p:cNvPr id="6" name="Slide Number Placeholder 5"/>
+        <p:spPr bwMode="auto"/>
+        <p:txBody>
+          <a:bodyPr/>
+          <a:lstStyle/>
+          <a:p>
+            <a:pPr>
+              <a:defRPr/>
+            </a:pPr>
+            <a:endParaRPr lang="en-US"/>
+          </a:p>
+        </p:txBody>
+      </p:sp>
+      <p:sp>
+        <p:nvSpPr>
+          <p:cNvPr id="1417301309" name="Slide Number Placeholder 5"/>
           <p:cNvSpPr>
             <a:spLocks noGrp="1"/>
           </p:cNvSpPr>
@@ -278,13 +1123,16 @@
             <p:ph type="sldNum" sz="quarter" idx="12"/>
           </p:nvPr>
         </p:nvSpPr>
-        <p:spPr/>
-        <p:txBody>
-          <a:bodyPr/>
-          <a:lstStyle/>
-          <a:p>
+        <p:spPr bwMode="auto"/>
+        <p:txBody>
+          <a:bodyPr/>
+          <a:lstStyle/>
+          <a:p>
+            <a:pPr>
+              <a:defRPr/>
+            </a:pPr>
             <a:fld id="{C562C83D-7E9B-49E9-B1CB-FA7EF01CA0DD}" type="slidenum">
-              <a:rPr lang="en-US" smtClean="0"/>
+              <a:rPr lang="en-US"/>
               <a:t>‹#›</a:t>
             </a:fld>
             <a:endParaRPr lang="en-US"/>
@@ -292,11 +1140,6 @@
         </p:txBody>
       </p:sp>
     </p:spTree>
-    <p:extLst>
-      <p:ext uri="{BB962C8B-B14F-4D97-AF65-F5344CB8AC3E}">
-        <p14:creationId xmlns:p14="http://schemas.microsoft.com/office/powerpoint/2010/main" val="3617291428"/>
-      </p:ext>
-    </p:extLst>
   </p:cSld>
   <p:clrMapOvr>
     <a:masterClrMapping/>
@@ -305,7 +1148,7 @@
 </file>
 
 <file path=ppt/slideLayouts/slideLayout10.xml><?xml version="1.0" encoding="utf-8"?>
-<p:sldLayout xmlns:a="http://schemas.openxmlformats.org/drawingml/2006/main" xmlns:r="http://schemas.openxmlformats.org/officeDocument/2006/relationships" xmlns:p="http://schemas.openxmlformats.org/presentationml/2006/main" type="vertTx" preserve="1">
+<p:sldLayout xmlns:a="http://schemas.openxmlformats.org/drawingml/2006/main" xmlns:r="http://schemas.openxmlformats.org/officeDocument/2006/relationships" xmlns:p="http://schemas.openxmlformats.org/presentationml/2006/main" xmlns:m="http://schemas.openxmlformats.org/officeDocument/2006/math" xmlns:w="http://schemas.openxmlformats.org/wordprocessingml/2006/main" matchingName="" preserve="1" showMasterPhAnim="0" showMasterSp="1" type="vertTx" userDrawn="1">
   <p:cSld name="Title and Vertical Text">
     <p:spTree>
       <p:nvGrpSpPr>
@@ -313,7 +1156,7 @@
         <p:cNvGrpSpPr/>
         <p:nvPr/>
       </p:nvGrpSpPr>
-      <p:grpSpPr>
+      <p:grpSpPr bwMode="auto">
         <a:xfrm>
           <a:off x="0" y="0"/>
           <a:ext cx="0" cy="0"/>
@@ -323,7 +1166,7 @@
       </p:grpSpPr>
       <p:sp>
         <p:nvSpPr>
-          <p:cNvPr id="2" name="Title 1"/>
+          <p:cNvPr id="1184219109" name="Title 1"/>
           <p:cNvSpPr>
             <a:spLocks noGrp="1"/>
           </p:cNvSpPr>
@@ -331,13 +1174,16 @@
             <p:ph type="title"/>
           </p:nvPr>
         </p:nvSpPr>
-        <p:spPr/>
-        <p:txBody>
-          <a:bodyPr/>
-          <a:lstStyle/>
-          <a:p>
-            <a:r>
-              <a:rPr lang="en-US" smtClean="0"/>
+        <p:spPr bwMode="auto"/>
+        <p:txBody>
+          <a:bodyPr/>
+          <a:lstStyle/>
+          <a:p>
+            <a:pPr>
+              <a:defRPr/>
+            </a:pPr>
+            <a:r>
+              <a:rPr lang="en-US"/>
               <a:t>Click to edit Master title style</a:t>
             </a:r>
             <a:endParaRPr lang="en-US"/>
@@ -346,7 +1192,7 @@
       </p:sp>
       <p:sp>
         <p:nvSpPr>
-          <p:cNvPr id="3" name="Vertical Text Placeholder 2"/>
+          <p:cNvPr id="1305037798" name="Vertical Text Placeholder 2"/>
           <p:cNvSpPr>
             <a:spLocks noGrp="1"/>
           </p:cNvSpPr>
@@ -354,42 +1200,56 @@
             <p:ph type="body" orient="vert" idx="1"/>
           </p:nvPr>
         </p:nvSpPr>
-        <p:spPr/>
+        <p:spPr bwMode="auto"/>
         <p:txBody>
           <a:bodyPr vert="eaVert"/>
           <a:lstStyle/>
           <a:p>
-            <a:pPr lvl="0"/>
-            <a:r>
-              <a:rPr lang="en-US" smtClean="0"/>
+            <a:pPr lvl="0">
+              <a:defRPr/>
+            </a:pPr>
+            <a:r>
+              <a:rPr lang="en-US"/>
               <a:t>Edit Master text styles</a:t>
             </a:r>
-          </a:p>
-          <a:p>
-            <a:pPr lvl="1"/>
-            <a:r>
-              <a:rPr lang="en-US" smtClean="0"/>
+            <a:endParaRPr/>
+          </a:p>
+          <a:p>
+            <a:pPr lvl="1">
+              <a:defRPr/>
+            </a:pPr>
+            <a:r>
+              <a:rPr lang="en-US"/>
               <a:t>Second level</a:t>
             </a:r>
-          </a:p>
-          <a:p>
-            <a:pPr lvl="2"/>
-            <a:r>
-              <a:rPr lang="en-US" smtClean="0"/>
+            <a:endParaRPr/>
+          </a:p>
+          <a:p>
+            <a:pPr lvl="2">
+              <a:defRPr/>
+            </a:pPr>
+            <a:r>
+              <a:rPr lang="en-US"/>
               <a:t>Third level</a:t>
             </a:r>
-          </a:p>
-          <a:p>
-            <a:pPr lvl="3"/>
-            <a:r>
-              <a:rPr lang="en-US" smtClean="0"/>
+            <a:endParaRPr/>
+          </a:p>
+          <a:p>
+            <a:pPr lvl="3">
+              <a:defRPr/>
+            </a:pPr>
+            <a:r>
+              <a:rPr lang="en-US"/>
               <a:t>Fourth level</a:t>
             </a:r>
-          </a:p>
-          <a:p>
-            <a:pPr lvl="4"/>
-            <a:r>
-              <a:rPr lang="en-US" smtClean="0"/>
+            <a:endParaRPr/>
+          </a:p>
+          <a:p>
+            <a:pPr lvl="4">
+              <a:defRPr/>
+            </a:pPr>
+            <a:r>
+              <a:rPr lang="en-US"/>
               <a:t>Fifth level</a:t>
             </a:r>
             <a:endParaRPr lang="en-US"/>
@@ -398,7 +1258,7 @@
       </p:sp>
       <p:sp>
         <p:nvSpPr>
-          <p:cNvPr id="4" name="Date Placeholder 3"/>
+          <p:cNvPr id="2068903734" name="Date Placeholder 3"/>
           <p:cNvSpPr>
             <a:spLocks noGrp="1"/>
           </p:cNvSpPr>
@@ -406,13 +1266,16 @@
             <p:ph type="dt" sz="half" idx="10"/>
           </p:nvPr>
         </p:nvSpPr>
-        <p:spPr/>
-        <p:txBody>
-          <a:bodyPr/>
-          <a:lstStyle/>
-          <a:p>
+        <p:spPr bwMode="auto"/>
+        <p:txBody>
+          <a:bodyPr/>
+          <a:lstStyle/>
+          <a:p>
+            <a:pPr>
+              <a:defRPr/>
+            </a:pPr>
             <a:fld id="{CD25C055-B408-4243-B31D-8686AF54EE60}" type="datetimeFigureOut">
-              <a:rPr lang="en-US" smtClean="0"/>
+              <a:rPr lang="en-US"/>
               <a:t>3/31/2026</a:t>
             </a:fld>
             <a:endParaRPr lang="en-US"/>
@@ -421,7 +1284,7 @@
       </p:sp>
       <p:sp>
         <p:nvSpPr>
-          <p:cNvPr id="5" name="Footer Placeholder 4"/>
+          <p:cNvPr id="277492492" name="Footer Placeholder 4"/>
           <p:cNvSpPr>
             <a:spLocks noGrp="1"/>
           </p:cNvSpPr>
@@ -429,18 +1292,21 @@
             <p:ph type="ftr" sz="quarter" idx="11"/>
           </p:nvPr>
         </p:nvSpPr>
-        <p:spPr/>
-        <p:txBody>
-          <a:bodyPr/>
-          <a:lstStyle/>
-          <a:p>
-            <a:endParaRPr lang="en-US"/>
-          </a:p>
-        </p:txBody>
-      </p:sp>
-      <p:sp>
-        <p:nvSpPr>
-          <p:cNvPr id="6" name="Slide Number Placeholder 5"/>
+        <p:spPr bwMode="auto"/>
+        <p:txBody>
+          <a:bodyPr/>
+          <a:lstStyle/>
+          <a:p>
+            <a:pPr>
+              <a:defRPr/>
+            </a:pPr>
+            <a:endParaRPr lang="en-US"/>
+          </a:p>
+        </p:txBody>
+      </p:sp>
+      <p:sp>
+        <p:nvSpPr>
+          <p:cNvPr id="20987725" name="Slide Number Placeholder 5"/>
           <p:cNvSpPr>
             <a:spLocks noGrp="1"/>
           </p:cNvSpPr>
@@ -448,13 +1314,16 @@
             <p:ph type="sldNum" sz="quarter" idx="12"/>
           </p:nvPr>
         </p:nvSpPr>
-        <p:spPr/>
-        <p:txBody>
-          <a:bodyPr/>
-          <a:lstStyle/>
-          <a:p>
+        <p:spPr bwMode="auto"/>
+        <p:txBody>
+          <a:bodyPr/>
+          <a:lstStyle/>
+          <a:p>
+            <a:pPr>
+              <a:defRPr/>
+            </a:pPr>
             <a:fld id="{C562C83D-7E9B-49E9-B1CB-FA7EF01CA0DD}" type="slidenum">
-              <a:rPr lang="en-US" smtClean="0"/>
+              <a:rPr lang="en-US"/>
               <a:t>‹#›</a:t>
             </a:fld>
             <a:endParaRPr lang="en-US"/>
@@ -462,11 +1331,6 @@
         </p:txBody>
       </p:sp>
     </p:spTree>
-    <p:extLst>
-      <p:ext uri="{BB962C8B-B14F-4D97-AF65-F5344CB8AC3E}">
-        <p14:creationId xmlns:p14="http://schemas.microsoft.com/office/powerpoint/2010/main" val="1685029205"/>
-      </p:ext>
-    </p:extLst>
   </p:cSld>
   <p:clrMapOvr>
     <a:masterClrMapping/>
@@ -475,7 +1339,7 @@
 </file>
 
 <file path=ppt/slideLayouts/slideLayout11.xml><?xml version="1.0" encoding="utf-8"?>
-<p:sldLayout xmlns:a="http://schemas.openxmlformats.org/drawingml/2006/main" xmlns:r="http://schemas.openxmlformats.org/officeDocument/2006/relationships" xmlns:p="http://schemas.openxmlformats.org/presentationml/2006/main" type="vertTitleAndTx" preserve="1">
+<p:sldLayout xmlns:a="http://schemas.openxmlformats.org/drawingml/2006/main" xmlns:r="http://schemas.openxmlformats.org/officeDocument/2006/relationships" xmlns:p="http://schemas.openxmlformats.org/presentationml/2006/main" xmlns:m="http://schemas.openxmlformats.org/officeDocument/2006/math" xmlns:w="http://schemas.openxmlformats.org/wordprocessingml/2006/main" matchingName="" preserve="1" showMasterPhAnim="0" showMasterSp="1" type="vertTitleAndTx" userDrawn="1">
   <p:cSld name="Vertical Title and Text">
     <p:spTree>
       <p:nvGrpSpPr>
@@ -483,7 +1347,7 @@
         <p:cNvGrpSpPr/>
         <p:nvPr/>
       </p:nvGrpSpPr>
-      <p:grpSpPr>
+      <p:grpSpPr bwMode="auto">
         <a:xfrm>
           <a:off x="0" y="0"/>
           <a:ext cx="0" cy="0"/>
@@ -493,7 +1357,7 @@
       </p:grpSpPr>
       <p:sp>
         <p:nvSpPr>
-          <p:cNvPr id="2" name="Vertical Title 1"/>
+          <p:cNvPr id="902233149" name="Vertical Title 1"/>
           <p:cNvSpPr>
             <a:spLocks noGrp="1"/>
           </p:cNvSpPr>
@@ -501,7 +1365,7 @@
             <p:ph type="title" orient="vert"/>
           </p:nvPr>
         </p:nvSpPr>
-        <p:spPr>
+        <p:spPr bwMode="auto">
           <a:xfrm>
             <a:off x="8724900" y="365125"/>
             <a:ext cx="2628900" cy="5811838"/>
@@ -511,8 +1375,11 @@
           <a:bodyPr vert="eaVert"/>
           <a:lstStyle/>
           <a:p>
-            <a:r>
-              <a:rPr lang="en-US" smtClean="0"/>
+            <a:pPr>
+              <a:defRPr/>
+            </a:pPr>
+            <a:r>
+              <a:rPr lang="en-US"/>
               <a:t>Click to edit Master title style</a:t>
             </a:r>
             <a:endParaRPr lang="en-US"/>
@@ -521,7 +1388,7 @@
       </p:sp>
       <p:sp>
         <p:nvSpPr>
-          <p:cNvPr id="3" name="Vertical Text Placeholder 2"/>
+          <p:cNvPr id="554266464" name="Vertical Text Placeholder 2"/>
           <p:cNvSpPr>
             <a:spLocks noGrp="1"/>
           </p:cNvSpPr>
@@ -529,7 +1396,7 @@
             <p:ph type="body" orient="vert" idx="1"/>
           </p:nvPr>
         </p:nvSpPr>
-        <p:spPr>
+        <p:spPr bwMode="auto">
           <a:xfrm>
             <a:off x="838200" y="365125"/>
             <a:ext cx="7734300" cy="5811838"/>
@@ -539,37 +1406,51 @@
           <a:bodyPr vert="eaVert"/>
           <a:lstStyle/>
           <a:p>
-            <a:pPr lvl="0"/>
-            <a:r>
-              <a:rPr lang="en-US" smtClean="0"/>
+            <a:pPr lvl="0">
+              <a:defRPr/>
+            </a:pPr>
+            <a:r>
+              <a:rPr lang="en-US"/>
               <a:t>Edit Master text styles</a:t>
             </a:r>
-          </a:p>
-          <a:p>
-            <a:pPr lvl="1"/>
-            <a:r>
-              <a:rPr lang="en-US" smtClean="0"/>
+            <a:endParaRPr/>
+          </a:p>
+          <a:p>
+            <a:pPr lvl="1">
+              <a:defRPr/>
+            </a:pPr>
+            <a:r>
+              <a:rPr lang="en-US"/>
               <a:t>Second level</a:t>
             </a:r>
-          </a:p>
-          <a:p>
-            <a:pPr lvl="2"/>
-            <a:r>
-              <a:rPr lang="en-US" smtClean="0"/>
+            <a:endParaRPr/>
+          </a:p>
+          <a:p>
+            <a:pPr lvl="2">
+              <a:defRPr/>
+            </a:pPr>
+            <a:r>
+              <a:rPr lang="en-US"/>
               <a:t>Third level</a:t>
             </a:r>
-          </a:p>
-          <a:p>
-            <a:pPr lvl="3"/>
-            <a:r>
-              <a:rPr lang="en-US" smtClean="0"/>
+            <a:endParaRPr/>
+          </a:p>
+          <a:p>
+            <a:pPr lvl="3">
+              <a:defRPr/>
+            </a:pPr>
+            <a:r>
+              <a:rPr lang="en-US"/>
               <a:t>Fourth level</a:t>
             </a:r>
-          </a:p>
-          <a:p>
-            <a:pPr lvl="4"/>
-            <a:r>
-              <a:rPr lang="en-US" smtClean="0"/>
+            <a:endParaRPr/>
+          </a:p>
+          <a:p>
+            <a:pPr lvl="4">
+              <a:defRPr/>
+            </a:pPr>
+            <a:r>
+              <a:rPr lang="en-US"/>
               <a:t>Fifth level</a:t>
             </a:r>
             <a:endParaRPr lang="en-US"/>
@@ -578,7 +1459,7 @@
       </p:sp>
       <p:sp>
         <p:nvSpPr>
-          <p:cNvPr id="4" name="Date Placeholder 3"/>
+          <p:cNvPr id="85535230" name="Date Placeholder 3"/>
           <p:cNvSpPr>
             <a:spLocks noGrp="1"/>
           </p:cNvSpPr>
@@ -586,13 +1467,16 @@
             <p:ph type="dt" sz="half" idx="10"/>
           </p:nvPr>
         </p:nvSpPr>
-        <p:spPr/>
-        <p:txBody>
-          <a:bodyPr/>
-          <a:lstStyle/>
-          <a:p>
+        <p:spPr bwMode="auto"/>
+        <p:txBody>
+          <a:bodyPr/>
+          <a:lstStyle/>
+          <a:p>
+            <a:pPr>
+              <a:defRPr/>
+            </a:pPr>
             <a:fld id="{CD25C055-B408-4243-B31D-8686AF54EE60}" type="datetimeFigureOut">
-              <a:rPr lang="en-US" smtClean="0"/>
+              <a:rPr lang="en-US"/>
               <a:t>3/31/2026</a:t>
             </a:fld>
             <a:endParaRPr lang="en-US"/>
@@ -601,7 +1485,7 @@
       </p:sp>
       <p:sp>
         <p:nvSpPr>
-          <p:cNvPr id="5" name="Footer Placeholder 4"/>
+          <p:cNvPr id="1157796090" name="Footer Placeholder 4"/>
           <p:cNvSpPr>
             <a:spLocks noGrp="1"/>
           </p:cNvSpPr>
@@ -609,18 +1493,21 @@
             <p:ph type="ftr" sz="quarter" idx="11"/>
           </p:nvPr>
         </p:nvSpPr>
-        <p:spPr/>
-        <p:txBody>
-          <a:bodyPr/>
-          <a:lstStyle/>
-          <a:p>
-            <a:endParaRPr lang="en-US"/>
-          </a:p>
-        </p:txBody>
-      </p:sp>
-      <p:sp>
-        <p:nvSpPr>
-          <p:cNvPr id="6" name="Slide Number Placeholder 5"/>
+        <p:spPr bwMode="auto"/>
+        <p:txBody>
+          <a:bodyPr/>
+          <a:lstStyle/>
+          <a:p>
+            <a:pPr>
+              <a:defRPr/>
+            </a:pPr>
+            <a:endParaRPr lang="en-US"/>
+          </a:p>
+        </p:txBody>
+      </p:sp>
+      <p:sp>
+        <p:nvSpPr>
+          <p:cNvPr id="2056973351" name="Slide Number Placeholder 5"/>
           <p:cNvSpPr>
             <a:spLocks noGrp="1"/>
           </p:cNvSpPr>
@@ -628,13 +1515,16 @@
             <p:ph type="sldNum" sz="quarter" idx="12"/>
           </p:nvPr>
         </p:nvSpPr>
-        <p:spPr/>
-        <p:txBody>
-          <a:bodyPr/>
-          <a:lstStyle/>
-          <a:p>
+        <p:spPr bwMode="auto"/>
+        <p:txBody>
+          <a:bodyPr/>
+          <a:lstStyle/>
+          <a:p>
+            <a:pPr>
+              <a:defRPr/>
+            </a:pPr>
             <a:fld id="{C562C83D-7E9B-49E9-B1CB-FA7EF01CA0DD}" type="slidenum">
-              <a:rPr lang="en-US" smtClean="0"/>
+              <a:rPr lang="en-US"/>
               <a:t>‹#›</a:t>
             </a:fld>
             <a:endParaRPr lang="en-US"/>
@@ -642,11 +1532,6 @@
         </p:txBody>
       </p:sp>
     </p:spTree>
-    <p:extLst>
-      <p:ext uri="{BB962C8B-B14F-4D97-AF65-F5344CB8AC3E}">
-        <p14:creationId xmlns:p14="http://schemas.microsoft.com/office/powerpoint/2010/main" val="2227194350"/>
-      </p:ext>
-    </p:extLst>
   </p:cSld>
   <p:clrMapOvr>
     <a:masterClrMapping/>
@@ -655,7 +1540,7 @@
 </file>
 
 <file path=ppt/slideLayouts/slideLayout2.xml><?xml version="1.0" encoding="utf-8"?>
-<p:sldLayout xmlns:a="http://schemas.openxmlformats.org/drawingml/2006/main" xmlns:r="http://schemas.openxmlformats.org/officeDocument/2006/relationships" xmlns:p="http://schemas.openxmlformats.org/presentationml/2006/main" type="obj" preserve="1">
+<p:sldLayout xmlns:a="http://schemas.openxmlformats.org/drawingml/2006/main" xmlns:r="http://schemas.openxmlformats.org/officeDocument/2006/relationships" xmlns:p="http://schemas.openxmlformats.org/presentationml/2006/main" xmlns:m="http://schemas.openxmlformats.org/officeDocument/2006/math" xmlns:w="http://schemas.openxmlformats.org/wordprocessingml/2006/main" matchingName="" preserve="1" showMasterPhAnim="0" showMasterSp="1" type="obj" userDrawn="1">
   <p:cSld name="Title and Content">
     <p:spTree>
       <p:nvGrpSpPr>
@@ -663,7 +1548,7 @@
         <p:cNvGrpSpPr/>
         <p:nvPr/>
       </p:nvGrpSpPr>
-      <p:grpSpPr>
+      <p:grpSpPr bwMode="auto">
         <a:xfrm>
           <a:off x="0" y="0"/>
           <a:ext cx="0" cy="0"/>
@@ -673,7 +1558,7 @@
       </p:grpSpPr>
       <p:sp>
         <p:nvSpPr>
-          <p:cNvPr id="2" name="Title 1"/>
+          <p:cNvPr id="1605758971" name="Title 1"/>
           <p:cNvSpPr>
             <a:spLocks noGrp="1"/>
           </p:cNvSpPr>
@@ -681,13 +1566,16 @@
             <p:ph type="title"/>
           </p:nvPr>
         </p:nvSpPr>
-        <p:spPr/>
-        <p:txBody>
-          <a:bodyPr/>
-          <a:lstStyle/>
-          <a:p>
-            <a:r>
-              <a:rPr lang="en-US" smtClean="0"/>
+        <p:spPr bwMode="auto"/>
+        <p:txBody>
+          <a:bodyPr/>
+          <a:lstStyle/>
+          <a:p>
+            <a:pPr>
+              <a:defRPr/>
+            </a:pPr>
+            <a:r>
+              <a:rPr lang="en-US"/>
               <a:t>Click to edit Master title style</a:t>
             </a:r>
             <a:endParaRPr lang="en-US"/>
@@ -696,7 +1584,7 @@
       </p:sp>
       <p:sp>
         <p:nvSpPr>
-          <p:cNvPr id="3" name="Content Placeholder 2"/>
+          <p:cNvPr id="1499794881" name="Content Placeholder 2"/>
           <p:cNvSpPr>
             <a:spLocks noGrp="1"/>
           </p:cNvSpPr>
@@ -704,42 +1592,56 @@
             <p:ph idx="1"/>
           </p:nvPr>
         </p:nvSpPr>
-        <p:spPr/>
-        <p:txBody>
-          <a:bodyPr/>
-          <a:lstStyle/>
-          <a:p>
-            <a:pPr lvl="0"/>
-            <a:r>
-              <a:rPr lang="en-US" smtClean="0"/>
+        <p:spPr bwMode="auto"/>
+        <p:txBody>
+          <a:bodyPr/>
+          <a:lstStyle/>
+          <a:p>
+            <a:pPr lvl="0">
+              <a:defRPr/>
+            </a:pPr>
+            <a:r>
+              <a:rPr lang="en-US"/>
               <a:t>Edit Master text styles</a:t>
             </a:r>
-          </a:p>
-          <a:p>
-            <a:pPr lvl="1"/>
-            <a:r>
-              <a:rPr lang="en-US" smtClean="0"/>
+            <a:endParaRPr/>
+          </a:p>
+          <a:p>
+            <a:pPr lvl="1">
+              <a:defRPr/>
+            </a:pPr>
+            <a:r>
+              <a:rPr lang="en-US"/>
               <a:t>Second level</a:t>
             </a:r>
-          </a:p>
-          <a:p>
-            <a:pPr lvl="2"/>
-            <a:r>
-              <a:rPr lang="en-US" smtClean="0"/>
+            <a:endParaRPr/>
+          </a:p>
+          <a:p>
+            <a:pPr lvl="2">
+              <a:defRPr/>
+            </a:pPr>
+            <a:r>
+              <a:rPr lang="en-US"/>
               <a:t>Third level</a:t>
             </a:r>
-          </a:p>
-          <a:p>
-            <a:pPr lvl="3"/>
-            <a:r>
-              <a:rPr lang="en-US" smtClean="0"/>
+            <a:endParaRPr/>
+          </a:p>
+          <a:p>
+            <a:pPr lvl="3">
+              <a:defRPr/>
+            </a:pPr>
+            <a:r>
+              <a:rPr lang="en-US"/>
               <a:t>Fourth level</a:t>
             </a:r>
-          </a:p>
-          <a:p>
-            <a:pPr lvl="4"/>
-            <a:r>
-              <a:rPr lang="en-US" smtClean="0"/>
+            <a:endParaRPr/>
+          </a:p>
+          <a:p>
+            <a:pPr lvl="4">
+              <a:defRPr/>
+            </a:pPr>
+            <a:r>
+              <a:rPr lang="en-US"/>
               <a:t>Fifth level</a:t>
             </a:r>
             <a:endParaRPr lang="en-US"/>
@@ -748,7 +1650,7 @@
       </p:sp>
       <p:sp>
         <p:nvSpPr>
-          <p:cNvPr id="4" name="Date Placeholder 3"/>
+          <p:cNvPr id="277134138" name="Date Placeholder 3"/>
           <p:cNvSpPr>
             <a:spLocks noGrp="1"/>
           </p:cNvSpPr>
@@ -756,13 +1658,16 @@
             <p:ph type="dt" sz="half" idx="10"/>
           </p:nvPr>
         </p:nvSpPr>
-        <p:spPr/>
-        <p:txBody>
-          <a:bodyPr/>
-          <a:lstStyle/>
-          <a:p>
+        <p:spPr bwMode="auto"/>
+        <p:txBody>
+          <a:bodyPr/>
+          <a:lstStyle/>
+          <a:p>
+            <a:pPr>
+              <a:defRPr/>
+            </a:pPr>
             <a:fld id="{CD25C055-B408-4243-B31D-8686AF54EE60}" type="datetimeFigureOut">
-              <a:rPr lang="en-US" smtClean="0"/>
+              <a:rPr lang="en-US"/>
               <a:t>3/31/2026</a:t>
             </a:fld>
             <a:endParaRPr lang="en-US"/>
@@ -771,7 +1676,7 @@
       </p:sp>
       <p:sp>
         <p:nvSpPr>
-          <p:cNvPr id="5" name="Footer Placeholder 4"/>
+          <p:cNvPr id="310347199" name="Footer Placeholder 4"/>
           <p:cNvSpPr>
             <a:spLocks noGrp="1"/>
           </p:cNvSpPr>
@@ -779,18 +1684,21 @@
             <p:ph type="ftr" sz="quarter" idx="11"/>
           </p:nvPr>
         </p:nvSpPr>
-        <p:spPr/>
-        <p:txBody>
-          <a:bodyPr/>
-          <a:lstStyle/>
-          <a:p>
-            <a:endParaRPr lang="en-US"/>
-          </a:p>
-        </p:txBody>
-      </p:sp>
-      <p:sp>
-        <p:nvSpPr>
-          <p:cNvPr id="6" name="Slide Number Placeholder 5"/>
+        <p:spPr bwMode="auto"/>
+        <p:txBody>
+          <a:bodyPr/>
+          <a:lstStyle/>
+          <a:p>
+            <a:pPr>
+              <a:defRPr/>
+            </a:pPr>
+            <a:endParaRPr lang="en-US"/>
+          </a:p>
+        </p:txBody>
+      </p:sp>
+      <p:sp>
+        <p:nvSpPr>
+          <p:cNvPr id="1632389065" name="Slide Number Placeholder 5"/>
           <p:cNvSpPr>
             <a:spLocks noGrp="1"/>
           </p:cNvSpPr>
@@ -798,13 +1706,16 @@
             <p:ph type="sldNum" sz="quarter" idx="12"/>
           </p:nvPr>
         </p:nvSpPr>
-        <p:spPr/>
-        <p:txBody>
-          <a:bodyPr/>
-          <a:lstStyle/>
-          <a:p>
+        <p:spPr bwMode="auto"/>
+        <p:txBody>
+          <a:bodyPr/>
+          <a:lstStyle/>
+          <a:p>
+            <a:pPr>
+              <a:defRPr/>
+            </a:pPr>
             <a:fld id="{C562C83D-7E9B-49E9-B1CB-FA7EF01CA0DD}" type="slidenum">
-              <a:rPr lang="en-US" smtClean="0"/>
+              <a:rPr lang="en-US"/>
               <a:t>‹#›</a:t>
             </a:fld>
             <a:endParaRPr lang="en-US"/>
@@ -812,11 +1723,6 @@
         </p:txBody>
       </p:sp>
     </p:spTree>
-    <p:extLst>
-      <p:ext uri="{BB962C8B-B14F-4D97-AF65-F5344CB8AC3E}">
-        <p14:creationId xmlns:p14="http://schemas.microsoft.com/office/powerpoint/2010/main" val="1400291938"/>
-      </p:ext>
-    </p:extLst>
   </p:cSld>
   <p:clrMapOvr>
     <a:masterClrMapping/>
@@ -825,7 +1731,7 @@
 </file>
 
 <file path=ppt/slideLayouts/slideLayout3.xml><?xml version="1.0" encoding="utf-8"?>
-<p:sldLayout xmlns:a="http://schemas.openxmlformats.org/drawingml/2006/main" xmlns:r="http://schemas.openxmlformats.org/officeDocument/2006/relationships" xmlns:p="http://schemas.openxmlformats.org/presentationml/2006/main" type="secHead" preserve="1">
+<p:sldLayout xmlns:a="http://schemas.openxmlformats.org/drawingml/2006/main" xmlns:r="http://schemas.openxmlformats.org/officeDocument/2006/relationships" xmlns:p="http://schemas.openxmlformats.org/presentationml/2006/main" xmlns:m="http://schemas.openxmlformats.org/officeDocument/2006/math" xmlns:w="http://schemas.openxmlformats.org/wordprocessingml/2006/main" matchingName="" preserve="1" showMasterPhAnim="0" showMasterSp="1" type="secHead" userDrawn="1">
   <p:cSld name="Section Header">
     <p:spTree>
       <p:nvGrpSpPr>
@@ -833,7 +1739,7 @@
         <p:cNvGrpSpPr/>
         <p:nvPr/>
       </p:nvGrpSpPr>
-      <p:grpSpPr>
+      <p:grpSpPr bwMode="auto">
         <a:xfrm>
           <a:off x="0" y="0"/>
           <a:ext cx="0" cy="0"/>
@@ -843,7 +1749,7 @@
       </p:grpSpPr>
       <p:sp>
         <p:nvSpPr>
-          <p:cNvPr id="2" name="Title 1"/>
+          <p:cNvPr id="114188479" name="Title 1"/>
           <p:cNvSpPr>
             <a:spLocks noGrp="1"/>
           </p:cNvSpPr>
@@ -851,7 +1757,7 @@
             <p:ph type="title"/>
           </p:nvPr>
         </p:nvSpPr>
-        <p:spPr>
+        <p:spPr bwMode="auto">
           <a:xfrm>
             <a:off x="831850" y="1709738"/>
             <a:ext cx="10515600" cy="2852737"/>
@@ -865,8 +1771,11 @@
             </a:lvl1pPr>
           </a:lstStyle>
           <a:p>
-            <a:r>
-              <a:rPr lang="en-US" smtClean="0"/>
+            <a:pPr>
+              <a:defRPr/>
+            </a:pPr>
+            <a:r>
+              <a:rPr lang="en-US"/>
               <a:t>Click to edit Master title style</a:t>
             </a:r>
             <a:endParaRPr lang="en-US"/>
@@ -875,7 +1784,7 @@
       </p:sp>
       <p:sp>
         <p:nvSpPr>
-          <p:cNvPr id="3" name="Text Placeholder 2"/>
+          <p:cNvPr id="2050389699" name="Text Placeholder 2"/>
           <p:cNvSpPr>
             <a:spLocks noGrp="1"/>
           </p:cNvSpPr>
@@ -883,7 +1792,7 @@
             <p:ph type="body" idx="1"/>
           </p:nvPr>
         </p:nvSpPr>
-        <p:spPr>
+        <p:spPr bwMode="auto">
           <a:xfrm>
             <a:off x="831850" y="4589463"/>
             <a:ext cx="10515600" cy="1500187"/>
@@ -984,17 +1893,20 @@
             </a:lvl9pPr>
           </a:lstStyle>
           <a:p>
-            <a:pPr lvl="0"/>
-            <a:r>
-              <a:rPr lang="en-US" smtClean="0"/>
+            <a:pPr lvl="0">
+              <a:defRPr/>
+            </a:pPr>
+            <a:r>
+              <a:rPr lang="en-US"/>
               <a:t>Edit Master text styles</a:t>
             </a:r>
-          </a:p>
-        </p:txBody>
-      </p:sp>
-      <p:sp>
-        <p:nvSpPr>
-          <p:cNvPr id="4" name="Date Placeholder 3"/>
+            <a:endParaRPr/>
+          </a:p>
+        </p:txBody>
+      </p:sp>
+      <p:sp>
+        <p:nvSpPr>
+          <p:cNvPr id="1731004962" name="Date Placeholder 3"/>
           <p:cNvSpPr>
             <a:spLocks noGrp="1"/>
           </p:cNvSpPr>
@@ -1002,13 +1914,16 @@
             <p:ph type="dt" sz="half" idx="10"/>
           </p:nvPr>
         </p:nvSpPr>
-        <p:spPr/>
-        <p:txBody>
-          <a:bodyPr/>
-          <a:lstStyle/>
-          <a:p>
+        <p:spPr bwMode="auto"/>
+        <p:txBody>
+          <a:bodyPr/>
+          <a:lstStyle/>
+          <a:p>
+            <a:pPr>
+              <a:defRPr/>
+            </a:pPr>
             <a:fld id="{CD25C055-B408-4243-B31D-8686AF54EE60}" type="datetimeFigureOut">
-              <a:rPr lang="en-US" smtClean="0"/>
+              <a:rPr lang="en-US"/>
               <a:t>3/31/2026</a:t>
             </a:fld>
             <a:endParaRPr lang="en-US"/>
@@ -1017,7 +1932,7 @@
       </p:sp>
       <p:sp>
         <p:nvSpPr>
-          <p:cNvPr id="5" name="Footer Placeholder 4"/>
+          <p:cNvPr id="485552510" name="Footer Placeholder 4"/>
           <p:cNvSpPr>
             <a:spLocks noGrp="1"/>
           </p:cNvSpPr>
@@ -1025,18 +1940,21 @@
             <p:ph type="ftr" sz="quarter" idx="11"/>
           </p:nvPr>
         </p:nvSpPr>
-        <p:spPr/>
-        <p:txBody>
-          <a:bodyPr/>
-          <a:lstStyle/>
-          <a:p>
-            <a:endParaRPr lang="en-US"/>
-          </a:p>
-        </p:txBody>
-      </p:sp>
-      <p:sp>
-        <p:nvSpPr>
-          <p:cNvPr id="6" name="Slide Number Placeholder 5"/>
+        <p:spPr bwMode="auto"/>
+        <p:txBody>
+          <a:bodyPr/>
+          <a:lstStyle/>
+          <a:p>
+            <a:pPr>
+              <a:defRPr/>
+            </a:pPr>
+            <a:endParaRPr lang="en-US"/>
+          </a:p>
+        </p:txBody>
+      </p:sp>
+      <p:sp>
+        <p:nvSpPr>
+          <p:cNvPr id="186501886" name="Slide Number Placeholder 5"/>
           <p:cNvSpPr>
             <a:spLocks noGrp="1"/>
           </p:cNvSpPr>
@@ -1044,13 +1962,16 @@
             <p:ph type="sldNum" sz="quarter" idx="12"/>
           </p:nvPr>
         </p:nvSpPr>
-        <p:spPr/>
-        <p:txBody>
-          <a:bodyPr/>
-          <a:lstStyle/>
-          <a:p>
+        <p:spPr bwMode="auto"/>
+        <p:txBody>
+          <a:bodyPr/>
+          <a:lstStyle/>
+          <a:p>
+            <a:pPr>
+              <a:defRPr/>
+            </a:pPr>
             <a:fld id="{C562C83D-7E9B-49E9-B1CB-FA7EF01CA0DD}" type="slidenum">
-              <a:rPr lang="en-US" smtClean="0"/>
+              <a:rPr lang="en-US"/>
               <a:t>‹#›</a:t>
             </a:fld>
             <a:endParaRPr lang="en-US"/>
@@ -1058,11 +1979,6 @@
         </p:txBody>
       </p:sp>
     </p:spTree>
-    <p:extLst>
-      <p:ext uri="{BB962C8B-B14F-4D97-AF65-F5344CB8AC3E}">
-        <p14:creationId xmlns:p14="http://schemas.microsoft.com/office/powerpoint/2010/main" val="4103183272"/>
-      </p:ext>
-    </p:extLst>
   </p:cSld>
   <p:clrMapOvr>
     <a:masterClrMapping/>
@@ -1071,7 +1987,7 @@
 </file>
 
 <file path=ppt/slideLayouts/slideLayout4.xml><?xml version="1.0" encoding="utf-8"?>
-<p:sldLayout xmlns:a="http://schemas.openxmlformats.org/drawingml/2006/main" xmlns:r="http://schemas.openxmlformats.org/officeDocument/2006/relationships" xmlns:p="http://schemas.openxmlformats.org/presentationml/2006/main" type="twoObj" preserve="1">
+<p:sldLayout xmlns:a="http://schemas.openxmlformats.org/drawingml/2006/main" xmlns:r="http://schemas.openxmlformats.org/officeDocument/2006/relationships" xmlns:p="http://schemas.openxmlformats.org/presentationml/2006/main" xmlns:m="http://schemas.openxmlformats.org/officeDocument/2006/math" xmlns:w="http://schemas.openxmlformats.org/wordprocessingml/2006/main" matchingName="" preserve="1" showMasterPhAnim="0" showMasterSp="1" type="twoObj" userDrawn="1">
   <p:cSld name="Two Content">
     <p:spTree>
       <p:nvGrpSpPr>
@@ -1079,7 +1995,7 @@
         <p:cNvGrpSpPr/>
         <p:nvPr/>
       </p:nvGrpSpPr>
-      <p:grpSpPr>
+      <p:grpSpPr bwMode="auto">
         <a:xfrm>
           <a:off x="0" y="0"/>
           <a:ext cx="0" cy="0"/>
@@ -1089,7 +2005,7 @@
       </p:grpSpPr>
       <p:sp>
         <p:nvSpPr>
-          <p:cNvPr id="2" name="Title 1"/>
+          <p:cNvPr id="1994859313" name="Title 1"/>
           <p:cNvSpPr>
             <a:spLocks noGrp="1"/>
           </p:cNvSpPr>
@@ -1097,13 +2013,16 @@
             <p:ph type="title"/>
           </p:nvPr>
         </p:nvSpPr>
-        <p:spPr/>
-        <p:txBody>
-          <a:bodyPr/>
-          <a:lstStyle/>
-          <a:p>
-            <a:r>
-              <a:rPr lang="en-US" smtClean="0"/>
+        <p:spPr bwMode="auto"/>
+        <p:txBody>
+          <a:bodyPr/>
+          <a:lstStyle/>
+          <a:p>
+            <a:pPr>
+              <a:defRPr/>
+            </a:pPr>
+            <a:r>
+              <a:rPr lang="en-US"/>
               <a:t>Click to edit Master title style</a:t>
             </a:r>
             <a:endParaRPr lang="en-US"/>
@@ -1112,7 +2031,7 @@
       </p:sp>
       <p:sp>
         <p:nvSpPr>
-          <p:cNvPr id="3" name="Content Placeholder 2"/>
+          <p:cNvPr id="619669180" name="Content Placeholder 2"/>
           <p:cNvSpPr>
             <a:spLocks noGrp="1"/>
           </p:cNvSpPr>
@@ -1120,7 +2039,7 @@
             <p:ph sz="half" idx="1"/>
           </p:nvPr>
         </p:nvSpPr>
-        <p:spPr>
+        <p:spPr bwMode="auto">
           <a:xfrm>
             <a:off x="838200" y="1825625"/>
             <a:ext cx="5181600" cy="4351338"/>
@@ -1130,37 +2049,51 @@
           <a:bodyPr/>
           <a:lstStyle/>
           <a:p>
-            <a:pPr lvl="0"/>
-            <a:r>
-              <a:rPr lang="en-US" smtClean="0"/>
+            <a:pPr lvl="0">
+              <a:defRPr/>
+            </a:pPr>
+            <a:r>
+              <a:rPr lang="en-US"/>
               <a:t>Edit Master text styles</a:t>
             </a:r>
-          </a:p>
-          <a:p>
-            <a:pPr lvl="1"/>
-            <a:r>
-              <a:rPr lang="en-US" smtClean="0"/>
+            <a:endParaRPr/>
+          </a:p>
+          <a:p>
+            <a:pPr lvl="1">
+              <a:defRPr/>
+            </a:pPr>
+            <a:r>
+              <a:rPr lang="en-US"/>
               <a:t>Second level</a:t>
             </a:r>
-          </a:p>
-          <a:p>
-            <a:pPr lvl="2"/>
-            <a:r>
-              <a:rPr lang="en-US" smtClean="0"/>
+            <a:endParaRPr/>
+          </a:p>
+          <a:p>
+            <a:pPr lvl="2">
+              <a:defRPr/>
+            </a:pPr>
+            <a:r>
+              <a:rPr lang="en-US"/>
               <a:t>Third level</a:t>
             </a:r>
-          </a:p>
-          <a:p>
-            <a:pPr lvl="3"/>
-            <a:r>
-              <a:rPr lang="en-US" smtClean="0"/>
+            <a:endParaRPr/>
+          </a:p>
+          <a:p>
+            <a:pPr lvl="3">
+              <a:defRPr/>
+            </a:pPr>
+            <a:r>
+              <a:rPr lang="en-US"/>
               <a:t>Fourth level</a:t>
             </a:r>
-          </a:p>
-          <a:p>
-            <a:pPr lvl="4"/>
-            <a:r>
-              <a:rPr lang="en-US" smtClean="0"/>
+            <a:endParaRPr/>
+          </a:p>
+          <a:p>
+            <a:pPr lvl="4">
+              <a:defRPr/>
+            </a:pPr>
+            <a:r>
+              <a:rPr lang="en-US"/>
               <a:t>Fifth level</a:t>
             </a:r>
             <a:endParaRPr lang="en-US"/>
@@ -1169,7 +2102,7 @@
       </p:sp>
       <p:sp>
         <p:nvSpPr>
-          <p:cNvPr id="4" name="Content Placeholder 3"/>
+          <p:cNvPr id="117823186" name="Content Placeholder 3"/>
           <p:cNvSpPr>
             <a:spLocks noGrp="1"/>
           </p:cNvSpPr>
@@ -1177,7 +2110,7 @@
             <p:ph sz="half" idx="2"/>
           </p:nvPr>
         </p:nvSpPr>
-        <p:spPr>
+        <p:spPr bwMode="auto">
           <a:xfrm>
             <a:off x="6172200" y="1825625"/>
             <a:ext cx="5181600" cy="4351338"/>
@@ -1187,37 +2120,51 @@
           <a:bodyPr/>
           <a:lstStyle/>
           <a:p>
-            <a:pPr lvl="0"/>
-            <a:r>
-              <a:rPr lang="en-US" smtClean="0"/>
+            <a:pPr lvl="0">
+              <a:defRPr/>
+            </a:pPr>
+            <a:r>
+              <a:rPr lang="en-US"/>
               <a:t>Edit Master text styles</a:t>
             </a:r>
-          </a:p>
-          <a:p>
-            <a:pPr lvl="1"/>
-            <a:r>
-              <a:rPr lang="en-US" smtClean="0"/>
+            <a:endParaRPr/>
+          </a:p>
+          <a:p>
+            <a:pPr lvl="1">
+              <a:defRPr/>
+            </a:pPr>
+            <a:r>
+              <a:rPr lang="en-US"/>
               <a:t>Second level</a:t>
             </a:r>
-          </a:p>
-          <a:p>
-            <a:pPr lvl="2"/>
-            <a:r>
-              <a:rPr lang="en-US" smtClean="0"/>
+            <a:endParaRPr/>
+          </a:p>
+          <a:p>
+            <a:pPr lvl="2">
+              <a:defRPr/>
+            </a:pPr>
+            <a:r>
+              <a:rPr lang="en-US"/>
               <a:t>Third level</a:t>
             </a:r>
-          </a:p>
-          <a:p>
-            <a:pPr lvl="3"/>
-            <a:r>
-              <a:rPr lang="en-US" smtClean="0"/>
+            <a:endParaRPr/>
+          </a:p>
+          <a:p>
+            <a:pPr lvl="3">
+              <a:defRPr/>
+            </a:pPr>
+            <a:r>
+              <a:rPr lang="en-US"/>
               <a:t>Fourth level</a:t>
             </a:r>
-          </a:p>
-          <a:p>
-            <a:pPr lvl="4"/>
-            <a:r>
-              <a:rPr lang="en-US" smtClean="0"/>
+            <a:endParaRPr/>
+          </a:p>
+          <a:p>
+            <a:pPr lvl="4">
+              <a:defRPr/>
+            </a:pPr>
+            <a:r>
+              <a:rPr lang="en-US"/>
               <a:t>Fifth level</a:t>
             </a:r>
             <a:endParaRPr lang="en-US"/>
@@ -1226,7 +2173,7 @@
       </p:sp>
       <p:sp>
         <p:nvSpPr>
-          <p:cNvPr id="5" name="Date Placeholder 4"/>
+          <p:cNvPr id="1378813724" name="Date Placeholder 4"/>
           <p:cNvSpPr>
             <a:spLocks noGrp="1"/>
           </p:cNvSpPr>
@@ -1234,13 +2181,16 @@
             <p:ph type="dt" sz="half" idx="10"/>
           </p:nvPr>
         </p:nvSpPr>
-        <p:spPr/>
-        <p:txBody>
-          <a:bodyPr/>
-          <a:lstStyle/>
-          <a:p>
+        <p:spPr bwMode="auto"/>
+        <p:txBody>
+          <a:bodyPr/>
+          <a:lstStyle/>
+          <a:p>
+            <a:pPr>
+              <a:defRPr/>
+            </a:pPr>
             <a:fld id="{CD25C055-B408-4243-B31D-8686AF54EE60}" type="datetimeFigureOut">
-              <a:rPr lang="en-US" smtClean="0"/>
+              <a:rPr lang="en-US"/>
               <a:t>3/31/2026</a:t>
             </a:fld>
             <a:endParaRPr lang="en-US"/>
@@ -1249,7 +2199,7 @@
       </p:sp>
       <p:sp>
         <p:nvSpPr>
-          <p:cNvPr id="6" name="Footer Placeholder 5"/>
+          <p:cNvPr id="1053487191" name="Footer Placeholder 5"/>
           <p:cNvSpPr>
             <a:spLocks noGrp="1"/>
           </p:cNvSpPr>
@@ -1257,18 +2207,21 @@
             <p:ph type="ftr" sz="quarter" idx="11"/>
           </p:nvPr>
         </p:nvSpPr>
-        <p:spPr/>
-        <p:txBody>
-          <a:bodyPr/>
-          <a:lstStyle/>
-          <a:p>
-            <a:endParaRPr lang="en-US"/>
-          </a:p>
-        </p:txBody>
-      </p:sp>
-      <p:sp>
-        <p:nvSpPr>
-          <p:cNvPr id="7" name="Slide Number Placeholder 6"/>
+        <p:spPr bwMode="auto"/>
+        <p:txBody>
+          <a:bodyPr/>
+          <a:lstStyle/>
+          <a:p>
+            <a:pPr>
+              <a:defRPr/>
+            </a:pPr>
+            <a:endParaRPr lang="en-US"/>
+          </a:p>
+        </p:txBody>
+      </p:sp>
+      <p:sp>
+        <p:nvSpPr>
+          <p:cNvPr id="1972147238" name="Slide Number Placeholder 6"/>
           <p:cNvSpPr>
             <a:spLocks noGrp="1"/>
           </p:cNvSpPr>
@@ -1276,13 +2229,16 @@
             <p:ph type="sldNum" sz="quarter" idx="12"/>
           </p:nvPr>
         </p:nvSpPr>
-        <p:spPr/>
-        <p:txBody>
-          <a:bodyPr/>
-          <a:lstStyle/>
-          <a:p>
+        <p:spPr bwMode="auto"/>
+        <p:txBody>
+          <a:bodyPr/>
+          <a:lstStyle/>
+          <a:p>
+            <a:pPr>
+              <a:defRPr/>
+            </a:pPr>
             <a:fld id="{C562C83D-7E9B-49E9-B1CB-FA7EF01CA0DD}" type="slidenum">
-              <a:rPr lang="en-US" smtClean="0"/>
+              <a:rPr lang="en-US"/>
               <a:t>‹#›</a:t>
             </a:fld>
             <a:endParaRPr lang="en-US"/>
@@ -1290,11 +2246,6 @@
         </p:txBody>
       </p:sp>
     </p:spTree>
-    <p:extLst>
-      <p:ext uri="{BB962C8B-B14F-4D97-AF65-F5344CB8AC3E}">
-        <p14:creationId xmlns:p14="http://schemas.microsoft.com/office/powerpoint/2010/main" val="3188669891"/>
-      </p:ext>
-    </p:extLst>
   </p:cSld>
   <p:clrMapOvr>
     <a:masterClrMapping/>
@@ -1303,7 +2254,7 @@
 </file>
 
 <file path=ppt/slideLayouts/slideLayout5.xml><?xml version="1.0" encoding="utf-8"?>
-<p:sldLayout xmlns:a="http://schemas.openxmlformats.org/drawingml/2006/main" xmlns:r="http://schemas.openxmlformats.org/officeDocument/2006/relationships" xmlns:p="http://schemas.openxmlformats.org/presentationml/2006/main" type="twoTxTwoObj" preserve="1">
+<p:sldLayout xmlns:a="http://schemas.openxmlformats.org/drawingml/2006/main" xmlns:r="http://schemas.openxmlformats.org/officeDocument/2006/relationships" xmlns:p="http://schemas.openxmlformats.org/presentationml/2006/main" xmlns:m="http://schemas.openxmlformats.org/officeDocument/2006/math" xmlns:w="http://schemas.openxmlformats.org/wordprocessingml/2006/main" matchingName="" preserve="1" showMasterPhAnim="0" showMasterSp="1" type="twoTxTwoObj" userDrawn="1">
   <p:cSld name="Comparison">
     <p:spTree>
       <p:nvGrpSpPr>
@@ -1311,7 +2262,7 @@
         <p:cNvGrpSpPr/>
         <p:nvPr/>
       </p:nvGrpSpPr>
-      <p:grpSpPr>
+      <p:grpSpPr bwMode="auto">
         <a:xfrm>
           <a:off x="0" y="0"/>
           <a:ext cx="0" cy="0"/>
@@ -1321,7 +2272,7 @@
       </p:grpSpPr>
       <p:sp>
         <p:nvSpPr>
-          <p:cNvPr id="2" name="Title 1"/>
+          <p:cNvPr id="904921328" name="Title 1"/>
           <p:cNvSpPr>
             <a:spLocks noGrp="1"/>
           </p:cNvSpPr>
@@ -1329,7 +2280,7 @@
             <p:ph type="title"/>
           </p:nvPr>
         </p:nvSpPr>
-        <p:spPr>
+        <p:spPr bwMode="auto">
           <a:xfrm>
             <a:off x="839788" y="365125"/>
             <a:ext cx="10515600" cy="1325563"/>
@@ -1339,8 +2290,11 @@
           <a:bodyPr/>
           <a:lstStyle/>
           <a:p>
-            <a:r>
-              <a:rPr lang="en-US" smtClean="0"/>
+            <a:pPr>
+              <a:defRPr/>
+            </a:pPr>
+            <a:r>
+              <a:rPr lang="en-US"/>
               <a:t>Click to edit Master title style</a:t>
             </a:r>
             <a:endParaRPr lang="en-US"/>
@@ -1349,7 +2303,7 @@
       </p:sp>
       <p:sp>
         <p:nvSpPr>
-          <p:cNvPr id="3" name="Text Placeholder 2"/>
+          <p:cNvPr id="1603399919" name="Text Placeholder 2"/>
           <p:cNvSpPr>
             <a:spLocks noGrp="1"/>
           </p:cNvSpPr>
@@ -1357,7 +2311,7 @@
             <p:ph type="body" idx="1"/>
           </p:nvPr>
         </p:nvSpPr>
-        <p:spPr>
+        <p:spPr bwMode="auto">
           <a:xfrm>
             <a:off x="839788" y="1681163"/>
             <a:ext cx="5157787" cy="823912"/>
@@ -1404,17 +2358,20 @@
             </a:lvl9pPr>
           </a:lstStyle>
           <a:p>
-            <a:pPr lvl="0"/>
-            <a:r>
-              <a:rPr lang="en-US" smtClean="0"/>
+            <a:pPr lvl="0">
+              <a:defRPr/>
+            </a:pPr>
+            <a:r>
+              <a:rPr lang="en-US"/>
               <a:t>Edit Master text styles</a:t>
             </a:r>
-          </a:p>
-        </p:txBody>
-      </p:sp>
-      <p:sp>
-        <p:nvSpPr>
-          <p:cNvPr id="4" name="Content Placeholder 3"/>
+            <a:endParaRPr/>
+          </a:p>
+        </p:txBody>
+      </p:sp>
+      <p:sp>
+        <p:nvSpPr>
+          <p:cNvPr id="112097050" name="Content Placeholder 3"/>
           <p:cNvSpPr>
             <a:spLocks noGrp="1"/>
           </p:cNvSpPr>
@@ -1422,9 +2379,9 @@
             <p:ph sz="half" idx="2"/>
           </p:nvPr>
         </p:nvSpPr>
-        <p:spPr>
+        <p:spPr bwMode="auto">
           <a:xfrm>
-            <a:off x="839788" y="2505075"/>
+            <a:off x="839788" y="2505074"/>
             <a:ext cx="5157787" cy="3684588"/>
           </a:xfrm>
         </p:spPr>
@@ -1432,37 +2389,51 @@
           <a:bodyPr/>
           <a:lstStyle/>
           <a:p>
-            <a:pPr lvl="0"/>
-            <a:r>
-              <a:rPr lang="en-US" smtClean="0"/>
+            <a:pPr lvl="0">
+              <a:defRPr/>
+            </a:pPr>
+            <a:r>
+              <a:rPr lang="en-US"/>
               <a:t>Edit Master text styles</a:t>
             </a:r>
-          </a:p>
-          <a:p>
-            <a:pPr lvl="1"/>
-            <a:r>
-              <a:rPr lang="en-US" smtClean="0"/>
+            <a:endParaRPr/>
+          </a:p>
+          <a:p>
+            <a:pPr lvl="1">
+              <a:defRPr/>
+            </a:pPr>
+            <a:r>
+              <a:rPr lang="en-US"/>
               <a:t>Second level</a:t>
             </a:r>
-          </a:p>
-          <a:p>
-            <a:pPr lvl="2"/>
-            <a:r>
-              <a:rPr lang="en-US" smtClean="0"/>
+            <a:endParaRPr/>
+          </a:p>
+          <a:p>
+            <a:pPr lvl="2">
+              <a:defRPr/>
+            </a:pPr>
+            <a:r>
+              <a:rPr lang="en-US"/>
               <a:t>Third level</a:t>
             </a:r>
-          </a:p>
-          <a:p>
-            <a:pPr lvl="3"/>
-            <a:r>
-              <a:rPr lang="en-US" smtClean="0"/>
+            <a:endParaRPr/>
+          </a:p>
+          <a:p>
+            <a:pPr lvl="3">
+              <a:defRPr/>
+            </a:pPr>
+            <a:r>
+              <a:rPr lang="en-US"/>
               <a:t>Fourth level</a:t>
             </a:r>
-          </a:p>
-          <a:p>
-            <a:pPr lvl="4"/>
-            <a:r>
-              <a:rPr lang="en-US" smtClean="0"/>
+            <a:endParaRPr/>
+          </a:p>
+          <a:p>
+            <a:pPr lvl="4">
+              <a:defRPr/>
+            </a:pPr>
+            <a:r>
+              <a:rPr lang="en-US"/>
               <a:t>Fifth level</a:t>
             </a:r>
             <a:endParaRPr lang="en-US"/>
@@ -1471,7 +2442,7 @@
       </p:sp>
       <p:sp>
         <p:nvSpPr>
-          <p:cNvPr id="5" name="Text Placeholder 4"/>
+          <p:cNvPr id="1208725864" name="Text Placeholder 4"/>
           <p:cNvSpPr>
             <a:spLocks noGrp="1"/>
           </p:cNvSpPr>
@@ -1479,7 +2450,7 @@
             <p:ph type="body" sz="quarter" idx="3"/>
           </p:nvPr>
         </p:nvSpPr>
-        <p:spPr>
+        <p:spPr bwMode="auto">
           <a:xfrm>
             <a:off x="6172200" y="1681163"/>
             <a:ext cx="5183188" cy="823912"/>
@@ -1526,17 +2497,20 @@
             </a:lvl9pPr>
           </a:lstStyle>
           <a:p>
-            <a:pPr lvl="0"/>
-            <a:r>
-              <a:rPr lang="en-US" smtClean="0"/>
+            <a:pPr lvl="0">
+              <a:defRPr/>
+            </a:pPr>
+            <a:r>
+              <a:rPr lang="en-US"/>
               <a:t>Edit Master text styles</a:t>
             </a:r>
-          </a:p>
-        </p:txBody>
-      </p:sp>
-      <p:sp>
-        <p:nvSpPr>
-          <p:cNvPr id="6" name="Content Placeholder 5"/>
+            <a:endParaRPr/>
+          </a:p>
+        </p:txBody>
+      </p:sp>
+      <p:sp>
+        <p:nvSpPr>
+          <p:cNvPr id="644778819" name="Content Placeholder 5"/>
           <p:cNvSpPr>
             <a:spLocks noGrp="1"/>
           </p:cNvSpPr>
@@ -1544,9 +2518,9 @@
             <p:ph sz="quarter" idx="4"/>
           </p:nvPr>
         </p:nvSpPr>
-        <p:spPr>
+        <p:spPr bwMode="auto">
           <a:xfrm>
-            <a:off x="6172200" y="2505075"/>
+            <a:off x="6172200" y="2505074"/>
             <a:ext cx="5183188" cy="3684588"/>
           </a:xfrm>
         </p:spPr>
@@ -1554,37 +2528,51 @@
           <a:bodyPr/>
           <a:lstStyle/>
           <a:p>
-            <a:pPr lvl="0"/>
-            <a:r>
-              <a:rPr lang="en-US" smtClean="0"/>
+            <a:pPr lvl="0">
+              <a:defRPr/>
+            </a:pPr>
+            <a:r>
+              <a:rPr lang="en-US"/>
               <a:t>Edit Master text styles</a:t>
             </a:r>
-          </a:p>
-          <a:p>
-            <a:pPr lvl="1"/>
-            <a:r>
-              <a:rPr lang="en-US" smtClean="0"/>
+            <a:endParaRPr/>
+          </a:p>
+          <a:p>
+            <a:pPr lvl="1">
+              <a:defRPr/>
+            </a:pPr>
+            <a:r>
+              <a:rPr lang="en-US"/>
               <a:t>Second level</a:t>
             </a:r>
-          </a:p>
-          <a:p>
-            <a:pPr lvl="2"/>
-            <a:r>
-              <a:rPr lang="en-US" smtClean="0"/>
+            <a:endParaRPr/>
+          </a:p>
+          <a:p>
+            <a:pPr lvl="2">
+              <a:defRPr/>
+            </a:pPr>
+            <a:r>
+              <a:rPr lang="en-US"/>
               <a:t>Third level</a:t>
             </a:r>
-          </a:p>
-          <a:p>
-            <a:pPr lvl="3"/>
-            <a:r>
-              <a:rPr lang="en-US" smtClean="0"/>
+            <a:endParaRPr/>
+          </a:p>
+          <a:p>
+            <a:pPr lvl="3">
+              <a:defRPr/>
+            </a:pPr>
+            <a:r>
+              <a:rPr lang="en-US"/>
               <a:t>Fourth level</a:t>
             </a:r>
-          </a:p>
-          <a:p>
-            <a:pPr lvl="4"/>
-            <a:r>
-              <a:rPr lang="en-US" smtClean="0"/>
+            <a:endParaRPr/>
+          </a:p>
+          <a:p>
+            <a:pPr lvl="4">
+              <a:defRPr/>
+            </a:pPr>
+            <a:r>
+              <a:rPr lang="en-US"/>
               <a:t>Fifth level</a:t>
             </a:r>
             <a:endParaRPr lang="en-US"/>
@@ -1593,7 +2581,7 @@
       </p:sp>
       <p:sp>
         <p:nvSpPr>
-          <p:cNvPr id="7" name="Date Placeholder 6"/>
+          <p:cNvPr id="2088907207" name="Date Placeholder 6"/>
           <p:cNvSpPr>
             <a:spLocks noGrp="1"/>
           </p:cNvSpPr>
@@ -1601,13 +2589,16 @@
             <p:ph type="dt" sz="half" idx="10"/>
           </p:nvPr>
         </p:nvSpPr>
-        <p:spPr/>
-        <p:txBody>
-          <a:bodyPr/>
-          <a:lstStyle/>
-          <a:p>
+        <p:spPr bwMode="auto"/>
+        <p:txBody>
+          <a:bodyPr/>
+          <a:lstStyle/>
+          <a:p>
+            <a:pPr>
+              <a:defRPr/>
+            </a:pPr>
             <a:fld id="{CD25C055-B408-4243-B31D-8686AF54EE60}" type="datetimeFigureOut">
-              <a:rPr lang="en-US" smtClean="0"/>
+              <a:rPr lang="en-US"/>
               <a:t>3/31/2026</a:t>
             </a:fld>
             <a:endParaRPr lang="en-US"/>
@@ -1616,7 +2607,7 @@
       </p:sp>
       <p:sp>
         <p:nvSpPr>
-          <p:cNvPr id="8" name="Footer Placeholder 7"/>
+          <p:cNvPr id="93168259" name="Footer Placeholder 7"/>
           <p:cNvSpPr>
             <a:spLocks noGrp="1"/>
           </p:cNvSpPr>
@@ -1624,18 +2615,21 @@
             <p:ph type="ftr" sz="quarter" idx="11"/>
           </p:nvPr>
         </p:nvSpPr>
-        <p:spPr/>
-        <p:txBody>
-          <a:bodyPr/>
-          <a:lstStyle/>
-          <a:p>
-            <a:endParaRPr lang="en-US"/>
-          </a:p>
-        </p:txBody>
-      </p:sp>
-      <p:sp>
-        <p:nvSpPr>
-          <p:cNvPr id="9" name="Slide Number Placeholder 8"/>
+        <p:spPr bwMode="auto"/>
+        <p:txBody>
+          <a:bodyPr/>
+          <a:lstStyle/>
+          <a:p>
+            <a:pPr>
+              <a:defRPr/>
+            </a:pPr>
+            <a:endParaRPr lang="en-US"/>
+          </a:p>
+        </p:txBody>
+      </p:sp>
+      <p:sp>
+        <p:nvSpPr>
+          <p:cNvPr id="1450943830" name="Slide Number Placeholder 8"/>
           <p:cNvSpPr>
             <a:spLocks noGrp="1"/>
           </p:cNvSpPr>
@@ -1643,13 +2637,16 @@
             <p:ph type="sldNum" sz="quarter" idx="12"/>
           </p:nvPr>
         </p:nvSpPr>
-        <p:spPr/>
-        <p:txBody>
-          <a:bodyPr/>
-          <a:lstStyle/>
-          <a:p>
+        <p:spPr bwMode="auto"/>
+        <p:txBody>
+          <a:bodyPr/>
+          <a:lstStyle/>
+          <a:p>
+            <a:pPr>
+              <a:defRPr/>
+            </a:pPr>
             <a:fld id="{C562C83D-7E9B-49E9-B1CB-FA7EF01CA0DD}" type="slidenum">
-              <a:rPr lang="en-US" smtClean="0"/>
+              <a:rPr lang="en-US"/>
               <a:t>‹#›</a:t>
             </a:fld>
             <a:endParaRPr lang="en-US"/>
@@ -1657,11 +2654,6 @@
         </p:txBody>
       </p:sp>
     </p:spTree>
-    <p:extLst>
-      <p:ext uri="{BB962C8B-B14F-4D97-AF65-F5344CB8AC3E}">
-        <p14:creationId xmlns:p14="http://schemas.microsoft.com/office/powerpoint/2010/main" val="1748167833"/>
-      </p:ext>
-    </p:extLst>
   </p:cSld>
   <p:clrMapOvr>
     <a:masterClrMapping/>
@@ -1670,7 +2662,7 @@
 </file>
 
 <file path=ppt/slideLayouts/slideLayout6.xml><?xml version="1.0" encoding="utf-8"?>
-<p:sldLayout xmlns:a="http://schemas.openxmlformats.org/drawingml/2006/main" xmlns:r="http://schemas.openxmlformats.org/officeDocument/2006/relationships" xmlns:p="http://schemas.openxmlformats.org/presentationml/2006/main" type="titleOnly" preserve="1">
+<p:sldLayout xmlns:a="http://schemas.openxmlformats.org/drawingml/2006/main" xmlns:r="http://schemas.openxmlformats.org/officeDocument/2006/relationships" xmlns:p="http://schemas.openxmlformats.org/presentationml/2006/main" xmlns:m="http://schemas.openxmlformats.org/officeDocument/2006/math" xmlns:w="http://schemas.openxmlformats.org/wordprocessingml/2006/main" matchingName="" preserve="1" showMasterPhAnim="0" showMasterSp="1" type="titleOnly" userDrawn="1">
   <p:cSld name="Title Only">
     <p:spTree>
       <p:nvGrpSpPr>
@@ -1678,7 +2670,7 @@
         <p:cNvGrpSpPr/>
         <p:nvPr/>
       </p:nvGrpSpPr>
-      <p:grpSpPr>
+      <p:grpSpPr bwMode="auto">
         <a:xfrm>
           <a:off x="0" y="0"/>
           <a:ext cx="0" cy="0"/>
@@ -1688,7 +2680,7 @@
       </p:grpSpPr>
       <p:sp>
         <p:nvSpPr>
-          <p:cNvPr id="2" name="Title 1"/>
+          <p:cNvPr id="883488295" name="Title 1"/>
           <p:cNvSpPr>
             <a:spLocks noGrp="1"/>
           </p:cNvSpPr>
@@ -1696,13 +2688,16 @@
             <p:ph type="title"/>
           </p:nvPr>
         </p:nvSpPr>
-        <p:spPr/>
-        <p:txBody>
-          <a:bodyPr/>
-          <a:lstStyle/>
-          <a:p>
-            <a:r>
-              <a:rPr lang="en-US" smtClean="0"/>
+        <p:spPr bwMode="auto"/>
+        <p:txBody>
+          <a:bodyPr/>
+          <a:lstStyle/>
+          <a:p>
+            <a:pPr>
+              <a:defRPr/>
+            </a:pPr>
+            <a:r>
+              <a:rPr lang="en-US"/>
               <a:t>Click to edit Master title style</a:t>
             </a:r>
             <a:endParaRPr lang="en-US"/>
@@ -1711,7 +2706,7 @@
       </p:sp>
       <p:sp>
         <p:nvSpPr>
-          <p:cNvPr id="3" name="Date Placeholder 2"/>
+          <p:cNvPr id="922850918" name="Date Placeholder 2"/>
           <p:cNvSpPr>
             <a:spLocks noGrp="1"/>
           </p:cNvSpPr>
@@ -1719,13 +2714,16 @@
             <p:ph type="dt" sz="half" idx="10"/>
           </p:nvPr>
         </p:nvSpPr>
-        <p:spPr/>
-        <p:txBody>
-          <a:bodyPr/>
-          <a:lstStyle/>
-          <a:p>
+        <p:spPr bwMode="auto"/>
+        <p:txBody>
+          <a:bodyPr/>
+          <a:lstStyle/>
+          <a:p>
+            <a:pPr>
+              <a:defRPr/>
+            </a:pPr>
             <a:fld id="{CD25C055-B408-4243-B31D-8686AF54EE60}" type="datetimeFigureOut">
-              <a:rPr lang="en-US" smtClean="0"/>
+              <a:rPr lang="en-US"/>
               <a:t>3/31/2026</a:t>
             </a:fld>
             <a:endParaRPr lang="en-US"/>
@@ -1734,7 +2732,7 @@
       </p:sp>
       <p:sp>
         <p:nvSpPr>
-          <p:cNvPr id="4" name="Footer Placeholder 3"/>
+          <p:cNvPr id="431471877" name="Footer Placeholder 3"/>
           <p:cNvSpPr>
             <a:spLocks noGrp="1"/>
           </p:cNvSpPr>
@@ -1742,18 +2740,21 @@
             <p:ph type="ftr" sz="quarter" idx="11"/>
           </p:nvPr>
         </p:nvSpPr>
-        <p:spPr/>
-        <p:txBody>
-          <a:bodyPr/>
-          <a:lstStyle/>
-          <a:p>
-            <a:endParaRPr lang="en-US"/>
-          </a:p>
-        </p:txBody>
-      </p:sp>
-      <p:sp>
-        <p:nvSpPr>
-          <p:cNvPr id="5" name="Slide Number Placeholder 4"/>
+        <p:spPr bwMode="auto"/>
+        <p:txBody>
+          <a:bodyPr/>
+          <a:lstStyle/>
+          <a:p>
+            <a:pPr>
+              <a:defRPr/>
+            </a:pPr>
+            <a:endParaRPr lang="en-US"/>
+          </a:p>
+        </p:txBody>
+      </p:sp>
+      <p:sp>
+        <p:nvSpPr>
+          <p:cNvPr id="1976665881" name="Slide Number Placeholder 4"/>
           <p:cNvSpPr>
             <a:spLocks noGrp="1"/>
           </p:cNvSpPr>
@@ -1761,13 +2762,16 @@
             <p:ph type="sldNum" sz="quarter" idx="12"/>
           </p:nvPr>
         </p:nvSpPr>
-        <p:spPr/>
-        <p:txBody>
-          <a:bodyPr/>
-          <a:lstStyle/>
-          <a:p>
+        <p:spPr bwMode="auto"/>
+        <p:txBody>
+          <a:bodyPr/>
+          <a:lstStyle/>
+          <a:p>
+            <a:pPr>
+              <a:defRPr/>
+            </a:pPr>
             <a:fld id="{C562C83D-7E9B-49E9-B1CB-FA7EF01CA0DD}" type="slidenum">
-              <a:rPr lang="en-US" smtClean="0"/>
+              <a:rPr lang="en-US"/>
               <a:t>‹#›</a:t>
             </a:fld>
             <a:endParaRPr lang="en-US"/>
@@ -1775,11 +2779,6 @@
         </p:txBody>
       </p:sp>
     </p:spTree>
-    <p:extLst>
-      <p:ext uri="{BB962C8B-B14F-4D97-AF65-F5344CB8AC3E}">
-        <p14:creationId xmlns:p14="http://schemas.microsoft.com/office/powerpoint/2010/main" val="523024967"/>
-      </p:ext>
-    </p:extLst>
   </p:cSld>
   <p:clrMapOvr>
     <a:masterClrMapping/>
@@ -1788,7 +2787,7 @@
 </file>
 
 <file path=ppt/slideLayouts/slideLayout7.xml><?xml version="1.0" encoding="utf-8"?>
-<p:sldLayout xmlns:a="http://schemas.openxmlformats.org/drawingml/2006/main" xmlns:r="http://schemas.openxmlformats.org/officeDocument/2006/relationships" xmlns:p="http://schemas.openxmlformats.org/presentationml/2006/main" type="blank" preserve="1">
+<p:sldLayout xmlns:a="http://schemas.openxmlformats.org/drawingml/2006/main" xmlns:r="http://schemas.openxmlformats.org/officeDocument/2006/relationships" xmlns:p="http://schemas.openxmlformats.org/presentationml/2006/main" xmlns:m="http://schemas.openxmlformats.org/officeDocument/2006/math" xmlns:w="http://schemas.openxmlformats.org/wordprocessingml/2006/main" matchingName="" preserve="1" showMasterPhAnim="0" showMasterSp="1" type="blank" userDrawn="1">
   <p:cSld name="Blank">
     <p:spTree>
       <p:nvGrpSpPr>
@@ -1796,7 +2795,7 @@
         <p:cNvGrpSpPr/>
         <p:nvPr/>
       </p:nvGrpSpPr>
-      <p:grpSpPr>
+      <p:grpSpPr bwMode="auto">
         <a:xfrm>
           <a:off x="0" y="0"/>
           <a:ext cx="0" cy="0"/>
@@ -1806,7 +2805,7 @@
       </p:grpSpPr>
       <p:sp>
         <p:nvSpPr>
-          <p:cNvPr id="2" name="Date Placeholder 1"/>
+          <p:cNvPr id="913420916" name="Date Placeholder 1"/>
           <p:cNvSpPr>
             <a:spLocks noGrp="1"/>
           </p:cNvSpPr>
@@ -1814,13 +2813,16 @@
             <p:ph type="dt" sz="half" idx="10"/>
           </p:nvPr>
         </p:nvSpPr>
-        <p:spPr/>
-        <p:txBody>
-          <a:bodyPr/>
-          <a:lstStyle/>
-          <a:p>
+        <p:spPr bwMode="auto"/>
+        <p:txBody>
+          <a:bodyPr/>
+          <a:lstStyle/>
+          <a:p>
+            <a:pPr>
+              <a:defRPr/>
+            </a:pPr>
             <a:fld id="{CD25C055-B408-4243-B31D-8686AF54EE60}" type="datetimeFigureOut">
-              <a:rPr lang="en-US" smtClean="0"/>
+              <a:rPr lang="en-US"/>
               <a:t>3/31/2026</a:t>
             </a:fld>
             <a:endParaRPr lang="en-US"/>
@@ -1829,7 +2831,7 @@
       </p:sp>
       <p:sp>
         <p:nvSpPr>
-          <p:cNvPr id="3" name="Footer Placeholder 2"/>
+          <p:cNvPr id="795662664" name="Footer Placeholder 2"/>
           <p:cNvSpPr>
             <a:spLocks noGrp="1"/>
           </p:cNvSpPr>
@@ -1837,18 +2839,21 @@
             <p:ph type="ftr" sz="quarter" idx="11"/>
           </p:nvPr>
         </p:nvSpPr>
-        <p:spPr/>
-        <p:txBody>
-          <a:bodyPr/>
-          <a:lstStyle/>
-          <a:p>
-            <a:endParaRPr lang="en-US"/>
-          </a:p>
-        </p:txBody>
-      </p:sp>
-      <p:sp>
-        <p:nvSpPr>
-          <p:cNvPr id="4" name="Slide Number Placeholder 3"/>
+        <p:spPr bwMode="auto"/>
+        <p:txBody>
+          <a:bodyPr/>
+          <a:lstStyle/>
+          <a:p>
+            <a:pPr>
+              <a:defRPr/>
+            </a:pPr>
+            <a:endParaRPr lang="en-US"/>
+          </a:p>
+        </p:txBody>
+      </p:sp>
+      <p:sp>
+        <p:nvSpPr>
+          <p:cNvPr id="1703270891" name="Slide Number Placeholder 3"/>
           <p:cNvSpPr>
             <a:spLocks noGrp="1"/>
           </p:cNvSpPr>
@@ -1856,13 +2861,16 @@
             <p:ph type="sldNum" sz="quarter" idx="12"/>
           </p:nvPr>
         </p:nvSpPr>
-        <p:spPr/>
-        <p:txBody>
-          <a:bodyPr/>
-          <a:lstStyle/>
-          <a:p>
+        <p:spPr bwMode="auto"/>
+        <p:txBody>
+          <a:bodyPr/>
+          <a:lstStyle/>
+          <a:p>
+            <a:pPr>
+              <a:defRPr/>
+            </a:pPr>
             <a:fld id="{C562C83D-7E9B-49E9-B1CB-FA7EF01CA0DD}" type="slidenum">
-              <a:rPr lang="en-US" smtClean="0"/>
+              <a:rPr lang="en-US"/>
               <a:t>‹#›</a:t>
             </a:fld>
             <a:endParaRPr lang="en-US"/>
@@ -1870,11 +2878,6 @@
         </p:txBody>
       </p:sp>
     </p:spTree>
-    <p:extLst>
-      <p:ext uri="{BB962C8B-B14F-4D97-AF65-F5344CB8AC3E}">
-        <p14:creationId xmlns:p14="http://schemas.microsoft.com/office/powerpoint/2010/main" val="1743211567"/>
-      </p:ext>
-    </p:extLst>
   </p:cSld>
   <p:clrMapOvr>
     <a:masterClrMapping/>
@@ -1883,7 +2886,7 @@
 </file>
 
 <file path=ppt/slideLayouts/slideLayout8.xml><?xml version="1.0" encoding="utf-8"?>
-<p:sldLayout xmlns:a="http://schemas.openxmlformats.org/drawingml/2006/main" xmlns:r="http://schemas.openxmlformats.org/officeDocument/2006/relationships" xmlns:p="http://schemas.openxmlformats.org/presentationml/2006/main" type="objTx" preserve="1">
+<p:sldLayout xmlns:a="http://schemas.openxmlformats.org/drawingml/2006/main" xmlns:r="http://schemas.openxmlformats.org/officeDocument/2006/relationships" xmlns:p="http://schemas.openxmlformats.org/presentationml/2006/main" xmlns:m="http://schemas.openxmlformats.org/officeDocument/2006/math" xmlns:w="http://schemas.openxmlformats.org/wordprocessingml/2006/main" matchingName="" preserve="1" showMasterPhAnim="0" showMasterSp="1" type="objTx" userDrawn="1">
   <p:cSld name="Content with Caption">
     <p:spTree>
       <p:nvGrpSpPr>
@@ -1891,7 +2894,7 @@
         <p:cNvGrpSpPr/>
         <p:nvPr/>
       </p:nvGrpSpPr>
-      <p:grpSpPr>
+      <p:grpSpPr bwMode="auto">
         <a:xfrm>
           <a:off x="0" y="0"/>
           <a:ext cx="0" cy="0"/>
@@ -1901,7 +2904,7 @@
       </p:grpSpPr>
       <p:sp>
         <p:nvSpPr>
-          <p:cNvPr id="2" name="Title 1"/>
+          <p:cNvPr id="946328229" name="Title 1"/>
           <p:cNvSpPr>
             <a:spLocks noGrp="1"/>
           </p:cNvSpPr>
@@ -1909,7 +2912,7 @@
             <p:ph type="title"/>
           </p:nvPr>
         </p:nvSpPr>
-        <p:spPr>
+        <p:spPr bwMode="auto">
           <a:xfrm>
             <a:off x="839788" y="457200"/>
             <a:ext cx="3932237" cy="1600200"/>
@@ -1923,8 +2926,11 @@
             </a:lvl1pPr>
           </a:lstStyle>
           <a:p>
-            <a:r>
-              <a:rPr lang="en-US" smtClean="0"/>
+            <a:pPr>
+              <a:defRPr/>
+            </a:pPr>
+            <a:r>
+              <a:rPr lang="en-US"/>
               <a:t>Click to edit Master title style</a:t>
             </a:r>
             <a:endParaRPr lang="en-US"/>
@@ -1933,7 +2939,7 @@
       </p:sp>
       <p:sp>
         <p:nvSpPr>
-          <p:cNvPr id="3" name="Content Placeholder 2"/>
+          <p:cNvPr id="1093665246" name="Content Placeholder 2"/>
           <p:cNvSpPr>
             <a:spLocks noGrp="1"/>
           </p:cNvSpPr>
@@ -1941,7 +2947,7 @@
             <p:ph idx="1"/>
           </p:nvPr>
         </p:nvSpPr>
-        <p:spPr>
+        <p:spPr bwMode="auto">
           <a:xfrm>
             <a:off x="5183188" y="987425"/>
             <a:ext cx="6172200" cy="4873625"/>
@@ -1979,37 +2985,51 @@
             </a:lvl9pPr>
           </a:lstStyle>
           <a:p>
-            <a:pPr lvl="0"/>
-            <a:r>
-              <a:rPr lang="en-US" smtClean="0"/>
+            <a:pPr lvl="0">
+              <a:defRPr/>
+            </a:pPr>
+            <a:r>
+              <a:rPr lang="en-US"/>
               <a:t>Edit Master text styles</a:t>
             </a:r>
-          </a:p>
-          <a:p>
-            <a:pPr lvl="1"/>
-            <a:r>
-              <a:rPr lang="en-US" smtClean="0"/>
+            <a:endParaRPr/>
+          </a:p>
+          <a:p>
+            <a:pPr lvl="1">
+              <a:defRPr/>
+            </a:pPr>
+            <a:r>
+              <a:rPr lang="en-US"/>
               <a:t>Second level</a:t>
             </a:r>
-          </a:p>
-          <a:p>
-            <a:pPr lvl="2"/>
-            <a:r>
-              <a:rPr lang="en-US" smtClean="0"/>
+            <a:endParaRPr/>
+          </a:p>
+          <a:p>
+            <a:pPr lvl="2">
+              <a:defRPr/>
+            </a:pPr>
+            <a:r>
+              <a:rPr lang="en-US"/>
               <a:t>Third level</a:t>
             </a:r>
-          </a:p>
-          <a:p>
-            <a:pPr lvl="3"/>
-            <a:r>
-              <a:rPr lang="en-US" smtClean="0"/>
+            <a:endParaRPr/>
+          </a:p>
+          <a:p>
+            <a:pPr lvl="3">
+              <a:defRPr/>
+            </a:pPr>
+            <a:r>
+              <a:rPr lang="en-US"/>
               <a:t>Fourth level</a:t>
             </a:r>
-          </a:p>
-          <a:p>
-            <a:pPr lvl="4"/>
-            <a:r>
-              <a:rPr lang="en-US" smtClean="0"/>
+            <a:endParaRPr/>
+          </a:p>
+          <a:p>
+            <a:pPr lvl="4">
+              <a:defRPr/>
+            </a:pPr>
+            <a:r>
+              <a:rPr lang="en-US"/>
               <a:t>Fifth level</a:t>
             </a:r>
             <a:endParaRPr lang="en-US"/>
@@ -2018,7 +3038,7 @@
       </p:sp>
       <p:sp>
         <p:nvSpPr>
-          <p:cNvPr id="4" name="Text Placeholder 3"/>
+          <p:cNvPr id="199764737" name="Text Placeholder 3"/>
           <p:cNvSpPr>
             <a:spLocks noGrp="1"/>
           </p:cNvSpPr>
@@ -2026,7 +3046,7 @@
             <p:ph type="body" sz="half" idx="2"/>
           </p:nvPr>
         </p:nvSpPr>
-        <p:spPr>
+        <p:spPr bwMode="auto">
           <a:xfrm>
             <a:off x="839788" y="2057400"/>
             <a:ext cx="3932237" cy="3811588"/>
@@ -2073,17 +3093,20 @@
             </a:lvl9pPr>
           </a:lstStyle>
           <a:p>
-            <a:pPr lvl="0"/>
-            <a:r>
-              <a:rPr lang="en-US" smtClean="0"/>
+            <a:pPr lvl="0">
+              <a:defRPr/>
+            </a:pPr>
+            <a:r>
+              <a:rPr lang="en-US"/>
               <a:t>Edit Master text styles</a:t>
             </a:r>
-          </a:p>
-        </p:txBody>
-      </p:sp>
-      <p:sp>
-        <p:nvSpPr>
-          <p:cNvPr id="5" name="Date Placeholder 4"/>
+            <a:endParaRPr/>
+          </a:p>
+        </p:txBody>
+      </p:sp>
+      <p:sp>
+        <p:nvSpPr>
+          <p:cNvPr id="387807712" name="Date Placeholder 4"/>
           <p:cNvSpPr>
             <a:spLocks noGrp="1"/>
           </p:cNvSpPr>
@@ -2091,13 +3114,16 @@
             <p:ph type="dt" sz="half" idx="10"/>
           </p:nvPr>
         </p:nvSpPr>
-        <p:spPr/>
-        <p:txBody>
-          <a:bodyPr/>
-          <a:lstStyle/>
-          <a:p>
+        <p:spPr bwMode="auto"/>
+        <p:txBody>
+          <a:bodyPr/>
+          <a:lstStyle/>
+          <a:p>
+            <a:pPr>
+              <a:defRPr/>
+            </a:pPr>
             <a:fld id="{CD25C055-B408-4243-B31D-8686AF54EE60}" type="datetimeFigureOut">
-              <a:rPr lang="en-US" smtClean="0"/>
+              <a:rPr lang="en-US"/>
               <a:t>3/31/2026</a:t>
             </a:fld>
             <a:endParaRPr lang="en-US"/>
@@ -2106,7 +3132,7 @@
       </p:sp>
       <p:sp>
         <p:nvSpPr>
-          <p:cNvPr id="6" name="Footer Placeholder 5"/>
+          <p:cNvPr id="464996512" name="Footer Placeholder 5"/>
           <p:cNvSpPr>
             <a:spLocks noGrp="1"/>
           </p:cNvSpPr>
@@ -2114,18 +3140,21 @@
             <p:ph type="ftr" sz="quarter" idx="11"/>
           </p:nvPr>
         </p:nvSpPr>
-        <p:spPr/>
-        <p:txBody>
-          <a:bodyPr/>
-          <a:lstStyle/>
-          <a:p>
-            <a:endParaRPr lang="en-US"/>
-          </a:p>
-        </p:txBody>
-      </p:sp>
-      <p:sp>
-        <p:nvSpPr>
-          <p:cNvPr id="7" name="Slide Number Placeholder 6"/>
+        <p:spPr bwMode="auto"/>
+        <p:txBody>
+          <a:bodyPr/>
+          <a:lstStyle/>
+          <a:p>
+            <a:pPr>
+              <a:defRPr/>
+            </a:pPr>
+            <a:endParaRPr lang="en-US"/>
+          </a:p>
+        </p:txBody>
+      </p:sp>
+      <p:sp>
+        <p:nvSpPr>
+          <p:cNvPr id="150130562" name="Slide Number Placeholder 6"/>
           <p:cNvSpPr>
             <a:spLocks noGrp="1"/>
           </p:cNvSpPr>
@@ -2133,13 +3162,16 @@
             <p:ph type="sldNum" sz="quarter" idx="12"/>
           </p:nvPr>
         </p:nvSpPr>
-        <p:spPr/>
-        <p:txBody>
-          <a:bodyPr/>
-          <a:lstStyle/>
-          <a:p>
+        <p:spPr bwMode="auto"/>
+        <p:txBody>
+          <a:bodyPr/>
+          <a:lstStyle/>
+          <a:p>
+            <a:pPr>
+              <a:defRPr/>
+            </a:pPr>
             <a:fld id="{C562C83D-7E9B-49E9-B1CB-FA7EF01CA0DD}" type="slidenum">
-              <a:rPr lang="en-US" smtClean="0"/>
+              <a:rPr lang="en-US"/>
               <a:t>‹#›</a:t>
             </a:fld>
             <a:endParaRPr lang="en-US"/>
@@ -2147,11 +3179,6 @@
         </p:txBody>
       </p:sp>
     </p:spTree>
-    <p:extLst>
-      <p:ext uri="{BB962C8B-B14F-4D97-AF65-F5344CB8AC3E}">
-        <p14:creationId xmlns:p14="http://schemas.microsoft.com/office/powerpoint/2010/main" val="950243383"/>
-      </p:ext>
-    </p:extLst>
   </p:cSld>
   <p:clrMapOvr>
     <a:masterClrMapping/>
@@ -2160,7 +3187,7 @@
 </file>
 
 <file path=ppt/slideLayouts/slideLayout9.xml><?xml version="1.0" encoding="utf-8"?>
-<p:sldLayout xmlns:a="http://schemas.openxmlformats.org/drawingml/2006/main" xmlns:r="http://schemas.openxmlformats.org/officeDocument/2006/relationships" xmlns:p="http://schemas.openxmlformats.org/presentationml/2006/main" type="picTx" preserve="1">
+<p:sldLayout xmlns:a="http://schemas.openxmlformats.org/drawingml/2006/main" xmlns:r="http://schemas.openxmlformats.org/officeDocument/2006/relationships" xmlns:p="http://schemas.openxmlformats.org/presentationml/2006/main" xmlns:m="http://schemas.openxmlformats.org/officeDocument/2006/math" xmlns:w="http://schemas.openxmlformats.org/wordprocessingml/2006/main" matchingName="" preserve="1" showMasterPhAnim="0" showMasterSp="1" type="picTx" userDrawn="1">
   <p:cSld name="Picture with Caption">
     <p:spTree>
       <p:nvGrpSpPr>
@@ -2168,7 +3195,7 @@
         <p:cNvGrpSpPr/>
         <p:nvPr/>
       </p:nvGrpSpPr>
-      <p:grpSpPr>
+      <p:grpSpPr bwMode="auto">
         <a:xfrm>
           <a:off x="0" y="0"/>
           <a:ext cx="0" cy="0"/>
@@ -2178,7 +3205,7 @@
       </p:grpSpPr>
       <p:sp>
         <p:nvSpPr>
-          <p:cNvPr id="2" name="Title 1"/>
+          <p:cNvPr id="2032820527" name="Title 1"/>
           <p:cNvSpPr>
             <a:spLocks noGrp="1"/>
           </p:cNvSpPr>
@@ -2186,7 +3213,7 @@
             <p:ph type="title"/>
           </p:nvPr>
         </p:nvSpPr>
-        <p:spPr>
+        <p:spPr bwMode="auto">
           <a:xfrm>
             <a:off x="839788" y="457200"/>
             <a:ext cx="3932237" cy="1600200"/>
@@ -2200,8 +3227,11 @@
             </a:lvl1pPr>
           </a:lstStyle>
           <a:p>
-            <a:r>
-              <a:rPr lang="en-US" smtClean="0"/>
+            <a:pPr>
+              <a:defRPr/>
+            </a:pPr>
+            <a:r>
+              <a:rPr lang="en-US"/>
               <a:t>Click to edit Master title style</a:t>
             </a:r>
             <a:endParaRPr lang="en-US"/>
@@ -2210,7 +3240,7 @@
       </p:sp>
       <p:sp>
         <p:nvSpPr>
-          <p:cNvPr id="3" name="Picture Placeholder 2"/>
+          <p:cNvPr id="51609272" name="Picture Placeholder 2"/>
           <p:cNvSpPr>
             <a:spLocks noGrp="1"/>
           </p:cNvSpPr>
@@ -2218,7 +3248,7 @@
             <p:ph type="pic" idx="1"/>
           </p:nvPr>
         </p:nvSpPr>
-        <p:spPr>
+        <p:spPr bwMode="auto">
           <a:xfrm>
             <a:off x="5183188" y="987425"/>
             <a:ext cx="6172200" cy="4873625"/>
@@ -2265,13 +3295,16 @@
             </a:lvl9pPr>
           </a:lstStyle>
           <a:p>
-            <a:endParaRPr lang="en-US"/>
-          </a:p>
-        </p:txBody>
-      </p:sp>
-      <p:sp>
-        <p:nvSpPr>
-          <p:cNvPr id="4" name="Text Placeholder 3"/>
+            <a:pPr>
+              <a:defRPr/>
+            </a:pPr>
+            <a:endParaRPr lang="en-US"/>
+          </a:p>
+        </p:txBody>
+      </p:sp>
+      <p:sp>
+        <p:nvSpPr>
+          <p:cNvPr id="755642556" name="Text Placeholder 3"/>
           <p:cNvSpPr>
             <a:spLocks noGrp="1"/>
           </p:cNvSpPr>
@@ -2279,7 +3312,7 @@
             <p:ph type="body" sz="half" idx="2"/>
           </p:nvPr>
         </p:nvSpPr>
-        <p:spPr>
+        <p:spPr bwMode="auto">
           <a:xfrm>
             <a:off x="839788" y="2057400"/>
             <a:ext cx="3932237" cy="3811588"/>
@@ -2326,17 +3359,20 @@
             </a:lvl9pPr>
           </a:lstStyle>
           <a:p>
-            <a:pPr lvl="0"/>
-            <a:r>
-              <a:rPr lang="en-US" smtClean="0"/>
+            <a:pPr lvl="0">
+              <a:defRPr/>
+            </a:pPr>
+            <a:r>
+              <a:rPr lang="en-US"/>
               <a:t>Edit Master text styles</a:t>
             </a:r>
-          </a:p>
-        </p:txBody>
-      </p:sp>
-      <p:sp>
-        <p:nvSpPr>
-          <p:cNvPr id="5" name="Date Placeholder 4"/>
+            <a:endParaRPr/>
+          </a:p>
+        </p:txBody>
+      </p:sp>
+      <p:sp>
+        <p:nvSpPr>
+          <p:cNvPr id="221817330" name="Date Placeholder 4"/>
           <p:cNvSpPr>
             <a:spLocks noGrp="1"/>
           </p:cNvSpPr>
@@ -2344,13 +3380,16 @@
             <p:ph type="dt" sz="half" idx="10"/>
           </p:nvPr>
         </p:nvSpPr>
-        <p:spPr/>
-        <p:txBody>
-          <a:bodyPr/>
-          <a:lstStyle/>
-          <a:p>
+        <p:spPr bwMode="auto"/>
+        <p:txBody>
+          <a:bodyPr/>
+          <a:lstStyle/>
+          <a:p>
+            <a:pPr>
+              <a:defRPr/>
+            </a:pPr>
             <a:fld id="{CD25C055-B408-4243-B31D-8686AF54EE60}" type="datetimeFigureOut">
-              <a:rPr lang="en-US" smtClean="0"/>
+              <a:rPr lang="en-US"/>
               <a:t>3/31/2026</a:t>
             </a:fld>
             <a:endParaRPr lang="en-US"/>
@@ -2359,7 +3398,7 @@
       </p:sp>
       <p:sp>
         <p:nvSpPr>
-          <p:cNvPr id="6" name="Footer Placeholder 5"/>
+          <p:cNvPr id="1098133490" name="Footer Placeholder 5"/>
           <p:cNvSpPr>
             <a:spLocks noGrp="1"/>
           </p:cNvSpPr>
@@ -2367,18 +3406,21 @@
             <p:ph type="ftr" sz="quarter" idx="11"/>
           </p:nvPr>
         </p:nvSpPr>
-        <p:spPr/>
-        <p:txBody>
-          <a:bodyPr/>
-          <a:lstStyle/>
-          <a:p>
-            <a:endParaRPr lang="en-US"/>
-          </a:p>
-        </p:txBody>
-      </p:sp>
-      <p:sp>
-        <p:nvSpPr>
-          <p:cNvPr id="7" name="Slide Number Placeholder 6"/>
+        <p:spPr bwMode="auto"/>
+        <p:txBody>
+          <a:bodyPr/>
+          <a:lstStyle/>
+          <a:p>
+            <a:pPr>
+              <a:defRPr/>
+            </a:pPr>
+            <a:endParaRPr lang="en-US"/>
+          </a:p>
+        </p:txBody>
+      </p:sp>
+      <p:sp>
+        <p:nvSpPr>
+          <p:cNvPr id="1486662526" name="Slide Number Placeholder 6"/>
           <p:cNvSpPr>
             <a:spLocks noGrp="1"/>
           </p:cNvSpPr>
@@ -2386,13 +3428,16 @@
             <p:ph type="sldNum" sz="quarter" idx="12"/>
           </p:nvPr>
         </p:nvSpPr>
-        <p:spPr/>
-        <p:txBody>
-          <a:bodyPr/>
-          <a:lstStyle/>
-          <a:p>
+        <p:spPr bwMode="auto"/>
+        <p:txBody>
+          <a:bodyPr/>
+          <a:lstStyle/>
+          <a:p>
+            <a:pPr>
+              <a:defRPr/>
+            </a:pPr>
             <a:fld id="{C562C83D-7E9B-49E9-B1CB-FA7EF01CA0DD}" type="slidenum">
-              <a:rPr lang="en-US" smtClean="0"/>
+              <a:rPr lang="en-US"/>
               <a:t>‹#›</a:t>
             </a:fld>
             <a:endParaRPr lang="en-US"/>
@@ -2400,11 +3445,6 @@
         </p:txBody>
       </p:sp>
     </p:spTree>
-    <p:extLst>
-      <p:ext uri="{BB962C8B-B14F-4D97-AF65-F5344CB8AC3E}">
-        <p14:creationId xmlns:p14="http://schemas.microsoft.com/office/powerpoint/2010/main" val="3795049317"/>
-      </p:ext>
-    </p:extLst>
   </p:cSld>
   <p:clrMapOvr>
     <a:masterClrMapping/>
@@ -2413,8 +3453,8 @@
 </file>
 
 <file path=ppt/slideMasters/slideMaster1.xml><?xml version="1.0" encoding="utf-8"?>
-<p:sldMaster xmlns:a="http://schemas.openxmlformats.org/drawingml/2006/main" xmlns:r="http://schemas.openxmlformats.org/officeDocument/2006/relationships" xmlns:p="http://schemas.openxmlformats.org/presentationml/2006/main">
-  <p:cSld>
+<p:sldMaster xmlns:a="http://schemas.openxmlformats.org/drawingml/2006/main" xmlns:r="http://schemas.openxmlformats.org/officeDocument/2006/relationships" xmlns:p="http://schemas.openxmlformats.org/presentationml/2006/main" xmlns:m="http://schemas.openxmlformats.org/officeDocument/2006/math" xmlns:w="http://schemas.openxmlformats.org/wordprocessingml/2006/main" preserve="0">
+  <p:cSld name="">
     <p:bg>
       <p:bgRef idx="1001">
         <a:schemeClr val="bg1"/>
@@ -2426,7 +3466,7 @@
         <p:cNvGrpSpPr/>
         <p:nvPr/>
       </p:nvGrpSpPr>
-      <p:grpSpPr>
+      <p:grpSpPr bwMode="auto">
         <a:xfrm>
           <a:off x="0" y="0"/>
           <a:ext cx="0" cy="0"/>
@@ -2436,7 +3476,7 @@
       </p:grpSpPr>
       <p:sp>
         <p:nvSpPr>
-          <p:cNvPr id="2" name="Title Placeholder 1"/>
+          <p:cNvPr id="679224375" name="Title Placeholder 1"/>
           <p:cNvSpPr>
             <a:spLocks noGrp="1"/>
           </p:cNvSpPr>
@@ -2444,7 +3484,7 @@
             <p:ph type="title"/>
           </p:nvPr>
         </p:nvSpPr>
-        <p:spPr>
+        <p:spPr bwMode="auto">
           <a:xfrm>
             <a:off x="838200" y="365125"/>
             <a:ext cx="10515600" cy="1325563"/>
@@ -2459,8 +3499,11 @@
           </a:bodyPr>
           <a:lstStyle/>
           <a:p>
-            <a:r>
-              <a:rPr lang="en-US" smtClean="0"/>
+            <a:pPr>
+              <a:defRPr/>
+            </a:pPr>
+            <a:r>
+              <a:rPr lang="en-US"/>
               <a:t>Click to edit Master title style</a:t>
             </a:r>
             <a:endParaRPr lang="en-US"/>
@@ -2469,7 +3512,7 @@
       </p:sp>
       <p:sp>
         <p:nvSpPr>
-          <p:cNvPr id="3" name="Text Placeholder 2"/>
+          <p:cNvPr id="1529513998" name="Text Placeholder 2"/>
           <p:cNvSpPr>
             <a:spLocks noGrp="1"/>
           </p:cNvSpPr>
@@ -2477,7 +3520,7 @@
             <p:ph type="body" idx="1"/>
           </p:nvPr>
         </p:nvSpPr>
-        <p:spPr>
+        <p:spPr bwMode="auto">
           <a:xfrm>
             <a:off x="838200" y="1825625"/>
             <a:ext cx="10515600" cy="4351338"/>
@@ -2492,37 +3535,51 @@
           </a:bodyPr>
           <a:lstStyle/>
           <a:p>
-            <a:pPr lvl="0"/>
-            <a:r>
-              <a:rPr lang="en-US" smtClean="0"/>
+            <a:pPr lvl="0">
+              <a:defRPr/>
+            </a:pPr>
+            <a:r>
+              <a:rPr lang="en-US"/>
               <a:t>Edit Master text styles</a:t>
             </a:r>
-          </a:p>
-          <a:p>
-            <a:pPr lvl="1"/>
-            <a:r>
-              <a:rPr lang="en-US" smtClean="0"/>
+            <a:endParaRPr/>
+          </a:p>
+          <a:p>
+            <a:pPr lvl="1">
+              <a:defRPr/>
+            </a:pPr>
+            <a:r>
+              <a:rPr lang="en-US"/>
               <a:t>Second level</a:t>
             </a:r>
-          </a:p>
-          <a:p>
-            <a:pPr lvl="2"/>
-            <a:r>
-              <a:rPr lang="en-US" smtClean="0"/>
+            <a:endParaRPr/>
+          </a:p>
+          <a:p>
+            <a:pPr lvl="2">
+              <a:defRPr/>
+            </a:pPr>
+            <a:r>
+              <a:rPr lang="en-US"/>
               <a:t>Third level</a:t>
             </a:r>
-          </a:p>
-          <a:p>
-            <a:pPr lvl="3"/>
-            <a:r>
-              <a:rPr lang="en-US" smtClean="0"/>
+            <a:endParaRPr/>
+          </a:p>
+          <a:p>
+            <a:pPr lvl="3">
+              <a:defRPr/>
+            </a:pPr>
+            <a:r>
+              <a:rPr lang="en-US"/>
               <a:t>Fourth level</a:t>
             </a:r>
-          </a:p>
-          <a:p>
-            <a:pPr lvl="4"/>
-            <a:r>
-              <a:rPr lang="en-US" smtClean="0"/>
+            <a:endParaRPr/>
+          </a:p>
+          <a:p>
+            <a:pPr lvl="4">
+              <a:defRPr/>
+            </a:pPr>
+            <a:r>
+              <a:rPr lang="en-US"/>
               <a:t>Fifth level</a:t>
             </a:r>
             <a:endParaRPr lang="en-US"/>
@@ -2531,7 +3588,7 @@
       </p:sp>
       <p:sp>
         <p:nvSpPr>
-          <p:cNvPr id="4" name="Date Placeholder 3"/>
+          <p:cNvPr id="595608191" name="Date Placeholder 3"/>
           <p:cNvSpPr>
             <a:spLocks noGrp="1"/>
           </p:cNvSpPr>
@@ -2539,7 +3596,7 @@
             <p:ph type="dt" sz="half" idx="2"/>
           </p:nvPr>
         </p:nvSpPr>
-        <p:spPr>
+        <p:spPr bwMode="auto">
           <a:xfrm>
             <a:off x="838200" y="6356350"/>
             <a:ext cx="2743200" cy="365125"/>
@@ -2562,8 +3619,11 @@
             </a:lvl1pPr>
           </a:lstStyle>
           <a:p>
+            <a:pPr>
+              <a:defRPr/>
+            </a:pPr>
             <a:fld id="{CD25C055-B408-4243-B31D-8686AF54EE60}" type="datetimeFigureOut">
-              <a:rPr lang="en-US" smtClean="0"/>
+              <a:rPr lang="en-US"/>
               <a:t>3/31/2026</a:t>
             </a:fld>
             <a:endParaRPr lang="en-US"/>
@@ -2572,7 +3632,7 @@
       </p:sp>
       <p:sp>
         <p:nvSpPr>
-          <p:cNvPr id="5" name="Footer Placeholder 4"/>
+          <p:cNvPr id="1085787664" name="Footer Placeholder 4"/>
           <p:cNvSpPr>
             <a:spLocks noGrp="1"/>
           </p:cNvSpPr>
@@ -2580,7 +3640,7 @@
             <p:ph type="ftr" sz="quarter" idx="3"/>
           </p:nvPr>
         </p:nvSpPr>
-        <p:spPr>
+        <p:spPr bwMode="auto">
           <a:xfrm>
             <a:off x="4038600" y="6356350"/>
             <a:ext cx="4114800" cy="365125"/>
@@ -2603,13 +3663,16 @@
             </a:lvl1pPr>
           </a:lstStyle>
           <a:p>
-            <a:endParaRPr lang="en-US"/>
-          </a:p>
-        </p:txBody>
-      </p:sp>
-      <p:sp>
-        <p:nvSpPr>
-          <p:cNvPr id="6" name="Slide Number Placeholder 5"/>
+            <a:pPr>
+              <a:defRPr/>
+            </a:pPr>
+            <a:endParaRPr lang="en-US"/>
+          </a:p>
+        </p:txBody>
+      </p:sp>
+      <p:sp>
+        <p:nvSpPr>
+          <p:cNvPr id="965379789" name="Slide Number Placeholder 5"/>
           <p:cNvSpPr>
             <a:spLocks noGrp="1"/>
           </p:cNvSpPr>
@@ -2617,7 +3680,7 @@
             <p:ph type="sldNum" sz="quarter" idx="4"/>
           </p:nvPr>
         </p:nvSpPr>
-        <p:spPr>
+        <p:spPr bwMode="auto">
           <a:xfrm>
             <a:off x="8610600" y="6356350"/>
             <a:ext cx="2743200" cy="365125"/>
@@ -2640,8 +3703,11 @@
             </a:lvl1pPr>
           </a:lstStyle>
           <a:p>
+            <a:pPr>
+              <a:defRPr/>
+            </a:pPr>
             <a:fld id="{C562C83D-7E9B-49E9-B1CB-FA7EF01CA0DD}" type="slidenum">
-              <a:rPr lang="en-US" smtClean="0"/>
+              <a:rPr lang="en-US"/>
               <a:t>‹#›</a:t>
             </a:fld>
             <a:endParaRPr lang="en-US"/>
@@ -2649,11 +3715,6 @@
         </p:txBody>
       </p:sp>
     </p:spTree>
-    <p:extLst>
-      <p:ext uri="{BB962C8B-B14F-4D97-AF65-F5344CB8AC3E}">
-        <p14:creationId xmlns:p14="http://schemas.microsoft.com/office/powerpoint/2010/main" val="1597930441"/>
-      </p:ext>
-    </p:extLst>
   </p:cSld>
   <p:clrMap bg1="lt1" tx1="dk1" bg2="lt2" tx2="dk2" accent1="accent1" accent2="accent2" accent3="accent3" accent4="accent4" accent5="accent5" accent6="accent6" hlink="hlink" folHlink="folHlink"/>
   <p:sldLayoutIdLst>
@@ -2671,15 +3732,15 @@
   </p:sldLayoutIdLst>
   <p:txStyles>
     <p:titleStyle>
-      <a:lvl1pPr algn="l" defTabSz="914400" rtl="0" eaLnBrk="1" latinLnBrk="0" hangingPunct="1">
+      <a:lvl1pPr algn="l" defTabSz="914400" rtl="0">
         <a:lnSpc>
           <a:spcPct val="90000"/>
         </a:lnSpc>
         <a:spcBef>
-          <a:spcPct val="0"/>
+          <a:spcPts val="0"/>
         </a:spcBef>
         <a:buNone/>
-        <a:defRPr sz="4400" kern="1200">
+        <a:defRPr sz="4400">
           <a:solidFill>
             <a:schemeClr val="tx1"/>
           </a:solidFill>
@@ -2690,16 +3751,16 @@
       </a:lvl1pPr>
     </p:titleStyle>
     <p:bodyStyle>
-      <a:lvl1pPr marL="228600" indent="-228600" algn="l" defTabSz="914400" rtl="0" eaLnBrk="1" latinLnBrk="0" hangingPunct="1">
+      <a:lvl1pPr marL="228600" indent="-228600" algn="l" defTabSz="914400" rtl="0">
         <a:lnSpc>
           <a:spcPct val="90000"/>
         </a:lnSpc>
         <a:spcBef>
           <a:spcPts val="1000"/>
         </a:spcBef>
-        <a:buFont typeface="Arial" panose="020B0604020202020204" pitchFamily="34" charset="0"/>
+        <a:buFont typeface="Arial"/>
         <a:buChar char="•"/>
-        <a:defRPr sz="2800" kern="1200">
+        <a:defRPr sz="2800">
           <a:solidFill>
             <a:schemeClr val="tx1"/>
           </a:solidFill>
@@ -2708,16 +3769,16 @@
           <a:cs typeface="+mn-cs"/>
         </a:defRPr>
       </a:lvl1pPr>
-      <a:lvl2pPr marL="685800" indent="-228600" algn="l" defTabSz="914400" rtl="0" eaLnBrk="1" latinLnBrk="0" hangingPunct="1">
+      <a:lvl2pPr marL="685800" indent="-228600" algn="l" defTabSz="914400" rtl="0">
         <a:lnSpc>
           <a:spcPct val="90000"/>
         </a:lnSpc>
         <a:spcBef>
           <a:spcPts val="500"/>
         </a:spcBef>
-        <a:buFont typeface="Arial" panose="020B0604020202020204" pitchFamily="34" charset="0"/>
+        <a:buFont typeface="Arial"/>
         <a:buChar char="•"/>
-        <a:defRPr sz="2400" kern="1200">
+        <a:defRPr sz="2400">
           <a:solidFill>
             <a:schemeClr val="tx1"/>
           </a:solidFill>
@@ -2726,16 +3787,16 @@
           <a:cs typeface="+mn-cs"/>
         </a:defRPr>
       </a:lvl2pPr>
-      <a:lvl3pPr marL="1143000" indent="-228600" algn="l" defTabSz="914400" rtl="0" eaLnBrk="1" latinLnBrk="0" hangingPunct="1">
+      <a:lvl3pPr marL="1143000" indent="-228600" algn="l" defTabSz="914400" rtl="0">
         <a:lnSpc>
           <a:spcPct val="90000"/>
         </a:lnSpc>
         <a:spcBef>
           <a:spcPts val="500"/>
         </a:spcBef>
-        <a:buFont typeface="Arial" panose="020B0604020202020204" pitchFamily="34" charset="0"/>
+        <a:buFont typeface="Arial"/>
         <a:buChar char="•"/>
-        <a:defRPr sz="2000" kern="1200">
+        <a:defRPr sz="2000">
           <a:solidFill>
             <a:schemeClr val="tx1"/>
           </a:solidFill>
@@ -2744,16 +3805,16 @@
           <a:cs typeface="+mn-cs"/>
         </a:defRPr>
       </a:lvl3pPr>
-      <a:lvl4pPr marL="1600200" indent="-228600" algn="l" defTabSz="914400" rtl="0" eaLnBrk="1" latinLnBrk="0" hangingPunct="1">
+      <a:lvl4pPr marL="1600200" indent="-228600" algn="l" defTabSz="914400" rtl="0">
         <a:lnSpc>
           <a:spcPct val="90000"/>
         </a:lnSpc>
         <a:spcBef>
           <a:spcPts val="500"/>
         </a:spcBef>
-        <a:buFont typeface="Arial" panose="020B0604020202020204" pitchFamily="34" charset="0"/>
+        <a:buFont typeface="Arial"/>
         <a:buChar char="•"/>
-        <a:defRPr sz="1800" kern="1200">
+        <a:defRPr sz="1800">
           <a:solidFill>
             <a:schemeClr val="tx1"/>
           </a:solidFill>
@@ -2762,16 +3823,16 @@
           <a:cs typeface="+mn-cs"/>
         </a:defRPr>
       </a:lvl4pPr>
-      <a:lvl5pPr marL="2057400" indent="-228600" algn="l" defTabSz="914400" rtl="0" eaLnBrk="1" latinLnBrk="0" hangingPunct="1">
+      <a:lvl5pPr marL="2057400" indent="-228600" algn="l" defTabSz="914400" rtl="0">
         <a:lnSpc>
           <a:spcPct val="90000"/>
         </a:lnSpc>
         <a:spcBef>
           <a:spcPts val="500"/>
         </a:spcBef>
-        <a:buFont typeface="Arial" panose="020B0604020202020204" pitchFamily="34" charset="0"/>
+        <a:buFont typeface="Arial"/>
         <a:buChar char="•"/>
-        <a:defRPr sz="1800" kern="1200">
+        <a:defRPr sz="1800">
           <a:solidFill>
             <a:schemeClr val="tx1"/>
           </a:solidFill>
@@ -2780,16 +3841,16 @@
           <a:cs typeface="+mn-cs"/>
         </a:defRPr>
       </a:lvl5pPr>
-      <a:lvl6pPr marL="2514600" indent="-228600" algn="l" defTabSz="914400" rtl="0" eaLnBrk="1" latinLnBrk="0" hangingPunct="1">
+      <a:lvl6pPr marL="2514600" indent="-228600" algn="l" defTabSz="914400" rtl="0">
         <a:lnSpc>
           <a:spcPct val="90000"/>
         </a:lnSpc>
         <a:spcBef>
           <a:spcPts val="500"/>
         </a:spcBef>
-        <a:buFont typeface="Arial" panose="020B0604020202020204" pitchFamily="34" charset="0"/>
+        <a:buFont typeface="Arial"/>
         <a:buChar char="•"/>
-        <a:defRPr sz="1800" kern="1200">
+        <a:defRPr sz="1800">
           <a:solidFill>
             <a:schemeClr val="tx1"/>
           </a:solidFill>
@@ -2798,16 +3859,16 @@
           <a:cs typeface="+mn-cs"/>
         </a:defRPr>
       </a:lvl6pPr>
-      <a:lvl7pPr marL="2971800" indent="-228600" algn="l" defTabSz="914400" rtl="0" eaLnBrk="1" latinLnBrk="0" hangingPunct="1">
+      <a:lvl7pPr marL="2971800" indent="-228600" algn="l" defTabSz="914400" rtl="0">
         <a:lnSpc>
           <a:spcPct val="90000"/>
         </a:lnSpc>
         <a:spcBef>
           <a:spcPts val="500"/>
         </a:spcBef>
-        <a:buFont typeface="Arial" panose="020B0604020202020204" pitchFamily="34" charset="0"/>
+        <a:buFont typeface="Arial"/>
         <a:buChar char="•"/>
-        <a:defRPr sz="1800" kern="1200">
+        <a:defRPr sz="1800">
           <a:solidFill>
             <a:schemeClr val="tx1"/>
           </a:solidFill>
@@ -2816,16 +3877,16 @@
           <a:cs typeface="+mn-cs"/>
         </a:defRPr>
       </a:lvl7pPr>
-      <a:lvl8pPr marL="3429000" indent="-228600" algn="l" defTabSz="914400" rtl="0" eaLnBrk="1" latinLnBrk="0" hangingPunct="1">
+      <a:lvl8pPr marL="3429000" indent="-228600" algn="l" defTabSz="914400" rtl="0">
         <a:lnSpc>
           <a:spcPct val="90000"/>
         </a:lnSpc>
         <a:spcBef>
           <a:spcPts val="500"/>
         </a:spcBef>
-        <a:buFont typeface="Arial" panose="020B0604020202020204" pitchFamily="34" charset="0"/>
+        <a:buFont typeface="Arial"/>
         <a:buChar char="•"/>
-        <a:defRPr sz="1800" kern="1200">
+        <a:defRPr sz="1800">
           <a:solidFill>
             <a:schemeClr val="tx1"/>
           </a:solidFill>
@@ -2834,16 +3895,16 @@
           <a:cs typeface="+mn-cs"/>
         </a:defRPr>
       </a:lvl8pPr>
-      <a:lvl9pPr marL="3886200" indent="-228600" algn="l" defTabSz="914400" rtl="0" eaLnBrk="1" latinLnBrk="0" hangingPunct="1">
+      <a:lvl9pPr marL="3886200" indent="-228600" algn="l" defTabSz="914400" rtl="0">
         <a:lnSpc>
           <a:spcPct val="90000"/>
         </a:lnSpc>
         <a:spcBef>
           <a:spcPts val="500"/>
         </a:spcBef>
-        <a:buFont typeface="Arial" panose="020B0604020202020204" pitchFamily="34" charset="0"/>
+        <a:buFont typeface="Arial"/>
         <a:buChar char="•"/>
-        <a:defRPr sz="1800" kern="1200">
+        <a:defRPr sz="1800">
           <a:solidFill>
             <a:schemeClr val="tx1"/>
           </a:solidFill>
@@ -2857,8 +3918,8 @@
       <a:defPPr>
         <a:defRPr lang="en-US"/>
       </a:defPPr>
-      <a:lvl1pPr marL="0" algn="l" defTabSz="914400" rtl="0" eaLnBrk="1" latinLnBrk="0" hangingPunct="1">
-        <a:defRPr sz="1800" kern="1200">
+      <a:lvl1pPr marL="0" algn="l" defTabSz="914400" rtl="0">
+        <a:defRPr sz="1800">
           <a:solidFill>
             <a:schemeClr val="tx1"/>
           </a:solidFill>
@@ -2867,8 +3928,8 @@
           <a:cs typeface="+mn-cs"/>
         </a:defRPr>
       </a:lvl1pPr>
-      <a:lvl2pPr marL="457200" algn="l" defTabSz="914400" rtl="0" eaLnBrk="1" latinLnBrk="0" hangingPunct="1">
-        <a:defRPr sz="1800" kern="1200">
+      <a:lvl2pPr marL="457200" algn="l" defTabSz="914400" rtl="0">
+        <a:defRPr sz="1800">
           <a:solidFill>
             <a:schemeClr val="tx1"/>
           </a:solidFill>
@@ -2877,8 +3938,8 @@
           <a:cs typeface="+mn-cs"/>
         </a:defRPr>
       </a:lvl2pPr>
-      <a:lvl3pPr marL="914400" algn="l" defTabSz="914400" rtl="0" eaLnBrk="1" latinLnBrk="0" hangingPunct="1">
-        <a:defRPr sz="1800" kern="1200">
+      <a:lvl3pPr marL="914400" algn="l" defTabSz="914400" rtl="0">
+        <a:defRPr sz="1800">
           <a:solidFill>
             <a:schemeClr val="tx1"/>
           </a:solidFill>
@@ -2887,8 +3948,8 @@
           <a:cs typeface="+mn-cs"/>
         </a:defRPr>
       </a:lvl3pPr>
-      <a:lvl4pPr marL="1371600" algn="l" defTabSz="914400" rtl="0" eaLnBrk="1" latinLnBrk="0" hangingPunct="1">
-        <a:defRPr sz="1800" kern="1200">
+      <a:lvl4pPr marL="1371600" algn="l" defTabSz="914400" rtl="0">
+        <a:defRPr sz="1800">
           <a:solidFill>
             <a:schemeClr val="tx1"/>
           </a:solidFill>
@@ -2897,8 +3958,8 @@
           <a:cs typeface="+mn-cs"/>
         </a:defRPr>
       </a:lvl4pPr>
-      <a:lvl5pPr marL="1828800" algn="l" defTabSz="914400" rtl="0" eaLnBrk="1" latinLnBrk="0" hangingPunct="1">
-        <a:defRPr sz="1800" kern="1200">
+      <a:lvl5pPr marL="1828800" algn="l" defTabSz="914400" rtl="0">
+        <a:defRPr sz="1800">
           <a:solidFill>
             <a:schemeClr val="tx1"/>
           </a:solidFill>
@@ -2907,8 +3968,8 @@
           <a:cs typeface="+mn-cs"/>
         </a:defRPr>
       </a:lvl5pPr>
-      <a:lvl6pPr marL="2286000" algn="l" defTabSz="914400" rtl="0" eaLnBrk="1" latinLnBrk="0" hangingPunct="1">
-        <a:defRPr sz="1800" kern="1200">
+      <a:lvl6pPr marL="2286000" algn="l" defTabSz="914400" rtl="0">
+        <a:defRPr sz="1800">
           <a:solidFill>
             <a:schemeClr val="tx1"/>
           </a:solidFill>
@@ -2917,8 +3978,8 @@
           <a:cs typeface="+mn-cs"/>
         </a:defRPr>
       </a:lvl6pPr>
-      <a:lvl7pPr marL="2743200" algn="l" defTabSz="914400" rtl="0" eaLnBrk="1" latinLnBrk="0" hangingPunct="1">
-        <a:defRPr sz="1800" kern="1200">
+      <a:lvl7pPr marL="2743200" algn="l" defTabSz="914400" rtl="0">
+        <a:defRPr sz="1800">
           <a:solidFill>
             <a:schemeClr val="tx1"/>
           </a:solidFill>
@@ -2927,8 +3988,8 @@
           <a:cs typeface="+mn-cs"/>
         </a:defRPr>
       </a:lvl7pPr>
-      <a:lvl8pPr marL="3200400" algn="l" defTabSz="914400" rtl="0" eaLnBrk="1" latinLnBrk="0" hangingPunct="1">
-        <a:defRPr sz="1800" kern="1200">
+      <a:lvl8pPr marL="3200400" algn="l" defTabSz="914400" rtl="0">
+        <a:defRPr sz="1800">
           <a:solidFill>
             <a:schemeClr val="tx1"/>
           </a:solidFill>
@@ -2937,8 +3998,8 @@
           <a:cs typeface="+mn-cs"/>
         </a:defRPr>
       </a:lvl8pPr>
-      <a:lvl9pPr marL="3657600" algn="l" defTabSz="914400" rtl="0" eaLnBrk="1" latinLnBrk="0" hangingPunct="1">
-        <a:defRPr sz="1800" kern="1200">
+      <a:lvl9pPr marL="3657600" algn="l" defTabSz="914400" rtl="0">
+        <a:defRPr sz="1800">
           <a:solidFill>
             <a:schemeClr val="tx1"/>
           </a:solidFill>
@@ -2953,15 +4014,15 @@
 </file>
 
 <file path=ppt/slides/slide1.xml><?xml version="1.0" encoding="utf-8"?>
-<p:sld xmlns:a="http://schemas.openxmlformats.org/drawingml/2006/main" xmlns:r="http://schemas.openxmlformats.org/officeDocument/2006/relationships" xmlns:p="http://schemas.openxmlformats.org/presentationml/2006/main">
-  <p:cSld>
+<p:sld xmlns:a="http://schemas.openxmlformats.org/drawingml/2006/main" xmlns:r="http://schemas.openxmlformats.org/officeDocument/2006/relationships" xmlns:p="http://schemas.openxmlformats.org/presentationml/2006/main" xmlns:m="http://schemas.openxmlformats.org/officeDocument/2006/math" xmlns:w="http://schemas.openxmlformats.org/wordprocessingml/2006/main" xmlns:mc="http://schemas.openxmlformats.org/markup-compatibility/2006" showMasterPhAnim="0" showMasterSp="1" show="1">
+  <p:cSld name="">
     <p:spTree>
       <p:nvGrpSpPr>
         <p:cNvPr id="1" name=""/>
         <p:cNvGrpSpPr/>
         <p:nvPr/>
       </p:nvGrpSpPr>
-      <p:grpSpPr>
+      <p:grpSpPr bwMode="auto">
         <a:xfrm>
           <a:off x="0" y="0"/>
           <a:ext cx="0" cy="0"/>
@@ -2971,7 +4032,7 @@
       </p:grpSpPr>
       <p:sp>
         <p:nvSpPr>
-          <p:cNvPr id="2" name="Title 1"/>
+          <p:cNvPr id="1076127679" name="Title 1"/>
           <p:cNvSpPr>
             <a:spLocks noGrp="1"/>
           </p:cNvSpPr>
@@ -2979,22 +4040,25 @@
             <p:ph type="ctrTitle"/>
           </p:nvPr>
         </p:nvSpPr>
-        <p:spPr/>
-        <p:txBody>
-          <a:bodyPr/>
-          <a:lstStyle/>
-          <a:p>
-            <a:r>
-              <a:rPr lang="en-US" dirty="0" smtClean="0"/>
+        <p:spPr bwMode="auto"/>
+        <p:txBody>
+          <a:bodyPr/>
+          <a:lstStyle/>
+          <a:p>
+            <a:pPr>
+              <a:defRPr/>
+            </a:pPr>
+            <a:r>
+              <a:rPr lang="en-US"/>
               <a:t>Physical limitations of signal conversion</a:t>
             </a:r>
-            <a:endParaRPr lang="en-US" dirty="0"/>
-          </a:p>
-        </p:txBody>
-      </p:sp>
-      <p:sp>
-        <p:nvSpPr>
-          <p:cNvPr id="3" name="Subtitle 2"/>
+            <a:endParaRPr lang="en-US"/>
+          </a:p>
+        </p:txBody>
+      </p:sp>
+      <p:sp>
+        <p:nvSpPr>
+          <p:cNvPr id="1229525940" name="Subtitle 2"/>
           <p:cNvSpPr>
             <a:spLocks noGrp="1"/>
           </p:cNvSpPr>
@@ -3002,38 +4066,44 @@
             <p:ph type="subTitle" idx="1"/>
           </p:nvPr>
         </p:nvSpPr>
-        <p:spPr/>
-        <p:txBody>
-          <a:bodyPr/>
-          <a:lstStyle/>
-          <a:p>
+        <p:spPr bwMode="auto"/>
+        <p:txBody>
+          <a:bodyPr/>
+          <a:lstStyle/>
+          <a:p>
+            <a:pPr>
+              <a:defRPr/>
+            </a:pPr>
             <a:endParaRPr lang="en-US"/>
           </a:p>
         </p:txBody>
       </p:sp>
     </p:spTree>
-    <p:extLst>
-      <p:ext uri="{BB962C8B-B14F-4D97-AF65-F5344CB8AC3E}">
-        <p14:creationId xmlns:p14="http://schemas.microsoft.com/office/powerpoint/2010/main" val="4043244275"/>
-      </p:ext>
-    </p:extLst>
   </p:cSld>
   <p:clrMapOvr>
     <a:masterClrMapping/>
   </p:clrMapOvr>
+  <mc:AlternateContent xmlns:mc="http://schemas.openxmlformats.org/markup-compatibility/2006">
+    <mc:Choice xmlns:p159="http://schemas.microsoft.com/office/powerpoint/2015/09/main" xmlns:p14="http://schemas.microsoft.com/office/powerpoint/2010/main" Requires="p159">
+      <p:transition p14:dur="500" advClick="1"/>
+    </mc:Choice>
+    <mc:Fallback>
+      <p:transition advClick="1"/>
+    </mc:Fallback>
+  </mc:AlternateContent>
 </p:sld>
 </file>
 
 <file path=ppt/slides/slide2.xml><?xml version="1.0" encoding="utf-8"?>
-<p:sld xmlns:a="http://schemas.openxmlformats.org/drawingml/2006/main" xmlns:r="http://schemas.openxmlformats.org/officeDocument/2006/relationships" xmlns:p="http://schemas.openxmlformats.org/presentationml/2006/main">
-  <p:cSld>
+<p:sld xmlns:a="http://schemas.openxmlformats.org/drawingml/2006/main" xmlns:r="http://schemas.openxmlformats.org/officeDocument/2006/relationships" xmlns:p="http://schemas.openxmlformats.org/presentationml/2006/main" xmlns:m="http://schemas.openxmlformats.org/officeDocument/2006/math" xmlns:w="http://schemas.openxmlformats.org/wordprocessingml/2006/main" xmlns:mc="http://schemas.openxmlformats.org/markup-compatibility/2006" showMasterPhAnim="0" showMasterSp="1" show="1">
+  <p:cSld name="">
     <p:spTree>
       <p:nvGrpSpPr>
         <p:cNvPr id="1" name=""/>
         <p:cNvGrpSpPr/>
         <p:nvPr/>
       </p:nvGrpSpPr>
-      <p:grpSpPr>
+      <p:grpSpPr bwMode="auto">
         <a:xfrm>
           <a:off x="0" y="0"/>
           <a:ext cx="0" cy="0"/>
@@ -3043,7 +4113,7 @@
       </p:grpSpPr>
       <p:sp>
         <p:nvSpPr>
-          <p:cNvPr id="2" name="Title 1"/>
+          <p:cNvPr id="1773300916" name="Title 1"/>
           <p:cNvSpPr>
             <a:spLocks noGrp="1"/>
           </p:cNvSpPr>
@@ -3051,22 +4121,25 @@
             <p:ph type="title"/>
           </p:nvPr>
         </p:nvSpPr>
-        <p:spPr/>
-        <p:txBody>
-          <a:bodyPr/>
-          <a:lstStyle/>
-          <a:p>
-            <a:r>
-              <a:rPr lang="en-US" b="1" dirty="0" smtClean="0"/>
+        <p:spPr bwMode="auto"/>
+        <p:txBody>
+          <a:bodyPr/>
+          <a:lstStyle/>
+          <a:p>
+            <a:pPr>
+              <a:defRPr/>
+            </a:pPr>
+            <a:r>
+              <a:rPr lang="en-US" b="1"/>
               <a:t>Why this matters for CSE Students</a:t>
             </a:r>
-            <a:endParaRPr lang="en-US" dirty="0"/>
-          </a:p>
-        </p:txBody>
-      </p:sp>
-      <p:sp>
-        <p:nvSpPr>
-          <p:cNvPr id="3" name="Content Placeholder 2"/>
+            <a:endParaRPr lang="en-US"/>
+          </a:p>
+        </p:txBody>
+      </p:sp>
+      <p:sp>
+        <p:nvSpPr>
+          <p:cNvPr id="1059105844" name="Content Placeholder 2"/>
           <p:cNvSpPr>
             <a:spLocks noGrp="1"/>
           </p:cNvSpPr>
@@ -3074,17 +4147,20 @@
             <p:ph idx="1"/>
           </p:nvPr>
         </p:nvSpPr>
-        <p:spPr/>
-        <p:txBody>
-          <a:bodyPr/>
-          <a:lstStyle/>
-          <a:p>
-            <a:r>
-              <a:rPr lang="en-US" dirty="0" smtClean="0"/>
+        <p:spPr bwMode="auto"/>
+        <p:txBody>
+          <a:bodyPr/>
+          <a:lstStyle/>
+          <a:p>
+            <a:pPr>
+              <a:defRPr/>
+            </a:pPr>
+            <a:r>
+              <a:rPr lang="en-US"/>
               <a:t>Understanding the physical limitations of signal conversion is </a:t>
             </a:r>
             <a:r>
-              <a:rPr lang="en-US" dirty="0" smtClean="0">
+              <a:rPr lang="en-US">
                 <a:solidFill>
                   <a:srgbClr val="FF0000"/>
                 </a:solidFill>
@@ -3092,17 +4168,21 @@
               <a:t>crucial for "Power Budgeting."</a:t>
             </a:r>
             <a:r>
-              <a:rPr lang="en-US" dirty="0" smtClean="0"/>
+              <a:rPr lang="en-US"/>
               <a:t> </a:t>
             </a:r>
-          </a:p>
-          <a:p>
-            <a:r>
-              <a:rPr lang="en-US" dirty="0" smtClean="0"/>
+            <a:endParaRPr/>
+          </a:p>
+          <a:p>
+            <a:pPr>
+              <a:defRPr/>
+            </a:pPr>
+            <a:r>
+              <a:rPr lang="en-US"/>
               <a:t>If the light signal becomes </a:t>
             </a:r>
             <a:r>
-              <a:rPr lang="en-US" dirty="0" smtClean="0">
+              <a:rPr lang="en-US">
                 <a:solidFill>
                   <a:srgbClr val="FF0000"/>
                 </a:solidFill>
@@ -3110,18 +4190,21 @@
               <a:t>too weak due to fiber loss</a:t>
             </a:r>
             <a:r>
-              <a:rPr lang="en-US" dirty="0" smtClean="0"/>
+              <a:rPr lang="en-US"/>
               <a:t>, </a:t>
             </a:r>
-          </a:p>
-          <a:p>
-            <a:pPr lvl="1"/>
-            <a:r>
-              <a:rPr lang="en-US" dirty="0" smtClean="0"/>
+            <a:endParaRPr/>
+          </a:p>
+          <a:p>
+            <a:pPr lvl="1">
+              <a:defRPr/>
+            </a:pPr>
+            <a:r>
+              <a:rPr lang="en-US"/>
               <a:t>the </a:t>
             </a:r>
             <a:r>
-              <a:rPr lang="en-US" dirty="0" smtClean="0">
+              <a:rPr lang="en-US">
                 <a:solidFill>
                   <a:srgbClr val="FF0000"/>
                 </a:solidFill>
@@ -3129,36 +4212,39 @@
               <a:t>photocurrent will drop below the noise floor</a:t>
             </a:r>
             <a:r>
-              <a:rPr lang="en-US" dirty="0" smtClean="0"/>
+              <a:rPr lang="en-US"/>
               <a:t>, leading to a high Bit Error Rate (BER).</a:t>
             </a:r>
-            <a:endParaRPr lang="en-US" dirty="0"/>
+            <a:endParaRPr lang="en-US"/>
           </a:p>
         </p:txBody>
       </p:sp>
     </p:spTree>
-    <p:extLst>
-      <p:ext uri="{BB962C8B-B14F-4D97-AF65-F5344CB8AC3E}">
-        <p14:creationId xmlns:p14="http://schemas.microsoft.com/office/powerpoint/2010/main" val="2060156366"/>
-      </p:ext>
-    </p:extLst>
   </p:cSld>
   <p:clrMapOvr>
     <a:masterClrMapping/>
   </p:clrMapOvr>
+  <mc:AlternateContent xmlns:mc="http://schemas.openxmlformats.org/markup-compatibility/2006">
+    <mc:Choice xmlns:p159="http://schemas.microsoft.com/office/powerpoint/2015/09/main" xmlns:p14="http://schemas.microsoft.com/office/powerpoint/2010/main" Requires="p159">
+      <p:transition p14:dur="500" advClick="1"/>
+    </mc:Choice>
+    <mc:Fallback>
+      <p:transition advClick="1"/>
+    </mc:Fallback>
+  </mc:AlternateContent>
 </p:sld>
 </file>
 
 <file path=ppt/slides/slide3.xml><?xml version="1.0" encoding="utf-8"?>
-<p:sld xmlns:a="http://schemas.openxmlformats.org/drawingml/2006/main" xmlns:r="http://schemas.openxmlformats.org/officeDocument/2006/relationships" xmlns:p="http://schemas.openxmlformats.org/presentationml/2006/main">
-  <p:cSld>
+<p:sld xmlns:a="http://schemas.openxmlformats.org/drawingml/2006/main" xmlns:r="http://schemas.openxmlformats.org/officeDocument/2006/relationships" xmlns:p="http://schemas.openxmlformats.org/presentationml/2006/main" xmlns:m="http://schemas.openxmlformats.org/officeDocument/2006/math" xmlns:w="http://schemas.openxmlformats.org/wordprocessingml/2006/main" xmlns:mc="http://schemas.openxmlformats.org/markup-compatibility/2006" showMasterPhAnim="0" showMasterSp="1" show="1">
+  <p:cSld name="">
     <p:spTree>
       <p:nvGrpSpPr>
         <p:cNvPr id="1" name=""/>
         <p:cNvGrpSpPr/>
         <p:nvPr/>
       </p:nvGrpSpPr>
-      <p:grpSpPr>
+      <p:grpSpPr bwMode="auto">
         <a:xfrm>
           <a:off x="0" y="0"/>
           <a:ext cx="0" cy="0"/>
@@ -3168,7 +4254,7 @@
       </p:grpSpPr>
       <p:sp>
         <p:nvSpPr>
-          <p:cNvPr id="2" name="Title 1"/>
+          <p:cNvPr id="1680415649" name="Title 1"/>
           <p:cNvSpPr>
             <a:spLocks noGrp="1"/>
           </p:cNvSpPr>
@@ -3176,7 +4262,7 @@
             <p:ph type="title"/>
           </p:nvPr>
         </p:nvSpPr>
-        <p:spPr>
+        <p:spPr bwMode="auto">
           <a:xfrm>
             <a:off x="653562" y="118941"/>
             <a:ext cx="10515600" cy="1325563"/>
@@ -3186,23 +4272,26 @@
           <a:bodyPr/>
           <a:lstStyle/>
           <a:p>
-            <a:r>
-              <a:rPr lang="en-US" dirty="0" smtClean="0">
-                <a:latin typeface="Arial" panose="020B0604020202020204" pitchFamily="34" charset="0"/>
-                <a:cs typeface="Arial" panose="020B0604020202020204" pitchFamily="34" charset="0"/>
+            <a:pPr>
+              <a:defRPr/>
+            </a:pPr>
+            <a:r>
+              <a:rPr lang="en-US">
+                <a:latin typeface="Arial"/>
+                <a:cs typeface="Arial"/>
               </a:rPr>
               <a:t>Concept:</a:t>
             </a:r>
-            <a:endParaRPr lang="en-US" dirty="0">
-              <a:latin typeface="Arial" panose="020B0604020202020204" pitchFamily="34" charset="0"/>
-              <a:cs typeface="Arial" panose="020B0604020202020204" pitchFamily="34" charset="0"/>
+            <a:endParaRPr lang="en-US">
+              <a:latin typeface="Arial"/>
+              <a:cs typeface="Arial"/>
             </a:endParaRPr>
           </a:p>
         </p:txBody>
       </p:sp>
       <p:sp>
         <p:nvSpPr>
-          <p:cNvPr id="3" name="Content Placeholder 2"/>
+          <p:cNvPr id="1817650415" name="Content Placeholder 2"/>
           <p:cNvSpPr>
             <a:spLocks noGrp="1"/>
           </p:cNvSpPr>
@@ -3210,19 +4299,22 @@
             <p:ph idx="1"/>
           </p:nvPr>
         </p:nvSpPr>
-        <p:spPr/>
+        <p:spPr bwMode="auto"/>
         <p:txBody>
           <a:bodyPr>
             <a:noAutofit/>
           </a:bodyPr>
           <a:lstStyle/>
           <a:p>
-            <a:r>
-              <a:rPr lang="en-US" sz="3200" dirty="0" smtClean="0"/>
+            <a:pPr>
+              <a:defRPr/>
+            </a:pPr>
+            <a:r>
+              <a:rPr lang="en-US" sz="3200"/>
               <a:t>In an optical communication system, the receiver's job is to </a:t>
             </a:r>
             <a:r>
-              <a:rPr lang="en-US" sz="3200" dirty="0" smtClean="0">
+              <a:rPr lang="en-US" sz="3200">
                 <a:solidFill>
                   <a:srgbClr val="FF0000"/>
                 </a:solidFill>
@@ -3230,26 +4322,29 @@
               <a:t>convert light (photons) back into electricity (electrons)</a:t>
             </a:r>
             <a:r>
-              <a:rPr lang="en-US" sz="3200" dirty="0" smtClean="0"/>
+              <a:rPr lang="en-US" sz="3200"/>
               <a:t>. </a:t>
             </a:r>
-          </a:p>
-          <a:p>
-            <a:pPr lvl="1"/>
-            <a:r>
-              <a:rPr lang="en-US" sz="2800" dirty="0" smtClean="0"/>
+            <a:endParaRPr/>
+          </a:p>
+          <a:p>
+            <a:pPr lvl="1">
+              <a:defRPr/>
+            </a:pPr>
+            <a:r>
+              <a:rPr lang="en-US" sz="2800"/>
               <a:t>Quantum Efficiency (</a:t>
             </a:r>
             <a:r>
-              <a:rPr lang="el-GR" sz="2800" dirty="0"/>
+              <a:rPr lang="el-GR" sz="2800"/>
               <a:t>η</a:t>
             </a:r>
             <a:r>
-              <a:rPr lang="en-US" sz="2800" dirty="0" smtClean="0"/>
+              <a:rPr lang="en-US" sz="2800"/>
               <a:t>): This represents the </a:t>
             </a:r>
             <a:r>
-              <a:rPr lang="en-US" sz="2800" dirty="0" smtClean="0">
+              <a:rPr lang="en-US" sz="2800">
                 <a:solidFill>
                   <a:srgbClr val="FF0000"/>
                 </a:solidFill>
@@ -3257,11 +4352,11 @@
               <a:t>"success rate" of the photodiode</a:t>
             </a:r>
             <a:r>
-              <a:rPr lang="en-US" sz="2800" dirty="0" smtClean="0"/>
+              <a:rPr lang="en-US" sz="2800"/>
               <a:t>. A 70% efficiency means that for </a:t>
             </a:r>
             <a:r>
-              <a:rPr lang="en-US" sz="2800" dirty="0" smtClean="0">
+              <a:rPr lang="en-US" sz="2800">
                 <a:solidFill>
                   <a:srgbClr val="FF0000"/>
                 </a:solidFill>
@@ -3269,25 +4364,31 @@
               <a:t>every 100 photons that hit the detector, only 70 successfully generate an electron-hole pair to create current</a:t>
             </a:r>
             <a:r>
-              <a:rPr lang="en-US" sz="2800" dirty="0" smtClean="0"/>
+              <a:rPr lang="en-US" sz="2800"/>
               <a:t>.</a:t>
             </a:r>
-          </a:p>
-          <a:p>
-            <a:pPr lvl="1"/>
-            <a:r>
-              <a:rPr lang="en-US" sz="2800" dirty="0" smtClean="0"/>
+            <a:endParaRPr/>
+          </a:p>
+          <a:p>
+            <a:pPr lvl="1">
+              <a:defRPr/>
+            </a:pPr>
+            <a:r>
+              <a:rPr lang="en-US" sz="2800"/>
               <a:t>Responsivity (R): This is a practical measure for engineers. </a:t>
             </a:r>
-          </a:p>
-          <a:p>
-            <a:pPr lvl="2"/>
-            <a:r>
-              <a:rPr lang="en-US" sz="2400" dirty="0" smtClean="0"/>
+            <a:endParaRPr/>
+          </a:p>
+          <a:p>
+            <a:pPr lvl="2">
+              <a:defRPr/>
+            </a:pPr>
+            <a:r>
+              <a:rPr lang="en-US" sz="2400"/>
               <a:t>While quantum efficiency is a ratio of particles, </a:t>
             </a:r>
             <a:r>
-              <a:rPr lang="en-US" sz="2400" dirty="0" smtClean="0">
+              <a:rPr lang="en-US" sz="2400">
                 <a:solidFill>
                   <a:srgbClr val="FF0000"/>
                 </a:solidFill>
@@ -3295,43 +4396,49 @@
               <a:t>Responsivity tells us exactly how many Amperes of current we get for every Watt of light power</a:t>
             </a:r>
             <a:r>
-              <a:rPr lang="en-US" sz="2400" dirty="0" smtClean="0"/>
+              <a:rPr lang="en-US" sz="2400"/>
               <a:t>. </a:t>
             </a:r>
-          </a:p>
-          <a:p>
-            <a:pPr lvl="2"/>
-            <a:r>
-              <a:rPr lang="en-US" sz="2400" dirty="0" smtClean="0"/>
+            <a:endParaRPr/>
+          </a:p>
+          <a:p>
+            <a:pPr lvl="2">
+              <a:defRPr/>
+            </a:pPr>
+            <a:r>
+              <a:rPr lang="en-US" sz="2400"/>
               <a:t>It is wavelength-dependent because the energy of a photon changes with its color (wavelength).</a:t>
             </a:r>
-            <a:endParaRPr lang="en-US" sz="2400" dirty="0"/>
+            <a:endParaRPr lang="en-US" sz="2400"/>
           </a:p>
         </p:txBody>
       </p:sp>
     </p:spTree>
-    <p:extLst>
-      <p:ext uri="{BB962C8B-B14F-4D97-AF65-F5344CB8AC3E}">
-        <p14:creationId xmlns:p14="http://schemas.microsoft.com/office/powerpoint/2010/main" val="3875623444"/>
-      </p:ext>
-    </p:extLst>
   </p:cSld>
   <p:clrMapOvr>
     <a:masterClrMapping/>
   </p:clrMapOvr>
+  <mc:AlternateContent xmlns:mc="http://schemas.openxmlformats.org/markup-compatibility/2006">
+    <mc:Choice xmlns:p159="http://schemas.microsoft.com/office/powerpoint/2015/09/main" xmlns:p14="http://schemas.microsoft.com/office/powerpoint/2010/main" Requires="p159">
+      <p:transition p14:dur="500" advClick="1"/>
+    </mc:Choice>
+    <mc:Fallback>
+      <p:transition advClick="1"/>
+    </mc:Fallback>
+  </mc:AlternateContent>
 </p:sld>
 </file>
 
 <file path=ppt/slides/slide4.xml><?xml version="1.0" encoding="utf-8"?>
-<p:sld xmlns:a="http://schemas.openxmlformats.org/drawingml/2006/main" xmlns:r="http://schemas.openxmlformats.org/officeDocument/2006/relationships" xmlns:p="http://schemas.openxmlformats.org/presentationml/2006/main">
-  <p:cSld>
+<p:sld xmlns:a="http://schemas.openxmlformats.org/drawingml/2006/main" xmlns:r="http://schemas.openxmlformats.org/officeDocument/2006/relationships" xmlns:p="http://schemas.openxmlformats.org/presentationml/2006/main" xmlns:m="http://schemas.openxmlformats.org/officeDocument/2006/math" xmlns:w="http://schemas.openxmlformats.org/wordprocessingml/2006/main" xmlns:mc="http://schemas.openxmlformats.org/markup-compatibility/2006" showMasterPhAnim="0" showMasterSp="1" show="1">
+  <p:cSld name="">
     <p:spTree>
       <p:nvGrpSpPr>
         <p:cNvPr id="1" name=""/>
         <p:cNvGrpSpPr/>
         <p:nvPr/>
       </p:nvGrpSpPr>
-      <p:grpSpPr>
+      <p:grpSpPr bwMode="auto">
         <a:xfrm>
           <a:off x="0" y="0"/>
           <a:ext cx="0" cy="0"/>
@@ -3341,7 +4448,7 @@
       </p:grpSpPr>
       <p:sp>
         <p:nvSpPr>
-          <p:cNvPr id="2" name="Title 1"/>
+          <p:cNvPr id="1169060963" name="Title 1"/>
           <p:cNvSpPr>
             <a:spLocks noGrp="1"/>
           </p:cNvSpPr>
@@ -3349,7 +4456,7 @@
             <p:ph type="title"/>
           </p:nvPr>
         </p:nvSpPr>
-        <p:spPr>
+        <p:spPr bwMode="auto">
           <a:xfrm>
             <a:off x="653562" y="118941"/>
             <a:ext cx="10515600" cy="1325563"/>
@@ -3359,23 +4466,26 @@
           <a:bodyPr/>
           <a:lstStyle/>
           <a:p>
-            <a:r>
-              <a:rPr lang="en-US" dirty="0" smtClean="0">
-                <a:latin typeface="Arial" panose="020B0604020202020204" pitchFamily="34" charset="0"/>
-                <a:cs typeface="Arial" panose="020B0604020202020204" pitchFamily="34" charset="0"/>
+            <a:pPr>
+              <a:defRPr/>
+            </a:pPr>
+            <a:r>
+              <a:rPr lang="en-US">
+                <a:latin typeface="Arial"/>
+                <a:cs typeface="Arial"/>
               </a:rPr>
               <a:t>Concept:</a:t>
             </a:r>
-            <a:endParaRPr lang="en-US" dirty="0">
-              <a:latin typeface="Arial" panose="020B0604020202020204" pitchFamily="34" charset="0"/>
-              <a:cs typeface="Arial" panose="020B0604020202020204" pitchFamily="34" charset="0"/>
+            <a:endParaRPr lang="en-US">
+              <a:latin typeface="Arial"/>
+              <a:cs typeface="Arial"/>
             </a:endParaRPr>
           </a:p>
         </p:txBody>
       </p:sp>
       <p:sp>
         <p:nvSpPr>
-          <p:cNvPr id="3" name="Content Placeholder 2"/>
+          <p:cNvPr id="738947274" name="Content Placeholder 2"/>
           <p:cNvSpPr>
             <a:spLocks noGrp="1"/>
           </p:cNvSpPr>
@@ -3383,31 +4493,34 @@
             <p:ph idx="1"/>
           </p:nvPr>
         </p:nvSpPr>
-        <p:spPr/>
+        <p:spPr bwMode="auto"/>
         <p:txBody>
           <a:bodyPr>
             <a:noAutofit/>
           </a:bodyPr>
           <a:lstStyle/>
           <a:p>
-            <a:r>
-              <a:rPr lang="en-US" sz="3200" dirty="0" smtClean="0"/>
+            <a:pPr>
+              <a:defRPr/>
+            </a:pPr>
+            <a:r>
+              <a:rPr lang="en-US" sz="3200"/>
               <a:t>Photocurrent (</a:t>
             </a:r>
             <a:r>
-              <a:rPr lang="en-US" sz="3200" dirty="0" err="1" smtClean="0"/>
+              <a:rPr lang="en-US" sz="3200"/>
               <a:t>I</a:t>
             </a:r>
             <a:r>
-              <a:rPr lang="en-US" dirty="0" err="1" smtClean="0"/>
+              <a:rPr lang="en-US"/>
               <a:t>p</a:t>
             </a:r>
             <a:r>
-              <a:rPr lang="en-US" sz="3200" dirty="0" smtClean="0"/>
+              <a:rPr lang="en-US" sz="3200"/>
               <a:t>): This is the </a:t>
             </a:r>
             <a:r>
-              <a:rPr lang="en-US" sz="3200" dirty="0" smtClean="0">
+              <a:rPr lang="en-US" sz="3200">
                 <a:solidFill>
                   <a:srgbClr val="FF0000"/>
                 </a:solidFill>
@@ -3415,36 +4528,39 @@
               <a:t>actual electrical signal that will be amplified and processed by the rest of the computer system to recover the transmitted data</a:t>
             </a:r>
             <a:r>
-              <a:rPr lang="en-US" sz="3200" dirty="0" smtClean="0"/>
+              <a:rPr lang="en-US" sz="3200"/>
               <a:t>.</a:t>
             </a:r>
-            <a:endParaRPr lang="en-US" sz="2400" dirty="0"/>
+            <a:endParaRPr lang="en-US" sz="2400"/>
           </a:p>
         </p:txBody>
       </p:sp>
     </p:spTree>
-    <p:extLst>
-      <p:ext uri="{BB962C8B-B14F-4D97-AF65-F5344CB8AC3E}">
-        <p14:creationId xmlns:p14="http://schemas.microsoft.com/office/powerpoint/2010/main" val="579597595"/>
-      </p:ext>
-    </p:extLst>
   </p:cSld>
   <p:clrMapOvr>
     <a:masterClrMapping/>
   </p:clrMapOvr>
+  <mc:AlternateContent xmlns:mc="http://schemas.openxmlformats.org/markup-compatibility/2006">
+    <mc:Choice xmlns:p159="http://schemas.microsoft.com/office/powerpoint/2015/09/main" xmlns:p14="http://schemas.microsoft.com/office/powerpoint/2010/main" Requires="p159">
+      <p:transition p14:dur="500" advClick="1"/>
+    </mc:Choice>
+    <mc:Fallback>
+      <p:transition advClick="1"/>
+    </mc:Fallback>
+  </mc:AlternateContent>
 </p:sld>
 </file>
 
 <file path=ppt/slides/slide5.xml><?xml version="1.0" encoding="utf-8"?>
-<p:sld xmlns:a="http://schemas.openxmlformats.org/drawingml/2006/main" xmlns:r="http://schemas.openxmlformats.org/officeDocument/2006/relationships" xmlns:p="http://schemas.openxmlformats.org/presentationml/2006/main">
-  <p:cSld>
+<p:sld xmlns:a="http://schemas.openxmlformats.org/drawingml/2006/main" xmlns:r="http://schemas.openxmlformats.org/officeDocument/2006/relationships" xmlns:p="http://schemas.openxmlformats.org/presentationml/2006/main" xmlns:m="http://schemas.openxmlformats.org/officeDocument/2006/math" xmlns:w="http://schemas.openxmlformats.org/wordprocessingml/2006/main" xmlns:mc="http://schemas.openxmlformats.org/markup-compatibility/2006" showMasterPhAnim="0" showMasterSp="1" show="1">
+  <p:cSld name="">
     <p:spTree>
       <p:nvGrpSpPr>
         <p:cNvPr id="1" name=""/>
         <p:cNvGrpSpPr/>
         <p:nvPr/>
       </p:nvGrpSpPr>
-      <p:grpSpPr>
+      <p:grpSpPr bwMode="auto">
         <a:xfrm>
           <a:off x="0" y="0"/>
           <a:ext cx="0" cy="0"/>
@@ -3454,7 +4570,7 @@
       </p:grpSpPr>
       <p:sp>
         <p:nvSpPr>
-          <p:cNvPr id="2" name="Title 1"/>
+          <p:cNvPr id="1500290486" name="Title 1"/>
           <p:cNvSpPr>
             <a:spLocks noGrp="1"/>
           </p:cNvSpPr>
@@ -3462,7 +4578,7 @@
             <p:ph type="title"/>
           </p:nvPr>
         </p:nvSpPr>
-        <p:spPr>
+        <p:spPr bwMode="auto">
           <a:xfrm>
             <a:off x="838200" y="60198"/>
             <a:ext cx="10515600" cy="1325563"/>
@@ -3472,48 +4588,30 @@
           <a:bodyPr/>
           <a:lstStyle/>
           <a:p>
-            <a:r>
-              <a:rPr lang="en-US" dirty="0" smtClean="0"/>
+            <a:pPr>
+              <a:defRPr/>
+            </a:pPr>
+            <a:r>
+              <a:rPr lang="en-US"/>
               <a:t>Exercise: Optical Detector Performance</a:t>
             </a:r>
-            <a:endParaRPr lang="en-US" dirty="0"/>
-          </a:p>
-        </p:txBody>
-      </p:sp>
-      <p:sp>
-        <p:nvSpPr>
-          <p:cNvPr id="3" name="Content Placeholder 2"/>
-          <p:cNvSpPr>
-            <a:spLocks noGrp="1"/>
-          </p:cNvSpPr>
-          <p:nvPr>
-            <p:ph idx="1"/>
-          </p:nvPr>
-        </p:nvSpPr>
-        <p:spPr/>
-        <p:txBody>
-          <a:bodyPr/>
-          <a:lstStyle/>
-          <a:p>
             <a:endParaRPr lang="en-US"/>
           </a:p>
         </p:txBody>
       </p:sp>
       <p:pic>
         <p:nvPicPr>
-          <p:cNvPr id="4" name="Picture 3"/>
+          <p:cNvPr id="1076171872" name="Picture 3"/>
           <p:cNvPicPr>
             <a:picLocks noChangeAspect="1"/>
           </p:cNvPicPr>
           <p:nvPr/>
         </p:nvPicPr>
-        <p:blipFill>
-          <a:blip r:embed="rId2"/>
-          <a:stretch>
-            <a:fillRect/>
-          </a:stretch>
+        <p:blipFill rotWithShape="1">
+          <a:blip r:embed="rId3"/>
+          <a:stretch/>
         </p:blipFill>
-        <p:spPr>
+        <p:spPr bwMode="auto">
           <a:xfrm>
             <a:off x="0" y="1385761"/>
             <a:ext cx="7271238" cy="1800476"/>
@@ -3525,19 +4623,17 @@
       </p:pic>
       <p:pic>
         <p:nvPicPr>
-          <p:cNvPr id="5" name="Picture 4"/>
+          <p:cNvPr id="924897049" name="Picture 4"/>
           <p:cNvPicPr>
             <a:picLocks noChangeAspect="1"/>
           </p:cNvPicPr>
           <p:nvPr/>
         </p:nvPicPr>
-        <p:blipFill>
-          <a:blip r:embed="rId3"/>
-          <a:stretch>
-            <a:fillRect/>
-          </a:stretch>
+        <p:blipFill rotWithShape="1">
+          <a:blip r:embed="rId4"/>
+          <a:stretch/>
         </p:blipFill>
-        <p:spPr>
+        <p:spPr bwMode="auto">
           <a:xfrm>
             <a:off x="7353651" y="1046285"/>
             <a:ext cx="5468113" cy="5591907"/>
@@ -3548,28 +4644,31 @@
         </p:spPr>
       </p:pic>
     </p:spTree>
-    <p:extLst>
-      <p:ext uri="{BB962C8B-B14F-4D97-AF65-F5344CB8AC3E}">
-        <p14:creationId xmlns:p14="http://schemas.microsoft.com/office/powerpoint/2010/main" val="4200891046"/>
-      </p:ext>
-    </p:extLst>
   </p:cSld>
   <p:clrMapOvr>
     <a:masterClrMapping/>
   </p:clrMapOvr>
+  <mc:AlternateContent xmlns:mc="http://schemas.openxmlformats.org/markup-compatibility/2006">
+    <mc:Choice xmlns:p159="http://schemas.microsoft.com/office/powerpoint/2015/09/main" xmlns:p14="http://schemas.microsoft.com/office/powerpoint/2010/main" Requires="p159">
+      <p:transition p14:dur="500" advClick="1"/>
+    </mc:Choice>
+    <mc:Fallback>
+      <p:transition advClick="1"/>
+    </mc:Fallback>
+  </mc:AlternateContent>
 </p:sld>
 </file>
 
 <file path=ppt/slides/slide6.xml><?xml version="1.0" encoding="utf-8"?>
-<p:sld xmlns:a="http://schemas.openxmlformats.org/drawingml/2006/main" xmlns:r="http://schemas.openxmlformats.org/officeDocument/2006/relationships" xmlns:p="http://schemas.openxmlformats.org/presentationml/2006/main">
-  <p:cSld>
+<p:sld xmlns:a="http://schemas.openxmlformats.org/drawingml/2006/main" xmlns:r="http://schemas.openxmlformats.org/officeDocument/2006/relationships" xmlns:p="http://schemas.openxmlformats.org/presentationml/2006/main" xmlns:m="http://schemas.openxmlformats.org/officeDocument/2006/math" xmlns:w="http://schemas.openxmlformats.org/wordprocessingml/2006/main" xmlns:mc="http://schemas.openxmlformats.org/markup-compatibility/2006" showMasterPhAnim="0" showMasterSp="1" show="1">
+  <p:cSld name="">
     <p:spTree>
       <p:nvGrpSpPr>
         <p:cNvPr id="1" name=""/>
         <p:cNvGrpSpPr/>
         <p:nvPr/>
       </p:nvGrpSpPr>
-      <p:grpSpPr>
+      <p:grpSpPr bwMode="auto">
         <a:xfrm>
           <a:off x="0" y="0"/>
           <a:ext cx="0" cy="0"/>
@@ -3579,7 +4678,7 @@
       </p:grpSpPr>
       <p:sp>
         <p:nvSpPr>
-          <p:cNvPr id="2" name="Title 1"/>
+          <p:cNvPr id="982661895" name="Title 1"/>
           <p:cNvSpPr>
             <a:spLocks noGrp="1"/>
           </p:cNvSpPr>
@@ -3587,7 +4686,7 @@
             <p:ph type="title"/>
           </p:nvPr>
         </p:nvSpPr>
-        <p:spPr>
+        <p:spPr bwMode="auto">
           <a:xfrm>
             <a:off x="838200" y="60198"/>
             <a:ext cx="10515600" cy="1325563"/>
@@ -3597,48 +4696,30 @@
           <a:bodyPr/>
           <a:lstStyle/>
           <a:p>
-            <a:r>
-              <a:rPr lang="en-US" dirty="0" smtClean="0"/>
+            <a:pPr>
+              <a:defRPr/>
+            </a:pPr>
+            <a:r>
+              <a:rPr lang="en-US"/>
               <a:t>Exercise: Optical Detector Performance</a:t>
             </a:r>
-            <a:endParaRPr lang="en-US" dirty="0"/>
-          </a:p>
-        </p:txBody>
-      </p:sp>
-      <p:sp>
-        <p:nvSpPr>
-          <p:cNvPr id="3" name="Content Placeholder 2"/>
-          <p:cNvSpPr>
-            <a:spLocks noGrp="1"/>
-          </p:cNvSpPr>
-          <p:nvPr>
-            <p:ph idx="1"/>
-          </p:nvPr>
-        </p:nvSpPr>
-        <p:spPr/>
-        <p:txBody>
-          <a:bodyPr/>
-          <a:lstStyle/>
-          <a:p>
             <a:endParaRPr lang="en-US"/>
           </a:p>
         </p:txBody>
       </p:sp>
       <p:pic>
         <p:nvPicPr>
-          <p:cNvPr id="4" name="Picture 3"/>
+          <p:cNvPr id="478257839" name="Picture 3"/>
           <p:cNvPicPr>
             <a:picLocks noChangeAspect="1"/>
           </p:cNvPicPr>
           <p:nvPr/>
         </p:nvPicPr>
-        <p:blipFill>
-          <a:blip r:embed="rId2"/>
-          <a:stretch>
-            <a:fillRect/>
-          </a:stretch>
+        <p:blipFill rotWithShape="1">
+          <a:blip r:embed="rId3"/>
+          <a:stretch/>
         </p:blipFill>
-        <p:spPr>
+        <p:spPr bwMode="auto">
           <a:xfrm>
             <a:off x="0" y="1385761"/>
             <a:ext cx="7271238" cy="1800476"/>
@@ -3650,19 +4731,17 @@
       </p:pic>
       <p:pic>
         <p:nvPicPr>
-          <p:cNvPr id="6" name="Picture 5"/>
+          <p:cNvPr id="460259572" name="Picture 5"/>
           <p:cNvPicPr>
             <a:picLocks noChangeAspect="1"/>
           </p:cNvPicPr>
           <p:nvPr/>
         </p:nvPicPr>
-        <p:blipFill>
-          <a:blip r:embed="rId3"/>
-          <a:stretch>
-            <a:fillRect/>
-          </a:stretch>
+        <p:blipFill rotWithShape="1">
+          <a:blip r:embed="rId4"/>
+          <a:stretch/>
         </p:blipFill>
-        <p:spPr>
+        <p:spPr bwMode="auto">
           <a:xfrm>
             <a:off x="6096000" y="3186237"/>
             <a:ext cx="5410955" cy="3324689"/>
@@ -3673,20 +4752,23 @@
         </p:spPr>
       </p:pic>
     </p:spTree>
-    <p:extLst>
-      <p:ext uri="{BB962C8B-B14F-4D97-AF65-F5344CB8AC3E}">
-        <p14:creationId xmlns:p14="http://schemas.microsoft.com/office/powerpoint/2010/main" val="741371248"/>
-      </p:ext>
-    </p:extLst>
   </p:cSld>
   <p:clrMapOvr>
     <a:masterClrMapping/>
   </p:clrMapOvr>
+  <mc:AlternateContent xmlns:mc="http://schemas.openxmlformats.org/markup-compatibility/2006">
+    <mc:Choice xmlns:p159="http://schemas.microsoft.com/office/powerpoint/2015/09/main" xmlns:p14="http://schemas.microsoft.com/office/powerpoint/2010/main" Requires="p159">
+      <p:transition p14:dur="500" advClick="1"/>
+    </mc:Choice>
+    <mc:Fallback>
+      <p:transition advClick="1"/>
+    </mc:Fallback>
+  </mc:AlternateContent>
 </p:sld>
 </file>
 
 <file path=ppt/theme/theme1.xml><?xml version="1.0" encoding="utf-8"?>
-<a:theme xmlns:a="http://schemas.openxmlformats.org/drawingml/2006/main" name="Office Theme">
+<a:theme xmlns:a="http://schemas.openxmlformats.org/drawingml/2006/main" xmlns:r="http://schemas.openxmlformats.org/officeDocument/2006/relationships" xmlns:p="http://schemas.openxmlformats.org/presentationml/2006/main" name="Office Theme">
   <a:themeElements>
     <a:clrScheme name="Office">
       <a:dk1>
@@ -3728,74 +4810,14 @@
     </a:clrScheme>
     <a:fontScheme name="Office">
       <a:majorFont>
-        <a:latin typeface="Calibri Light" panose="020F0302020204030204"/>
-        <a:ea typeface=""/>
-        <a:cs typeface=""/>
-        <a:font script="Jpan" typeface="游ゴシック Light"/>
-        <a:font script="Hang" typeface="맑은 고딕"/>
-        <a:font script="Hans" typeface="等线 Light"/>
-        <a:font script="Hant" typeface="新細明體"/>
-        <a:font script="Arab" typeface="Times New Roman"/>
-        <a:font script="Hebr" typeface="Times New Roman"/>
-        <a:font script="Thai" typeface="Angsana New"/>
-        <a:font script="Ethi" typeface="Nyala"/>
-        <a:font script="Beng" typeface="Vrinda"/>
-        <a:font script="Gujr" typeface="Shruti"/>
-        <a:font script="Khmr" typeface="MoolBoran"/>
-        <a:font script="Knda" typeface="Tunga"/>
-        <a:font script="Guru" typeface="Raavi"/>
-        <a:font script="Cans" typeface="Euphemia"/>
-        <a:font script="Cher" typeface="Plantagenet Cherokee"/>
-        <a:font script="Yiii" typeface="Microsoft Yi Baiti"/>
-        <a:font script="Tibt" typeface="Microsoft Himalaya"/>
-        <a:font script="Thaa" typeface="MV Boli"/>
-        <a:font script="Deva" typeface="Mangal"/>
-        <a:font script="Telu" typeface="Gautami"/>
-        <a:font script="Taml" typeface="Latha"/>
-        <a:font script="Syrc" typeface="Estrangelo Edessa"/>
-        <a:font script="Orya" typeface="Kalinga"/>
-        <a:font script="Mlym" typeface="Kartika"/>
-        <a:font script="Laoo" typeface="DokChampa"/>
-        <a:font script="Sinh" typeface="Iskoola Pota"/>
-        <a:font script="Mong" typeface="Mongolian Baiti"/>
-        <a:font script="Viet" typeface="Times New Roman"/>
-        <a:font script="Uigh" typeface="Microsoft Uighur"/>
-        <a:font script="Geor" typeface="Sylfaen"/>
+        <a:latin typeface="Calibri Light"/>
+        <a:ea typeface="Arial"/>
+        <a:cs typeface="Arial"/>
       </a:majorFont>
       <a:minorFont>
-        <a:latin typeface="Calibri" panose="020F0502020204030204"/>
-        <a:ea typeface=""/>
-        <a:cs typeface=""/>
-        <a:font script="Jpan" typeface="游ゴシック"/>
-        <a:font script="Hang" typeface="맑은 고딕"/>
-        <a:font script="Hans" typeface="等线"/>
-        <a:font script="Hant" typeface="新細明體"/>
-        <a:font script="Arab" typeface="Arial"/>
-        <a:font script="Hebr" typeface="Arial"/>
-        <a:font script="Thai" typeface="Cordia New"/>
-        <a:font script="Ethi" typeface="Nyala"/>
-        <a:font script="Beng" typeface="Vrinda"/>
-        <a:font script="Gujr" typeface="Shruti"/>
-        <a:font script="Khmr" typeface="DaunPenh"/>
-        <a:font script="Knda" typeface="Tunga"/>
-        <a:font script="Guru" typeface="Raavi"/>
-        <a:font script="Cans" typeface="Euphemia"/>
-        <a:font script="Cher" typeface="Plantagenet Cherokee"/>
-        <a:font script="Yiii" typeface="Microsoft Yi Baiti"/>
-        <a:font script="Tibt" typeface="Microsoft Himalaya"/>
-        <a:font script="Thaa" typeface="MV Boli"/>
-        <a:font script="Deva" typeface="Mangal"/>
-        <a:font script="Telu" typeface="Gautami"/>
-        <a:font script="Taml" typeface="Latha"/>
-        <a:font script="Syrc" typeface="Estrangelo Edessa"/>
-        <a:font script="Orya" typeface="Kalinga"/>
-        <a:font script="Mlym" typeface="Kartika"/>
-        <a:font script="Laoo" typeface="DokChampa"/>
-        <a:font script="Sinh" typeface="Iskoola Pota"/>
-        <a:font script="Mong" typeface="Mongolian Baiti"/>
-        <a:font script="Viet" typeface="Arial"/>
-        <a:font script="Uigh" typeface="Microsoft Uighur"/>
-        <a:font script="Geor" typeface="Sylfaen"/>
+        <a:latin typeface="Calibri"/>
+        <a:ea typeface="Arial"/>
+        <a:cs typeface="Arial"/>
       </a:minorFont>
     </a:fontScheme>
     <a:fmtScheme name="Office">
@@ -3803,7 +4825,7 @@
         <a:solidFill>
           <a:schemeClr val="phClr"/>
         </a:solidFill>
-        <a:gradFill rotWithShape="1">
+        <a:gradFill>
           <a:gsLst>
             <a:gs pos="0">
               <a:schemeClr val="phClr">
@@ -3829,7 +4851,7 @@
           </a:gsLst>
           <a:lin ang="5400000" scaled="0"/>
         </a:gradFill>
-        <a:gradFill rotWithShape="1">
+        <a:gradFill>
           <a:gsLst>
             <a:gs pos="0">
               <a:schemeClr val="phClr">
@@ -3906,7 +4928,7 @@
             <a:satMod val="170000"/>
           </a:schemeClr>
         </a:solidFill>
-        <a:gradFill rotWithShape="1">
+        <a:gradFill>
           <a:gsLst>
             <a:gs pos="0">
               <a:schemeClr val="phClr">
@@ -3937,11 +4959,200 @@
     </a:fmtScheme>
   </a:themeElements>
   <a:objectDefaults/>
-  <a:extraClrSchemeLst/>
-  <a:extLst>
-    <a:ext uri="{05A4C25C-085E-4340-85A3-A5531E510DB2}">
-      <thm15:themeFamily xmlns:thm15="http://schemas.microsoft.com/office/thememl/2012/main" name="Office Theme" id="{62F939B6-93AF-4DB8-9C6B-D6C7DFDC589F}" vid="{4A3C46E8-61CC-4603-A589-7422A47A8E4A}"/>
-    </a:ext>
-  </a:extLst>
+</a:theme>
+</file>
+
+<file path=ppt/theme/theme2.xml><?xml version="1.0" encoding="utf-8"?>
+<a:theme xmlns:a="http://schemas.openxmlformats.org/drawingml/2006/main" xmlns:r="http://schemas.openxmlformats.org/officeDocument/2006/relationships" xmlns:p="http://schemas.openxmlformats.org/presentationml/2006/main" name="Office Theme">
+  <a:themeElements>
+    <a:clrScheme name="Office">
+      <a:dk1>
+        <a:sysClr val="windowText" lastClr="000000"/>
+      </a:dk1>
+      <a:lt1>
+        <a:sysClr val="window" lastClr="FFFFFF"/>
+      </a:lt1>
+      <a:dk2>
+        <a:srgbClr val="44546A"/>
+      </a:dk2>
+      <a:lt2>
+        <a:srgbClr val="E7E6E6"/>
+      </a:lt2>
+      <a:accent1>
+        <a:srgbClr val="5B9BD5"/>
+      </a:accent1>
+      <a:accent2>
+        <a:srgbClr val="ED7D31"/>
+      </a:accent2>
+      <a:accent3>
+        <a:srgbClr val="A5A5A5"/>
+      </a:accent3>
+      <a:accent4>
+        <a:srgbClr val="FFC000"/>
+      </a:accent4>
+      <a:accent5>
+        <a:srgbClr val="4472C4"/>
+      </a:accent5>
+      <a:accent6>
+        <a:srgbClr val="70AD47"/>
+      </a:accent6>
+      <a:hlink>
+        <a:srgbClr val="0563C1"/>
+      </a:hlink>
+      <a:folHlink>
+        <a:srgbClr val="954F72"/>
+      </a:folHlink>
+    </a:clrScheme>
+    <a:fontScheme name="">
+      <a:majorFont>
+        <a:latin typeface="Calibri Light"/>
+        <a:ea typeface="Arial"/>
+        <a:cs typeface="Arial"/>
+      </a:majorFont>
+      <a:minorFont>
+        <a:latin typeface="Calibri"/>
+        <a:ea typeface="Arial"/>
+        <a:cs typeface="Arial"/>
+      </a:minorFont>
+    </a:fontScheme>
+    <a:fmtScheme name="Office">
+      <a:fillStyleLst>
+        <a:solidFill>
+          <a:schemeClr val="phClr"/>
+        </a:solidFill>
+        <a:gradFill>
+          <a:gsLst>
+            <a:gs pos="0">
+              <a:schemeClr val="phClr">
+                <a:lumMod val="110000"/>
+                <a:satMod val="105000"/>
+                <a:tint val="67000"/>
+              </a:schemeClr>
+            </a:gs>
+            <a:gs pos="50000">
+              <a:schemeClr val="phClr">
+                <a:lumMod val="105000"/>
+                <a:satMod val="103000"/>
+                <a:tint val="73000"/>
+              </a:schemeClr>
+            </a:gs>
+            <a:gs pos="100000">
+              <a:schemeClr val="phClr">
+                <a:lumMod val="105000"/>
+                <a:satMod val="109000"/>
+                <a:tint val="81000"/>
+              </a:schemeClr>
+            </a:gs>
+          </a:gsLst>
+          <a:lin ang="5400000" scaled="0"/>
+        </a:gradFill>
+        <a:gradFill>
+          <a:gsLst>
+            <a:gs pos="0">
+              <a:schemeClr val="phClr">
+                <a:satMod val="103000"/>
+                <a:lumMod val="102000"/>
+                <a:tint val="94000"/>
+              </a:schemeClr>
+            </a:gs>
+            <a:gs pos="50000">
+              <a:schemeClr val="phClr">
+                <a:satMod val="110000"/>
+                <a:lumMod val="100000"/>
+                <a:shade val="100000"/>
+              </a:schemeClr>
+            </a:gs>
+            <a:gs pos="100000">
+              <a:schemeClr val="phClr">
+                <a:lumMod val="99000"/>
+                <a:satMod val="120000"/>
+                <a:shade val="78000"/>
+              </a:schemeClr>
+            </a:gs>
+          </a:gsLst>
+          <a:lin ang="5400000" scaled="0"/>
+        </a:gradFill>
+      </a:fillStyleLst>
+      <a:lnStyleLst>
+        <a:ln w="6350" cap="flat" cmpd="sng" algn="ctr">
+          <a:solidFill>
+            <a:schemeClr val="phClr"/>
+          </a:solidFill>
+          <a:prstDash val="solid"/>
+          <a:miter lim="800000"/>
+        </a:ln>
+        <a:ln w="12700" cap="flat" cmpd="sng" algn="ctr">
+          <a:solidFill>
+            <a:schemeClr val="phClr"/>
+          </a:solidFill>
+          <a:prstDash val="solid"/>
+          <a:miter lim="800000"/>
+        </a:ln>
+        <a:ln w="19050" cap="flat" cmpd="sng" algn="ctr">
+          <a:solidFill>
+            <a:schemeClr val="phClr"/>
+          </a:solidFill>
+          <a:prstDash val="solid"/>
+          <a:miter lim="800000"/>
+        </a:ln>
+      </a:lnStyleLst>
+      <a:effectStyleLst>
+        <a:effectStyle>
+          <a:effectLst/>
+        </a:effectStyle>
+        <a:effectStyle>
+          <a:effectLst/>
+        </a:effectStyle>
+        <a:effectStyle>
+          <a:effectLst>
+            <a:outerShdw blurRad="57150" dist="19050" dir="5400000" algn="ctr" rotWithShape="0">
+              <a:srgbClr val="000000">
+                <a:alpha val="63000"/>
+              </a:srgbClr>
+            </a:outerShdw>
+          </a:effectLst>
+        </a:effectStyle>
+      </a:effectStyleLst>
+      <a:bgFillStyleLst>
+        <a:solidFill>
+          <a:schemeClr val="phClr"/>
+        </a:solidFill>
+        <a:solidFill>
+          <a:schemeClr val="phClr">
+            <a:tint val="95000"/>
+            <a:satMod val="170000"/>
+          </a:schemeClr>
+        </a:solidFill>
+        <a:gradFill>
+          <a:gsLst>
+            <a:gs pos="0">
+              <a:schemeClr val="phClr">
+                <a:tint val="93000"/>
+                <a:satMod val="150000"/>
+                <a:shade val="98000"/>
+                <a:lumMod val="102000"/>
+              </a:schemeClr>
+            </a:gs>
+            <a:gs pos="50000">
+              <a:schemeClr val="phClr">
+                <a:tint val="98000"/>
+                <a:satMod val="130000"/>
+                <a:shade val="90000"/>
+                <a:lumMod val="103000"/>
+              </a:schemeClr>
+            </a:gs>
+            <a:gs pos="100000">
+              <a:schemeClr val="phClr">
+                <a:shade val="63000"/>
+                <a:satMod val="120000"/>
+              </a:schemeClr>
+            </a:gs>
+          </a:gsLst>
+          <a:lin ang="5400000" scaled="0"/>
+        </a:gradFill>
+      </a:bgFillStyleLst>
+    </a:fmtScheme>
+  </a:themeElements>
+  <a:objectDefaults/>
 </a:theme>
 </file>